--- a/materiali_aula/Lezione2_Prompting_e_Pratica_ITS_MAKER.pptx
+++ b/materiali_aula/Lezione2_Prompting_e_Pratica_ITS_MAKER.pptx
@@ -4,6 +4,9 @@
   <p:sldMasterIdLst>
     <p:sldMasterId id="2147483648" r:id="rId1"/>
   </p:sldMasterIdLst>
+  <p:notesMasterIdLst>
+    <p:notesMasterId r:id="rId43"/>
+  </p:notesMasterIdLst>
   <p:sldIdLst>
     <p:sldId id="256" r:id="rId7"/>
     <p:sldId id="257" r:id="rId8"/>
@@ -23,13 +26,10 @@
     <p:sldId id="271" r:id="rId22"/>
     <p:sldId id="272" r:id="rId23"/>
   </p:sldIdLst>
-  <p:sldSz cx="12191695" cy="6858000" type="screen4x3"/>
-  <p:notesSz cx="6858000" cy="9144000"/>
+  <p:sldSz cx="12192000" cy="7620000"/>
+  <p:notesSz cx="7620000" cy="12192000"/>
   <p:defaultTextStyle>
-    <a:defPPr>
-      <a:defRPr lang="en-US"/>
-    </a:defPPr>
-    <a:lvl1pPr marL="0" algn="l" defTabSz="457200" rtl="0" eaLnBrk="1" latinLnBrk="0" hangingPunct="1">
+    <a:lvl1pPr marL="0" algn="l" defTabSz="914400" rtl="0" eaLnBrk="1" latinLnBrk="0" hangingPunct="1">
       <a:defRPr sz="1800" kern="1200">
         <a:solidFill>
           <a:schemeClr val="tx1"/>
@@ -39,7 +39,7 @@
         <a:cs typeface="+mn-cs"/>
       </a:defRPr>
     </a:lvl1pPr>
-    <a:lvl2pPr marL="457200" algn="l" defTabSz="457200" rtl="0" eaLnBrk="1" latinLnBrk="0" hangingPunct="1">
+    <a:lvl2pPr marL="457200" algn="l" defTabSz="914400" rtl="0" eaLnBrk="1" latinLnBrk="0" hangingPunct="1">
       <a:defRPr sz="1800" kern="1200">
         <a:solidFill>
           <a:schemeClr val="tx1"/>
@@ -49,7 +49,7 @@
         <a:cs typeface="+mn-cs"/>
       </a:defRPr>
     </a:lvl2pPr>
-    <a:lvl3pPr marL="914400" algn="l" defTabSz="457200" rtl="0" eaLnBrk="1" latinLnBrk="0" hangingPunct="1">
+    <a:lvl3pPr marL="914400" algn="l" defTabSz="914400" rtl="0" eaLnBrk="1" latinLnBrk="0" hangingPunct="1">
       <a:defRPr sz="1800" kern="1200">
         <a:solidFill>
           <a:schemeClr val="tx1"/>
@@ -59,7 +59,7 @@
         <a:cs typeface="+mn-cs"/>
       </a:defRPr>
     </a:lvl3pPr>
-    <a:lvl4pPr marL="1371600" algn="l" defTabSz="457200" rtl="0" eaLnBrk="1" latinLnBrk="0" hangingPunct="1">
+    <a:lvl4pPr marL="1371600" algn="l" defTabSz="914400" rtl="0" eaLnBrk="1" latinLnBrk="0" hangingPunct="1">
       <a:defRPr sz="1800" kern="1200">
         <a:solidFill>
           <a:schemeClr val="tx1"/>
@@ -69,7 +69,7 @@
         <a:cs typeface="+mn-cs"/>
       </a:defRPr>
     </a:lvl4pPr>
-    <a:lvl5pPr marL="1828800" algn="l" defTabSz="457200" rtl="0" eaLnBrk="1" latinLnBrk="0" hangingPunct="1">
+    <a:lvl5pPr marL="1828800" algn="l" defTabSz="914400" rtl="0" eaLnBrk="1" latinLnBrk="0" hangingPunct="1">
       <a:defRPr sz="1800" kern="1200">
         <a:solidFill>
           <a:schemeClr val="tx1"/>
@@ -79,7 +79,7 @@
         <a:cs typeface="+mn-cs"/>
       </a:defRPr>
     </a:lvl5pPr>
-    <a:lvl6pPr marL="2286000" algn="l" defTabSz="457200" rtl="0" eaLnBrk="1" latinLnBrk="0" hangingPunct="1">
+    <a:lvl6pPr marL="2286000" algn="l" defTabSz="914400" rtl="0" eaLnBrk="1" latinLnBrk="0" hangingPunct="1">
       <a:defRPr sz="1800" kern="1200">
         <a:solidFill>
           <a:schemeClr val="tx1"/>
@@ -89,7 +89,7 @@
         <a:cs typeface="+mn-cs"/>
       </a:defRPr>
     </a:lvl6pPr>
-    <a:lvl7pPr marL="2743200" algn="l" defTabSz="457200" rtl="0" eaLnBrk="1" latinLnBrk="0" hangingPunct="1">
+    <a:lvl7pPr marL="2743200" algn="l" defTabSz="914400" rtl="0" eaLnBrk="1" latinLnBrk="0" hangingPunct="1">
       <a:defRPr sz="1800" kern="1200">
         <a:solidFill>
           <a:schemeClr val="tx1"/>
@@ -99,7 +99,7 @@
         <a:cs typeface="+mn-cs"/>
       </a:defRPr>
     </a:lvl7pPr>
-    <a:lvl8pPr marL="3200400" algn="l" defTabSz="457200" rtl="0" eaLnBrk="1" latinLnBrk="0" hangingPunct="1">
+    <a:lvl8pPr marL="3200400" algn="l" defTabSz="914400" rtl="0" eaLnBrk="1" latinLnBrk="0" hangingPunct="1">
       <a:defRPr sz="1800" kern="1200">
         <a:solidFill>
           <a:schemeClr val="tx1"/>
@@ -109,7 +109,7 @@
         <a:cs typeface="+mn-cs"/>
       </a:defRPr>
     </a:lvl8pPr>
-    <a:lvl9pPr marL="3657600" algn="l" defTabSz="457200" rtl="0" eaLnBrk="1" latinLnBrk="0" hangingPunct="1">
+    <a:lvl9pPr marL="3657600" algn="l" defTabSz="914400" rtl="0" eaLnBrk="1" latinLnBrk="0" hangingPunct="1">
       <a:defRPr sz="1800" kern="1200">
         <a:solidFill>
           <a:schemeClr val="tx1"/>
@@ -120,12 +120,103 @@
       </a:defRPr>
     </a:lvl9pPr>
   </p:defaultTextStyle>
+  <p:extLst>
+    <p:ext uri="{521415D9-36F7-43E2-AB2F-B90AF26B5E84}">
+      <p14:sectionLst xmlns:p14="http://schemas.microsoft.com/office/powerpoint/2010/main">
+        <p14:section name="Apertura" id="{4CCD0568-0264-2377-25D1-58D120249265}">
+          <p14:sldIdLst>
+            <p14:sldId id="256"/>
+            <p14:sldId id="257"/>
+            <p14:sldId id="258"/>
+          </p14:sldIdLst>
+        </p14:section>
+        <p14:section name="Digitalizzare un processo" id="{878B3D7C-64F0-58C9-07F3-52FCCD6E6EB1}">
+          <p14:sldIdLst>
+            <p14:sldId id="259"/>
+            <p14:sldId id="260"/>
+            <p14:sldId id="261"/>
+            <p14:sldId id="262"/>
+            <p14:sldId id="263"/>
+          </p14:sldIdLst>
+        </p14:section>
+        <p14:section name="Uomo o macchina?" id="{B44EFE08-53DB-407B-45F2-98EE1A2C7ECD}">
+          <p14:sldIdLst>
+            <p14:sldId id="264"/>
+            <p14:sldId id="265"/>
+            <p14:sldId id="266"/>
+            <p14:sldId id="267"/>
+            <p14:sldId id="268"/>
+            <p14:sldId id="269"/>
+          </p14:sldIdLst>
+        </p14:section>
+        <p14:section name="Gli LLM" id="{044C1279-1819-91CA-97F5-27AF6CED767D}">
+          <p14:sldIdLst>
+            <p14:sldId id="270"/>
+            <p14:sldId id="271"/>
+            <p14:sldId id="272"/>
+            <p14:sldId id="273"/>
+            <p14:sldId id="274"/>
+          </p14:sldIdLst>
+        </p14:section>
+        <p14:section name="Architetture" id="{BCE5A2DE-635F-3714-F95D-4F343FCA72C4}">
+          <p14:sldIdLst>
+            <p14:sldId id="275"/>
+            <p14:sldId id="276"/>
+            <p14:sldId id="277"/>
+            <p14:sldId id="278"/>
+            <p14:sldId id="279"/>
+          </p14:sldIdLst>
+        </p14:section>
+        <p14:section name="RAG" id="{B7BC7141-CDC7-8D3E-391E-1A26BCAFBD29}">
+          <p14:sldIdLst>
+            <p14:sldId id="280"/>
+            <p14:sldId id="281"/>
+            <p14:sldId id="282"/>
+            <p14:sldId id="283"/>
+            <p14:sldId id="284"/>
+          </p14:sldIdLst>
+        </p14:section>
+        <p14:section name="Token e parametri" id="{A1F2687F-21EE-34B2-E996-1053CE68D2C6}">
+          <p14:sldIdLst>
+            <p14:sldId id="285"/>
+            <p14:sldId id="286"/>
+            <p14:sldId id="287"/>
+            <p14:sldId id="288"/>
+            <p14:sldId id="289"/>
+          </p14:sldIdLst>
+        </p14:section>
+        <p14:section name="Prompting" id="{9F8BEFD9-49C5-EBA1-B004-BCC0FCBA719C}">
+          <p14:sldIdLst>
+            <p14:sldId id="290"/>
+            <p14:sldId id="291"/>
+            <p14:sldId id="292"/>
+            <p14:sldId id="293"/>
+            <p14:sldId id="294"/>
+          </p14:sldIdLst>
+        </p14:section>
+        <p14:section name="Chiusura" id="{CB96B4A7-3DCD-29F7-E607-8538567A9FE4}">
+          <p14:sldIdLst>
+            <p14:sldId id="295"/>
+            <p14:sldId id="296"/>
+          </p14:sldIdLst>
+        </p14:section>
+      </p14:sectionLst>
+    </p:ext>
+    <p:ext uri="{EFAFB233-063F-42B5-8137-9DF3F51BA10A}">
+      <p15:sldGuideLst xmlns:p15="http://schemas.microsoft.com/office/powerpoint/2012/main"/>
+    </p:ext>
+  </p:extLst>
 </p:presentation>
 </file>
 
-<file path=ppt/slideLayouts/slideLayout1.xml><?xml version="1.0" encoding="utf-8"?>
-<p:sldLayout xmlns:a="http://schemas.openxmlformats.org/drawingml/2006/main" xmlns:r="http://schemas.openxmlformats.org/officeDocument/2006/relationships" xmlns:p="http://schemas.openxmlformats.org/presentationml/2006/main" type="title" preserve="1">
-  <p:cSld name="Title Slide">
+<file path=ppt/notesMasters/notesMaster1.xml><?xml version="1.0" encoding="utf-8"?>
+<p:notesMaster xmlns:a="http://schemas.openxmlformats.org/drawingml/2006/main" xmlns:r="http://schemas.openxmlformats.org/officeDocument/2006/relationships" xmlns:p="http://schemas.openxmlformats.org/presentationml/2006/main">
+  <p:cSld>
+    <p:bg>
+      <p:bgRef idx="1001">
+        <a:schemeClr val="bg1"/>
+      </p:bgRef>
+    </p:bg>
     <p:spTree>
       <p:nvGrpSpPr>
         <p:cNvPr id="1" name=""/>
@@ -140,234 +231,117 @@
           <a:chExt cx="0" cy="0"/>
         </a:xfrm>
       </p:grpSpPr>
-      <p:sp>
-        <p:nvSpPr>
-          <p:cNvPr id="2" name="Title 1"/>
-          <p:cNvSpPr>
-            <a:spLocks noGrp="1"/>
-          </p:cNvSpPr>
-          <p:nvPr>
-            <p:ph type="ctrTitle"/>
-          </p:nvPr>
-        </p:nvSpPr>
-        <p:spPr>
-          <a:xfrm>
-            <a:off x="685800" y="2130425"/>
-            <a:ext cx="7772400" cy="1470025"/>
-          </a:xfrm>
-        </p:spPr>
-        <p:txBody>
-          <a:bodyPr/>
-          <a:lstStyle/>
-          <a:p>
-            <a:r>
-              <a:rPr lang="en-US" smtClean="0"/>
-              <a:t>Click to edit Master title style</a:t>
-            </a:r>
-            <a:endParaRPr lang="en-US"/>
-          </a:p>
-        </p:txBody>
-      </p:sp>
-      <p:sp>
-        <p:nvSpPr>
-          <p:cNvPr id="3" name="Subtitle 2"/>
-          <p:cNvSpPr>
-            <a:spLocks noGrp="1"/>
-          </p:cNvSpPr>
-          <p:nvPr>
-            <p:ph type="subTitle" idx="1"/>
-          </p:nvPr>
-        </p:nvSpPr>
-        <p:spPr>
-          <a:xfrm>
-            <a:off x="1371600" y="3886200"/>
-            <a:ext cx="6400800" cy="1752600"/>
-          </a:xfrm>
-        </p:spPr>
-        <p:txBody>
-          <a:bodyPr/>
-          <a:lstStyle>
-            <a:lvl1pPr marL="0" indent="0" algn="ctr">
-              <a:buNone/>
-              <a:defRPr>
-                <a:solidFill>
-                  <a:schemeClr val="tx1">
-                    <a:tint val="75000"/>
-                  </a:schemeClr>
-                </a:solidFill>
-              </a:defRPr>
-            </a:lvl1pPr>
-            <a:lvl2pPr marL="457200" indent="0" algn="ctr">
-              <a:buNone/>
-              <a:defRPr>
-                <a:solidFill>
-                  <a:schemeClr val="tx1">
-                    <a:tint val="75000"/>
-                  </a:schemeClr>
-                </a:solidFill>
-              </a:defRPr>
-            </a:lvl2pPr>
-            <a:lvl3pPr marL="914400" indent="0" algn="ctr">
-              <a:buNone/>
-              <a:defRPr>
-                <a:solidFill>
-                  <a:schemeClr val="tx1">
-                    <a:tint val="75000"/>
-                  </a:schemeClr>
-                </a:solidFill>
-              </a:defRPr>
-            </a:lvl3pPr>
-            <a:lvl4pPr marL="1371600" indent="0" algn="ctr">
-              <a:buNone/>
-              <a:defRPr>
-                <a:solidFill>
-                  <a:schemeClr val="tx1">
-                    <a:tint val="75000"/>
-                  </a:schemeClr>
-                </a:solidFill>
-              </a:defRPr>
-            </a:lvl4pPr>
-            <a:lvl5pPr marL="1828800" indent="0" algn="ctr">
-              <a:buNone/>
-              <a:defRPr>
-                <a:solidFill>
-                  <a:schemeClr val="tx1">
-                    <a:tint val="75000"/>
-                  </a:schemeClr>
-                </a:solidFill>
-              </a:defRPr>
-            </a:lvl5pPr>
-            <a:lvl6pPr marL="2286000" indent="0" algn="ctr">
-              <a:buNone/>
-              <a:defRPr>
-                <a:solidFill>
-                  <a:schemeClr val="tx1">
-                    <a:tint val="75000"/>
-                  </a:schemeClr>
-                </a:solidFill>
-              </a:defRPr>
-            </a:lvl6pPr>
-            <a:lvl7pPr marL="2743200" indent="0" algn="ctr">
-              <a:buNone/>
-              <a:defRPr>
-                <a:solidFill>
-                  <a:schemeClr val="tx1">
-                    <a:tint val="75000"/>
-                  </a:schemeClr>
-                </a:solidFill>
-              </a:defRPr>
-            </a:lvl7pPr>
-            <a:lvl8pPr marL="3200400" indent="0" algn="ctr">
-              <a:buNone/>
-              <a:defRPr>
-                <a:solidFill>
-                  <a:schemeClr val="tx1">
-                    <a:tint val="75000"/>
-                  </a:schemeClr>
-                </a:solidFill>
-              </a:defRPr>
-            </a:lvl8pPr>
-            <a:lvl9pPr marL="3657600" indent="0" algn="ctr">
-              <a:buNone/>
-              <a:defRPr>
-                <a:solidFill>
-                  <a:schemeClr val="tx1">
-                    <a:tint val="75000"/>
-                  </a:schemeClr>
-                </a:solidFill>
-              </a:defRPr>
-            </a:lvl9pPr>
-          </a:lstStyle>
-          <a:p>
-            <a:r>
-              <a:rPr lang="en-US" smtClean="0"/>
-              <a:t>Click to edit Master subtitle style</a:t>
-            </a:r>
-            <a:endParaRPr lang="en-US"/>
-          </a:p>
-        </p:txBody>
-      </p:sp>
-      <p:sp>
-        <p:nvSpPr>
-          <p:cNvPr id="4" name="Date Placeholder 3"/>
-          <p:cNvSpPr>
-            <a:spLocks noGrp="1"/>
-          </p:cNvSpPr>
-          <p:nvPr>
-            <p:ph type="dt" sz="half" idx="10"/>
-          </p:nvPr>
-        </p:nvSpPr>
-        <p:spPr/>
-        <p:txBody>
-          <a:bodyPr/>
-          <a:lstStyle/>
-          <a:p>
-            <a:fld id="{5BCAD085-E8A6-8845-BD4E-CB4CCA059FC4}" type="datetimeFigureOut">
-              <a:rPr lang="en-US" smtClean="0"/>
-              <a:t>1/27/13</a:t>
-            </a:fld>
-            <a:endParaRPr lang="en-US"/>
-          </a:p>
-        </p:txBody>
-      </p:sp>
-      <p:sp>
-        <p:nvSpPr>
-          <p:cNvPr id="5" name="Footer Placeholder 4"/>
-          <p:cNvSpPr>
-            <a:spLocks noGrp="1"/>
-          </p:cNvSpPr>
-          <p:nvPr>
-            <p:ph type="ftr" sz="quarter" idx="11"/>
-          </p:nvPr>
-        </p:nvSpPr>
-        <p:spPr/>
-        <p:txBody>
-          <a:bodyPr/>
-          <a:lstStyle/>
-          <a:p>
-            <a:endParaRPr lang="en-US"/>
-          </a:p>
-        </p:txBody>
-      </p:sp>
-      <p:sp>
-        <p:nvSpPr>
-          <p:cNvPr id="6" name="Slide Number Placeholder 5"/>
-          <p:cNvSpPr>
-            <a:spLocks noGrp="1"/>
-          </p:cNvSpPr>
-          <p:nvPr>
-            <p:ph type="sldNum" sz="quarter" idx="12"/>
-          </p:nvPr>
-        </p:nvSpPr>
-        <p:spPr/>
-        <p:txBody>
-          <a:bodyPr/>
-          <a:lstStyle/>
-          <a:p>
-            <a:fld id="{C1FF6DA9-008F-8B48-92A6-B652298478BF}" type="slidenum">
-              <a:rPr lang="en-US" smtClean="0"/>
-              <a:t>‹#›</a:t>
-            </a:fld>
-            <a:endParaRPr lang="en-US"/>
-          </a:p>
-        </p:txBody>
-      </p:sp>
     </p:spTree>
     <p:extLst>
       <p:ext uri="{BB962C8B-B14F-4D97-AF65-F5344CB8AC3E}">
-        <p14:creationId xmlns:p14="http://schemas.microsoft.com/office/powerpoint/2010/main" val="3168075583"/>
+        <p14:creationId xmlns:p14="http://schemas.microsoft.com/office/powerpoint/2010/main" val="515160836"/>
       </p:ext>
     </p:extLst>
   </p:cSld>
-  <p:clrMapOvr>
-    <a:masterClrMapping/>
-  </p:clrMapOvr>
-</p:sldLayout>
+  <p:clrMap bg1="lt1" tx1="dk1" bg2="lt2" tx2="dk2" accent1="accent1" accent2="accent2" accent3="accent3" accent4="accent4" accent5="accent5" accent6="accent6" hlink="hlink" folHlink="folHlink"/>
+  <p:notesStyle>
+    <a:lvl1pPr marL="0" algn="l" defTabSz="914400" rtl="0" eaLnBrk="1" latinLnBrk="0" hangingPunct="1">
+      <a:defRPr sz="1200" kern="1200">
+        <a:solidFill>
+          <a:schemeClr val="tx1"/>
+        </a:solidFill>
+        <a:latin typeface="+mn-lt"/>
+        <a:ea typeface="+mn-ea"/>
+        <a:cs typeface="+mn-cs"/>
+      </a:defRPr>
+    </a:lvl1pPr>
+    <a:lvl2pPr marL="457200" algn="l" defTabSz="914400" rtl="0" eaLnBrk="1" latinLnBrk="0" hangingPunct="1">
+      <a:defRPr sz="1200" kern="1200">
+        <a:solidFill>
+          <a:schemeClr val="tx1"/>
+        </a:solidFill>
+        <a:latin typeface="+mn-lt"/>
+        <a:ea typeface="+mn-ea"/>
+        <a:cs typeface="+mn-cs"/>
+      </a:defRPr>
+    </a:lvl2pPr>
+    <a:lvl3pPr marL="914400" algn="l" defTabSz="914400" rtl="0" eaLnBrk="1" latinLnBrk="0" hangingPunct="1">
+      <a:defRPr sz="1200" kern="1200">
+        <a:solidFill>
+          <a:schemeClr val="tx1"/>
+        </a:solidFill>
+        <a:latin typeface="+mn-lt"/>
+        <a:ea typeface="+mn-ea"/>
+        <a:cs typeface="+mn-cs"/>
+      </a:defRPr>
+    </a:lvl3pPr>
+    <a:lvl4pPr marL="1371600" algn="l" defTabSz="914400" rtl="0" eaLnBrk="1" latinLnBrk="0" hangingPunct="1">
+      <a:defRPr sz="1200" kern="1200">
+        <a:solidFill>
+          <a:schemeClr val="tx1"/>
+        </a:solidFill>
+        <a:latin typeface="+mn-lt"/>
+        <a:ea typeface="+mn-ea"/>
+        <a:cs typeface="+mn-cs"/>
+      </a:defRPr>
+    </a:lvl4pPr>
+    <a:lvl5pPr marL="1828800" algn="l" defTabSz="914400" rtl="0" eaLnBrk="1" latinLnBrk="0" hangingPunct="1">
+      <a:defRPr sz="1200" kern="1200">
+        <a:solidFill>
+          <a:schemeClr val="tx1"/>
+        </a:solidFill>
+        <a:latin typeface="+mn-lt"/>
+        <a:ea typeface="+mn-ea"/>
+        <a:cs typeface="+mn-cs"/>
+      </a:defRPr>
+    </a:lvl5pPr>
+    <a:lvl6pPr marL="2286000" algn="l" defTabSz="914400" rtl="0" eaLnBrk="1" latinLnBrk="0" hangingPunct="1">
+      <a:defRPr sz="1200" kern="1200">
+        <a:solidFill>
+          <a:schemeClr val="tx1"/>
+        </a:solidFill>
+        <a:latin typeface="+mn-lt"/>
+        <a:ea typeface="+mn-ea"/>
+        <a:cs typeface="+mn-cs"/>
+      </a:defRPr>
+    </a:lvl6pPr>
+    <a:lvl7pPr marL="2743200" algn="l" defTabSz="914400" rtl="0" eaLnBrk="1" latinLnBrk="0" hangingPunct="1">
+      <a:defRPr sz="1200" kern="1200">
+        <a:solidFill>
+          <a:schemeClr val="tx1"/>
+        </a:solidFill>
+        <a:latin typeface="+mn-lt"/>
+        <a:ea typeface="+mn-ea"/>
+        <a:cs typeface="+mn-cs"/>
+      </a:defRPr>
+    </a:lvl7pPr>
+    <a:lvl8pPr marL="3200400" algn="l" defTabSz="914400" rtl="0" eaLnBrk="1" latinLnBrk="0" hangingPunct="1">
+      <a:defRPr sz="1200" kern="1200">
+        <a:solidFill>
+          <a:schemeClr val="tx1"/>
+        </a:solidFill>
+        <a:latin typeface="+mn-lt"/>
+        <a:ea typeface="+mn-ea"/>
+        <a:cs typeface="+mn-cs"/>
+      </a:defRPr>
+    </a:lvl8pPr>
+    <a:lvl9pPr marL="3657600" algn="l" defTabSz="914400" rtl="0" eaLnBrk="1" latinLnBrk="0" hangingPunct="1">
+      <a:defRPr sz="1200" kern="1200">
+        <a:solidFill>
+          <a:schemeClr val="tx1"/>
+        </a:solidFill>
+        <a:latin typeface="+mn-lt"/>
+        <a:ea typeface="+mn-ea"/>
+        <a:cs typeface="+mn-cs"/>
+      </a:defRPr>
+    </a:lvl9pPr>
+  </p:notesStyle>
+</p:notesMaster>
 </file>
 
-<file path=ppt/slideLayouts/slideLayout10.xml><?xml version="1.0" encoding="utf-8"?>
-<p:sldLayout xmlns:a="http://schemas.openxmlformats.org/drawingml/2006/main" xmlns:r="http://schemas.openxmlformats.org/officeDocument/2006/relationships" xmlns:p="http://schemas.openxmlformats.org/presentationml/2006/main" type="vertTx" preserve="1">
-  <p:cSld name="Title and Vertical Text">
+<file path=ppt/slideLayouts/slideLayout1.xml><?xml version="1.0" encoding="utf-8"?>
+<p:sldLayout xmlns:a="http://schemas.openxmlformats.org/drawingml/2006/main" xmlns:r="http://schemas.openxmlformats.org/officeDocument/2006/relationships" xmlns:p="http://schemas.openxmlformats.org/presentationml/2006/main" preserve="1">
+  <p:cSld name="DEFAULT">
+    <p:bg>
+      <p:bgRef idx="1001">
+        <a:schemeClr val="bg1"/>
+      </p:bgRef>
+    </p:bg>
     <p:spTree>
       <p:nvGrpSpPr>
         <p:cNvPr id="1" name=""/>
@@ -382,152 +356,7 @@
           <a:chExt cx="0" cy="0"/>
         </a:xfrm>
       </p:grpSpPr>
-      <p:sp>
-        <p:nvSpPr>
-          <p:cNvPr id="2" name="Title 1"/>
-          <p:cNvSpPr>
-            <a:spLocks noGrp="1"/>
-          </p:cNvSpPr>
-          <p:nvPr>
-            <p:ph type="title"/>
-          </p:nvPr>
-        </p:nvSpPr>
-        <p:spPr/>
-        <p:txBody>
-          <a:bodyPr/>
-          <a:lstStyle/>
-          <a:p>
-            <a:r>
-              <a:rPr lang="en-US" smtClean="0"/>
-              <a:t>Click to edit Master title style</a:t>
-            </a:r>
-            <a:endParaRPr lang="en-US"/>
-          </a:p>
-        </p:txBody>
-      </p:sp>
-      <p:sp>
-        <p:nvSpPr>
-          <p:cNvPr id="3" name="Vertical Text Placeholder 2"/>
-          <p:cNvSpPr>
-            <a:spLocks noGrp="1"/>
-          </p:cNvSpPr>
-          <p:nvPr>
-            <p:ph type="body" orient="vert" idx="1"/>
-          </p:nvPr>
-        </p:nvSpPr>
-        <p:spPr/>
-        <p:txBody>
-          <a:bodyPr vert="eaVert"/>
-          <a:lstStyle/>
-          <a:p>
-            <a:pPr lvl="0"/>
-            <a:r>
-              <a:rPr lang="en-US" smtClean="0"/>
-              <a:t>Click to edit Master text styles</a:t>
-            </a:r>
-          </a:p>
-          <a:p>
-            <a:pPr lvl="1"/>
-            <a:r>
-              <a:rPr lang="en-US" smtClean="0"/>
-              <a:t>Second level</a:t>
-            </a:r>
-          </a:p>
-          <a:p>
-            <a:pPr lvl="2"/>
-            <a:r>
-              <a:rPr lang="en-US" smtClean="0"/>
-              <a:t>Third level</a:t>
-            </a:r>
-          </a:p>
-          <a:p>
-            <a:pPr lvl="3"/>
-            <a:r>
-              <a:rPr lang="en-US" smtClean="0"/>
-              <a:t>Fourth level</a:t>
-            </a:r>
-          </a:p>
-          <a:p>
-            <a:pPr lvl="4"/>
-            <a:r>
-              <a:rPr lang="en-US" smtClean="0"/>
-              <a:t>Fifth level</a:t>
-            </a:r>
-            <a:endParaRPr lang="en-US"/>
-          </a:p>
-        </p:txBody>
-      </p:sp>
-      <p:sp>
-        <p:nvSpPr>
-          <p:cNvPr id="4" name="Date Placeholder 3"/>
-          <p:cNvSpPr>
-            <a:spLocks noGrp="1"/>
-          </p:cNvSpPr>
-          <p:nvPr>
-            <p:ph type="dt" sz="half" idx="10"/>
-          </p:nvPr>
-        </p:nvSpPr>
-        <p:spPr/>
-        <p:txBody>
-          <a:bodyPr/>
-          <a:lstStyle/>
-          <a:p>
-            <a:fld id="{5BCAD085-E8A6-8845-BD4E-CB4CCA059FC4}" type="datetimeFigureOut">
-              <a:rPr lang="en-US" smtClean="0"/>
-              <a:t>1/27/13</a:t>
-            </a:fld>
-            <a:endParaRPr lang="en-US"/>
-          </a:p>
-        </p:txBody>
-      </p:sp>
-      <p:sp>
-        <p:nvSpPr>
-          <p:cNvPr id="5" name="Footer Placeholder 4"/>
-          <p:cNvSpPr>
-            <a:spLocks noGrp="1"/>
-          </p:cNvSpPr>
-          <p:nvPr>
-            <p:ph type="ftr" sz="quarter" idx="11"/>
-          </p:nvPr>
-        </p:nvSpPr>
-        <p:spPr/>
-        <p:txBody>
-          <a:bodyPr/>
-          <a:lstStyle/>
-          <a:p>
-            <a:endParaRPr lang="en-US"/>
-          </a:p>
-        </p:txBody>
-      </p:sp>
-      <p:sp>
-        <p:nvSpPr>
-          <p:cNvPr id="6" name="Slide Number Placeholder 5"/>
-          <p:cNvSpPr>
-            <a:spLocks noGrp="1"/>
-          </p:cNvSpPr>
-          <p:nvPr>
-            <p:ph type="sldNum" sz="quarter" idx="12"/>
-          </p:nvPr>
-        </p:nvSpPr>
-        <p:spPr/>
-        <p:txBody>
-          <a:bodyPr/>
-          <a:lstStyle/>
-          <a:p>
-            <a:fld id="{C1FF6DA9-008F-8B48-92A6-B652298478BF}" type="slidenum">
-              <a:rPr lang="en-US" smtClean="0"/>
-              <a:t>‹#›</a:t>
-            </a:fld>
-            <a:endParaRPr lang="en-US"/>
-          </a:p>
-        </p:txBody>
-      </p:sp>
     </p:spTree>
-    <p:extLst>
-      <p:ext uri="{BB962C8B-B14F-4D97-AF65-F5344CB8AC3E}">
-        <p14:creationId xmlns:p14="http://schemas.microsoft.com/office/powerpoint/2010/main" val="2910927964"/>
-      </p:ext>
-    </p:extLst>
   </p:cSld>
   <p:clrMapOvr>
     <a:masterClrMapping/>
@@ -535,9 +364,23 @@
 </p:sldLayout>
 </file>
 
-<file path=ppt/slideLayouts/slideLayout11.xml><?xml version="1.0" encoding="utf-8"?>
-<p:sldLayout xmlns:a="http://schemas.openxmlformats.org/drawingml/2006/main" xmlns:r="http://schemas.openxmlformats.org/officeDocument/2006/relationships" xmlns:p="http://schemas.openxmlformats.org/presentationml/2006/main" type="vertTitleAndTx" preserve="1">
-  <p:cSld name="Vertical Title and Text">
+<file path=ppt/slideLayouts/slideLayout2.xml><?xml version="1.0" encoding="utf-8"?>
+<p:sldLayout xmlns:a="http://schemas.openxmlformats.org/drawingml/2006/main" xmlns:r="http://schemas.openxmlformats.org/officeDocument/2006/relationships" xmlns:p="http://schemas.openxmlformats.org/presentationml/2006/main" preserve="1">
+  <p:cSld name="COPERTINA">
+    <p:bg>
+      <p:bgPr>
+        <a:blipFill dpi="0" rotWithShape="1">
+          <a:blip r:embed="rId2">
+            <a:lum/>
+          </a:blip>
+          <a:srcRect/>
+          <a:stretch>
+            <a:fillRect/>
+          </a:stretch>
+        </a:blipFill>
+        <a:effectLst/>
+      </p:bgPr>
+    </p:bg>
     <p:spTree>
       <p:nvGrpSpPr>
         <p:cNvPr id="1" name=""/>
@@ -554,160 +397,352 @@
       </p:grpSpPr>
       <p:sp>
         <p:nvSpPr>
-          <p:cNvPr id="2" name="Vertical Title 1"/>
+          <p:cNvPr id="2" name="Shape 0"/>
+          <p:cNvSpPr/>
+          <p:nvPr/>
+        </p:nvSpPr>
+        <p:spPr>
+          <a:xfrm>
+            <a:off x="0" y="0"/>
+            <a:ext cx="12192000" cy="969264"/>
+          </a:xfrm>
+          <a:prstGeom prst="rect">
+            <a:avLst/>
+          </a:prstGeom>
+          <a:solidFill>
+            <a:srgbClr val="FFFFFF"/>
+          </a:solidFill>
+          <a:ln/>
+        </p:spPr>
+        <p:txBody>
+          <a:bodyPr/>
+          <a:lstStyle/>
+          <a:p>
+            <a:endParaRPr lang="it-IT"/>
+          </a:p>
+        </p:txBody>
+      </p:sp>
+      <p:pic>
+        <p:nvPicPr>
+          <p:cNvPr id="3" name="Image 0" descr="Loghi istituzionali: Unione europea NextGenerationEU, Ministero dell'Istruzione e del Merito, Italiadomani, Futura"/>
+          <p:cNvPicPr>
+            <a:picLocks noChangeAspect="1"/>
+          </p:cNvPicPr>
+          <p:nvPr/>
+        </p:nvPicPr>
+        <p:blipFill>
+          <a:blip r:embed="rId3"/>
+          <a:stretch>
+            <a:fillRect/>
+          </a:stretch>
+        </p:blipFill>
+        <p:spPr>
+          <a:xfrm>
+            <a:off x="411480" y="210312"/>
+            <a:ext cx="11365992" cy="539496"/>
+          </a:xfrm>
+          <a:prstGeom prst="rect">
+            <a:avLst/>
+          </a:prstGeom>
+        </p:spPr>
+      </p:pic>
+      <p:sp>
+        <p:nvSpPr>
+          <p:cNvPr id="4" name="Text 1"/>
+          <p:cNvSpPr/>
+          <p:nvPr/>
+        </p:nvSpPr>
+        <p:spPr>
+          <a:xfrm>
+            <a:off x="594360" y="1261872"/>
+            <a:ext cx="10972800" cy="228600"/>
+          </a:xfrm>
+          <a:prstGeom prst="rect">
+            <a:avLst/>
+          </a:prstGeom>
+          <a:noFill/>
+          <a:ln/>
+        </p:spPr>
+        <p:txBody>
+          <a:bodyPr wrap="square" lIns="0" tIns="0" rIns="0" bIns="0" rtlCol="0" anchor="ctr"/>
+          <a:lstStyle/>
+          <a:p>
+            <a:pPr marL="0" indent="0">
+              <a:buNone/>
+            </a:pPr>
+            <a:r>
+              <a:rPr lang="en-US" sz="1300" b="1" dirty="0">
+                <a:solidFill>
+                  <a:schemeClr val="accent1"/>
+                </a:solidFill>
+              </a:rPr>
+              <a:t>ITS MAKER ACADEMY · BOLOGNA</a:t>
+            </a:r>
+            <a:endParaRPr lang="en-US" sz="1300" dirty="0"/>
+          </a:p>
+        </p:txBody>
+      </p:sp>
+      <p:sp>
+        <p:nvSpPr>
+          <p:cNvPr id="5" name="Shape 2"/>
+          <p:cNvSpPr/>
+          <p:nvPr/>
+        </p:nvSpPr>
+        <p:spPr>
+          <a:xfrm>
+            <a:off x="594360" y="1645920"/>
+            <a:ext cx="841248" cy="41148"/>
+          </a:xfrm>
+          <a:prstGeom prst="rect">
+            <a:avLst/>
+          </a:prstGeom>
+          <a:solidFill>
+            <a:srgbClr val="F5820B"/>
+          </a:solidFill>
+          <a:ln/>
+        </p:spPr>
+        <p:txBody>
+          <a:bodyPr/>
+          <a:lstStyle/>
+          <a:p>
+            <a:endParaRPr lang="it-IT"/>
+          </a:p>
+        </p:txBody>
+      </p:sp>
+      <p:sp>
+        <p:nvSpPr>
+          <p:cNvPr id="6" name="Text 3"/>
           <p:cNvSpPr>
             <a:spLocks noGrp="1"/>
           </p:cNvSpPr>
           <p:nvPr>
-            <p:ph type="title" orient="vert"/>
+            <p:ph type="title" idx="104" hasCustomPrompt="1"/>
           </p:nvPr>
         </p:nvSpPr>
         <p:spPr>
           <a:xfrm>
-            <a:off x="6629400" y="274638"/>
-            <a:ext cx="2057400" cy="5851525"/>
-          </a:xfrm>
-        </p:spPr>
-        <p:txBody>
-          <a:bodyPr vert="eaVert"/>
-          <a:lstStyle/>
-          <a:p>
-            <a:r>
-              <a:rPr lang="en-US" smtClean="0"/>
-              <a:t>Click to edit Master title style</a:t>
-            </a:r>
-            <a:endParaRPr lang="en-US"/>
-          </a:p>
-        </p:txBody>
-      </p:sp>
-      <p:sp>
-        <p:nvSpPr>
-          <p:cNvPr id="3" name="Vertical Text Placeholder 2"/>
+            <a:off x="594360" y="1828800"/>
+            <a:ext cx="10972800" cy="1325880"/>
+          </a:xfrm>
+          <a:prstGeom prst="rect">
+            <a:avLst/>
+          </a:prstGeom>
+          <a:noFill/>
+          <a:ln/>
+        </p:spPr>
+        <p:txBody>
+          <a:bodyPr wrap="square" rtlCol="0"/>
+          <a:lstStyle>
+            <a:lvl1pPr marL="0" indent="0" algn="l">
+              <a:buNone/>
+              <a:defRPr lang="en-US" sz="3900" b="1" dirty="0">
+                <a:solidFill>
+                  <a:schemeClr val="accent1"/>
+                </a:solidFill>
+              </a:defRPr>
+            </a:lvl1pPr>
+          </a:lstStyle>
+          <a:p>
+            <a:pPr marL="0" indent="0" algn="l">
+              <a:buNone/>
+            </a:pPr>
+            <a:endParaRPr lang="en-US" sz="3900" dirty="0"/>
+          </a:p>
+        </p:txBody>
+      </p:sp>
+      <p:sp>
+        <p:nvSpPr>
+          <p:cNvPr id="7" name="Text 3"/>
           <p:cNvSpPr>
             <a:spLocks noGrp="1"/>
           </p:cNvSpPr>
           <p:nvPr>
-            <p:ph type="body" orient="vert" idx="1"/>
+            <p:ph type="body" idx="105" hasCustomPrompt="1"/>
           </p:nvPr>
         </p:nvSpPr>
         <p:spPr>
           <a:xfrm>
-            <a:off x="457200" y="274638"/>
-            <a:ext cx="6019800" cy="5851525"/>
-          </a:xfrm>
-        </p:spPr>
-        <p:txBody>
-          <a:bodyPr vert="eaVert"/>
-          <a:lstStyle/>
-          <a:p>
-            <a:pPr lvl="0"/>
-            <a:r>
-              <a:rPr lang="en-US" smtClean="0"/>
-              <a:t>Click to edit Master text styles</a:t>
-            </a:r>
-          </a:p>
-          <a:p>
-            <a:pPr lvl="1"/>
-            <a:r>
-              <a:rPr lang="en-US" smtClean="0"/>
-              <a:t>Second level</a:t>
-            </a:r>
-          </a:p>
-          <a:p>
-            <a:pPr lvl="2"/>
-            <a:r>
-              <a:rPr lang="en-US" smtClean="0"/>
-              <a:t>Third level</a:t>
-            </a:r>
-          </a:p>
-          <a:p>
-            <a:pPr lvl="3"/>
-            <a:r>
-              <a:rPr lang="en-US" smtClean="0"/>
-              <a:t>Fourth level</a:t>
-            </a:r>
-          </a:p>
-          <a:p>
-            <a:pPr lvl="4"/>
-            <a:r>
-              <a:rPr lang="en-US" smtClean="0"/>
-              <a:t>Fifth level</a:t>
-            </a:r>
-            <a:endParaRPr lang="en-US"/>
-          </a:p>
-        </p:txBody>
-      </p:sp>
-      <p:sp>
-        <p:nvSpPr>
-          <p:cNvPr id="4" name="Date Placeholder 3"/>
+            <a:off x="594360" y="3291840"/>
+            <a:ext cx="10972800" cy="457200"/>
+          </a:xfrm>
+          <a:prstGeom prst="rect">
+            <a:avLst/>
+          </a:prstGeom>
+          <a:noFill/>
+          <a:ln/>
+        </p:spPr>
+        <p:txBody>
+          <a:bodyPr wrap="square" rtlCol="0"/>
+          <a:lstStyle>
+            <a:lvl1pPr marL="0" indent="0" algn="l">
+              <a:buNone/>
+              <a:defRPr lang="en-US" sz="1900" dirty="0">
+                <a:solidFill>
+                  <a:schemeClr val="tx1"/>
+                </a:solidFill>
+              </a:defRPr>
+            </a:lvl1pPr>
+          </a:lstStyle>
+          <a:p>
+            <a:pPr marL="0" indent="0" algn="l">
+              <a:buNone/>
+            </a:pPr>
+            <a:endParaRPr lang="en-US" sz="1900" dirty="0"/>
+          </a:p>
+        </p:txBody>
+      </p:sp>
+      <p:sp>
+        <p:nvSpPr>
+          <p:cNvPr id="8" name="Text 3"/>
           <p:cNvSpPr>
             <a:spLocks noGrp="1"/>
           </p:cNvSpPr>
           <p:nvPr>
-            <p:ph type="dt" sz="half" idx="10"/>
+            <p:ph type="body" idx="106" hasCustomPrompt="1"/>
           </p:nvPr>
         </p:nvSpPr>
-        <p:spPr/>
-        <p:txBody>
-          <a:bodyPr/>
-          <a:lstStyle/>
-          <a:p>
-            <a:fld id="{5BCAD085-E8A6-8845-BD4E-CB4CCA059FC4}" type="datetimeFigureOut">
-              <a:rPr lang="en-US" smtClean="0"/>
-              <a:t>1/27/13</a:t>
-            </a:fld>
-            <a:endParaRPr lang="en-US"/>
-          </a:p>
-        </p:txBody>
-      </p:sp>
-      <p:sp>
-        <p:nvSpPr>
-          <p:cNvPr id="5" name="Footer Placeholder 4"/>
-          <p:cNvSpPr>
-            <a:spLocks noGrp="1"/>
-          </p:cNvSpPr>
-          <p:nvPr>
-            <p:ph type="ftr" sz="quarter" idx="11"/>
-          </p:nvPr>
-        </p:nvSpPr>
-        <p:spPr/>
-        <p:txBody>
-          <a:bodyPr/>
-          <a:lstStyle/>
-          <a:p>
-            <a:endParaRPr lang="en-US"/>
-          </a:p>
-        </p:txBody>
-      </p:sp>
-      <p:sp>
-        <p:nvSpPr>
-          <p:cNvPr id="6" name="Slide Number Placeholder 5"/>
-          <p:cNvSpPr>
-            <a:spLocks noGrp="1"/>
-          </p:cNvSpPr>
-          <p:nvPr>
-            <p:ph type="sldNum" sz="quarter" idx="12"/>
-          </p:nvPr>
-        </p:nvSpPr>
-        <p:spPr/>
-        <p:txBody>
-          <a:bodyPr/>
-          <a:lstStyle/>
-          <a:p>
-            <a:fld id="{C1FF6DA9-008F-8B48-92A6-B652298478BF}" type="slidenum">
-              <a:rPr lang="en-US" smtClean="0"/>
-              <a:t>‹#›</a:t>
-            </a:fld>
-            <a:endParaRPr lang="en-US"/>
+        <p:spPr>
+          <a:xfrm>
+            <a:off x="594360" y="3886200"/>
+            <a:ext cx="10881360" cy="411480"/>
+          </a:xfrm>
+          <a:prstGeom prst="rect">
+            <a:avLst/>
+          </a:prstGeom>
+          <a:noFill/>
+          <a:ln/>
+        </p:spPr>
+        <p:txBody>
+          <a:bodyPr wrap="square" rtlCol="0"/>
+          <a:lstStyle>
+            <a:lvl1pPr marL="0" indent="0" algn="l">
+              <a:buNone/>
+              <a:defRPr lang="en-US" sz="1800" dirty="0">
+                <a:solidFill>
+                  <a:schemeClr val="tx1"/>
+                </a:solidFill>
+              </a:defRPr>
+            </a:lvl1pPr>
+          </a:lstStyle>
+          <a:p>
+            <a:pPr marL="0" indent="0" algn="l">
+              <a:buNone/>
+            </a:pPr>
+            <a:endParaRPr lang="en-US" sz="1800" dirty="0"/>
+          </a:p>
+        </p:txBody>
+      </p:sp>
+      <p:pic>
+        <p:nvPicPr>
+          <p:cNvPr id="9" name="Image 1" descr="Logo ITS MAKER Academy"/>
+          <p:cNvPicPr>
+            <a:picLocks noChangeAspect="1"/>
+          </p:cNvPicPr>
+          <p:nvPr/>
+        </p:nvPicPr>
+        <p:blipFill>
+          <a:blip r:embed="rId4"/>
+          <a:stretch>
+            <a:fillRect/>
+          </a:stretch>
+        </p:blipFill>
+        <p:spPr>
+          <a:xfrm>
+            <a:off x="594360" y="6053328"/>
+            <a:ext cx="1636776" cy="1106424"/>
+          </a:xfrm>
+          <a:prstGeom prst="rect">
+            <a:avLst/>
+          </a:prstGeom>
+        </p:spPr>
+      </p:pic>
+      <p:sp>
+        <p:nvSpPr>
+          <p:cNvPr id="10" name="Text 3"/>
+          <p:cNvSpPr/>
+          <p:nvPr/>
+        </p:nvSpPr>
+        <p:spPr>
+          <a:xfrm>
+            <a:off x="594360" y="7278624"/>
+            <a:ext cx="2743200" cy="182880"/>
+          </a:xfrm>
+          <a:prstGeom prst="rect">
+            <a:avLst/>
+          </a:prstGeom>
+          <a:noFill/>
+          <a:ln/>
+        </p:spPr>
+        <p:txBody>
+          <a:bodyPr wrap="square" lIns="0" tIns="0" rIns="0" bIns="0" rtlCol="0" anchor="ctr"/>
+          <a:lstStyle/>
+          <a:p>
+            <a:pPr marL="0" indent="0">
+              <a:buNone/>
+            </a:pPr>
+            <a:r>
+              <a:rPr lang="en-US" sz="1000" b="1" dirty="0">
+                <a:solidFill>
+                  <a:schemeClr val="accent1"/>
+                </a:solidFill>
+              </a:rPr>
+              <a:t>WWW.ITSMAKER.IT</a:t>
+            </a:r>
+            <a:endParaRPr lang="en-US" sz="1000" dirty="0"/>
+          </a:p>
+        </p:txBody>
+      </p:sp>
+      <p:sp>
+        <p:nvSpPr>
+          <p:cNvPr id="11" name="Text 4"/>
+          <p:cNvSpPr/>
+          <p:nvPr/>
+        </p:nvSpPr>
+        <p:spPr>
+          <a:xfrm>
+            <a:off x="6675120" y="6601968"/>
+            <a:ext cx="4919472" cy="384048"/>
+          </a:xfrm>
+          <a:prstGeom prst="rect">
+            <a:avLst/>
+          </a:prstGeom>
+          <a:noFill/>
+          <a:ln/>
+        </p:spPr>
+        <p:txBody>
+          <a:bodyPr wrap="square" lIns="0" tIns="0" rIns="0" bIns="0" rtlCol="0" anchor="ctr"/>
+          <a:lstStyle/>
+          <a:p>
+            <a:pPr marL="0" indent="0" algn="r">
+              <a:buNone/>
+            </a:pPr>
+            <a:r>
+              <a:rPr lang="en-US" sz="1000" dirty="0">
+                <a:solidFill>
+                  <a:schemeClr val="tx2"/>
+                </a:solidFill>
+              </a:rPr>
+              <a:t>MECCANICA, MECCATRONICA,</a:t>
+            </a:r>
+            <a:endParaRPr lang="en-US" sz="1000" dirty="0"/>
+          </a:p>
+          <a:p>
+            <a:pPr marL="0" indent="0" algn="r">
+              <a:buNone/>
+            </a:pPr>
+            <a:r>
+              <a:rPr lang="en-US" sz="1000" dirty="0">
+                <a:solidFill>
+                  <a:schemeClr val="tx2"/>
+                </a:solidFill>
+              </a:rPr>
+              <a:t>MOTORISTICA E PACKAGING</a:t>
+            </a:r>
+            <a:endParaRPr lang="en-US" sz="1000" dirty="0"/>
           </a:p>
         </p:txBody>
       </p:sp>
     </p:spTree>
-    <p:extLst>
-      <p:ext uri="{BB962C8B-B14F-4D97-AF65-F5344CB8AC3E}">
-        <p14:creationId xmlns:p14="http://schemas.microsoft.com/office/powerpoint/2010/main" val="3612223792"/>
-      </p:ext>
-    </p:extLst>
   </p:cSld>
   <p:clrMapOvr>
     <a:masterClrMapping/>
@@ -715,9 +750,23 @@
 </p:sldLayout>
 </file>
 
-<file path=ppt/slideLayouts/slideLayout2.xml><?xml version="1.0" encoding="utf-8"?>
-<p:sldLayout xmlns:a="http://schemas.openxmlformats.org/drawingml/2006/main" xmlns:r="http://schemas.openxmlformats.org/officeDocument/2006/relationships" xmlns:p="http://schemas.openxmlformats.org/presentationml/2006/main" type="obj" preserve="1">
-  <p:cSld name="Title and Content">
+<file path=ppt/slideLayouts/slideLayout3.xml><?xml version="1.0" encoding="utf-8"?>
+<p:sldLayout xmlns:a="http://schemas.openxmlformats.org/drawingml/2006/main" xmlns:r="http://schemas.openxmlformats.org/officeDocument/2006/relationships" xmlns:p="http://schemas.openxmlformats.org/presentationml/2006/main" preserve="1">
+  <p:cSld name="CONTENUTO">
+    <p:bg>
+      <p:bgPr>
+        <a:blipFill dpi="0" rotWithShape="1">
+          <a:blip r:embed="rId2">
+            <a:lum/>
+          </a:blip>
+          <a:srcRect/>
+          <a:stretch>
+            <a:fillRect/>
+          </a:stretch>
+        </a:blipFill>
+        <a:effectLst/>
+      </p:bgPr>
+    </p:bg>
     <p:spTree>
       <p:nvGrpSpPr>
         <p:cNvPr id="1" name=""/>
@@ -734,150 +783,268 @@
       </p:grpSpPr>
       <p:sp>
         <p:nvSpPr>
-          <p:cNvPr id="2" name="Title 1"/>
+          <p:cNvPr id="2" name="Text 0"/>
+          <p:cNvSpPr/>
+          <p:nvPr/>
+        </p:nvSpPr>
+        <p:spPr>
+          <a:xfrm>
+            <a:off x="594360" y="265176"/>
+            <a:ext cx="8229600" cy="182880"/>
+          </a:xfrm>
+          <a:prstGeom prst="rect">
+            <a:avLst/>
+          </a:prstGeom>
+          <a:noFill/>
+          <a:ln/>
+        </p:spPr>
+        <p:txBody>
+          <a:bodyPr wrap="square" lIns="0" tIns="0" rIns="0" bIns="0" rtlCol="0" anchor="ctr"/>
+          <a:lstStyle/>
+          <a:p>
+            <a:pPr marL="0" indent="0">
+              <a:buNone/>
+            </a:pPr>
+            <a:r>
+              <a:rPr lang="en-US" sz="900" b="1" dirty="0">
+                <a:solidFill>
+                  <a:schemeClr val="accent1"/>
+                </a:solidFill>
+              </a:rPr>
+              <a:t>ITS MAKER ACADEMY · BOLOGNA</a:t>
+            </a:r>
+            <a:endParaRPr lang="en-US" sz="900" dirty="0"/>
+          </a:p>
+        </p:txBody>
+      </p:sp>
+      <p:pic>
+        <p:nvPicPr>
+          <p:cNvPr id="3" name="Image 0" descr="Logo ITS MAKER Academy"/>
+          <p:cNvPicPr>
+            <a:picLocks noChangeAspect="1"/>
+          </p:cNvPicPr>
+          <p:nvPr/>
+        </p:nvPicPr>
+        <p:blipFill>
+          <a:blip r:embed="rId3"/>
+          <a:stretch>
+            <a:fillRect/>
+          </a:stretch>
+        </p:blipFill>
+        <p:spPr>
+          <a:xfrm>
+            <a:off x="10680192" y="228600"/>
+            <a:ext cx="905256" cy="611734"/>
+          </a:xfrm>
+          <a:prstGeom prst="rect">
+            <a:avLst/>
+          </a:prstGeom>
+        </p:spPr>
+      </p:pic>
+      <p:sp>
+        <p:nvSpPr>
+          <p:cNvPr id="4" name="Text 1"/>
           <p:cNvSpPr>
             <a:spLocks noGrp="1"/>
           </p:cNvSpPr>
           <p:nvPr>
-            <p:ph type="title"/>
+            <p:ph type="title" idx="102" hasCustomPrompt="1"/>
           </p:nvPr>
         </p:nvSpPr>
-        <p:spPr/>
+        <p:spPr>
+          <a:xfrm>
+            <a:off x="594360" y="566928"/>
+            <a:ext cx="9646920" cy="960120"/>
+          </a:xfrm>
+          <a:prstGeom prst="rect">
+            <a:avLst/>
+          </a:prstGeom>
+          <a:noFill/>
+          <a:ln/>
+        </p:spPr>
+        <p:txBody>
+          <a:bodyPr wrap="square" rtlCol="0"/>
+          <a:lstStyle>
+            <a:lvl1pPr marL="0" indent="0" algn="l">
+              <a:buNone/>
+              <a:defRPr lang="en-US" sz="2800" b="1" dirty="0">
+                <a:solidFill>
+                  <a:schemeClr val="accent1"/>
+                </a:solidFill>
+              </a:defRPr>
+            </a:lvl1pPr>
+          </a:lstStyle>
+          <a:p>
+            <a:pPr marL="0" indent="0" algn="l">
+              <a:buNone/>
+            </a:pPr>
+            <a:endParaRPr lang="en-US" sz="2800" dirty="0"/>
+          </a:p>
+        </p:txBody>
+      </p:sp>
+      <p:sp>
+        <p:nvSpPr>
+          <p:cNvPr id="5" name="Shape 1"/>
+          <p:cNvSpPr/>
+          <p:nvPr/>
+        </p:nvSpPr>
+        <p:spPr>
+          <a:xfrm>
+            <a:off x="594360" y="1645920"/>
+            <a:ext cx="11000232" cy="12802"/>
+          </a:xfrm>
+          <a:prstGeom prst="rect">
+            <a:avLst/>
+          </a:prstGeom>
+          <a:solidFill>
+            <a:srgbClr val="9AAFC2"/>
+          </a:solidFill>
+          <a:ln/>
+        </p:spPr>
         <p:txBody>
           <a:bodyPr/>
           <a:lstStyle/>
           <a:p>
-            <a:r>
-              <a:rPr lang="en-US" smtClean="0"/>
-              <a:t>Click to edit Master title style</a:t>
-            </a:r>
-            <a:endParaRPr lang="en-US"/>
-          </a:p>
-        </p:txBody>
-      </p:sp>
-      <p:sp>
-        <p:nvSpPr>
-          <p:cNvPr id="3" name="Content Placeholder 2"/>
+            <a:endParaRPr lang="it-IT"/>
+          </a:p>
+        </p:txBody>
+      </p:sp>
+      <p:sp>
+        <p:nvSpPr>
+          <p:cNvPr id="6" name="Shape 2"/>
+          <p:cNvSpPr/>
+          <p:nvPr/>
+        </p:nvSpPr>
+        <p:spPr>
+          <a:xfrm>
+            <a:off x="594360" y="1625803"/>
+            <a:ext cx="841248" cy="47549"/>
+          </a:xfrm>
+          <a:prstGeom prst="rect">
+            <a:avLst/>
+          </a:prstGeom>
+          <a:solidFill>
+            <a:srgbClr val="F5820B"/>
+          </a:solidFill>
+          <a:ln/>
+        </p:spPr>
+        <p:txBody>
+          <a:bodyPr/>
+          <a:lstStyle/>
+          <a:p>
+            <a:endParaRPr lang="it-IT"/>
+          </a:p>
+        </p:txBody>
+      </p:sp>
+      <p:sp>
+        <p:nvSpPr>
+          <p:cNvPr id="7" name="Shape 3"/>
+          <p:cNvSpPr/>
+          <p:nvPr/>
+        </p:nvSpPr>
+        <p:spPr>
+          <a:xfrm>
+            <a:off x="594360" y="7141464"/>
+            <a:ext cx="11000232" cy="8230"/>
+          </a:xfrm>
+          <a:prstGeom prst="rect">
+            <a:avLst/>
+          </a:prstGeom>
+          <a:solidFill>
+            <a:srgbClr val="9AAFC2"/>
+          </a:solidFill>
+          <a:ln/>
+        </p:spPr>
+        <p:txBody>
+          <a:bodyPr/>
+          <a:lstStyle/>
+          <a:p>
+            <a:endParaRPr lang="it-IT"/>
+          </a:p>
+        </p:txBody>
+      </p:sp>
+      <p:sp>
+        <p:nvSpPr>
+          <p:cNvPr id="8" name="Text 4"/>
+          <p:cNvSpPr/>
+          <p:nvPr/>
+        </p:nvSpPr>
+        <p:spPr>
+          <a:xfrm>
+            <a:off x="594360" y="7287768"/>
+            <a:ext cx="9052560" cy="182880"/>
+          </a:xfrm>
+          <a:prstGeom prst="rect">
+            <a:avLst/>
+          </a:prstGeom>
+          <a:noFill/>
+          <a:ln/>
+        </p:spPr>
+        <p:txBody>
+          <a:bodyPr wrap="square" lIns="0" tIns="0" rIns="0" bIns="0" rtlCol="0" anchor="ctr"/>
+          <a:lstStyle/>
+          <a:p>
+            <a:pPr marL="0" indent="0">
+              <a:buNone/>
+            </a:pPr>
+            <a:r>
+              <a:rPr lang="en-US" sz="900" dirty="0">
+                <a:solidFill>
+                  <a:schemeClr val="accent1"/>
+                </a:solidFill>
+              </a:rPr>
+              <a:t>ITS MAKER ACADEMY · BOLOGNA  |  UNSLOTH STUDIO</a:t>
+            </a:r>
+            <a:endParaRPr lang="en-US" sz="900" dirty="0"/>
+          </a:p>
+        </p:txBody>
+      </p:sp>
+      <p:sp>
+        <p:nvSpPr>
+          <p:cNvPr id="25" name="Slide Number Placeholder 0"/>
           <p:cNvSpPr>
             <a:spLocks noGrp="1"/>
           </p:cNvSpPr>
           <p:nvPr>
-            <p:ph idx="1"/>
+            <p:ph type="sldNum" sz="quarter" idx="4294967295"/>
           </p:nvPr>
         </p:nvSpPr>
-        <p:spPr/>
-        <p:txBody>
-          <a:bodyPr/>
-          <a:lstStyle/>
-          <a:p>
-            <a:pPr lvl="0"/>
-            <a:r>
-              <a:rPr lang="en-US" smtClean="0"/>
-              <a:t>Click to edit Master text styles</a:t>
-            </a:r>
-          </a:p>
-          <a:p>
-            <a:pPr lvl="1"/>
-            <a:r>
-              <a:rPr lang="en-US" smtClean="0"/>
-              <a:t>Second level</a:t>
-            </a:r>
-          </a:p>
-          <a:p>
-            <a:pPr lvl="2"/>
-            <a:r>
-              <a:rPr lang="en-US" smtClean="0"/>
-              <a:t>Third level</a:t>
-            </a:r>
-          </a:p>
-          <a:p>
-            <a:pPr lvl="3"/>
-            <a:r>
-              <a:rPr lang="en-US" smtClean="0"/>
-              <a:t>Fourth level</a:t>
-            </a:r>
-          </a:p>
-          <a:p>
-            <a:pPr lvl="4"/>
-            <a:r>
-              <a:rPr lang="en-US" smtClean="0"/>
-              <a:t>Fifth level</a:t>
-            </a:r>
-            <a:endParaRPr lang="en-US"/>
-          </a:p>
-        </p:txBody>
-      </p:sp>
-      <p:sp>
-        <p:nvSpPr>
-          <p:cNvPr id="4" name="Date Placeholder 3"/>
-          <p:cNvSpPr>
-            <a:spLocks noGrp="1"/>
-          </p:cNvSpPr>
-          <p:nvPr>
-            <p:ph type="dt" sz="half" idx="10"/>
-          </p:nvPr>
-        </p:nvSpPr>
-        <p:spPr/>
-        <p:txBody>
-          <a:bodyPr/>
-          <a:lstStyle/>
-          <a:p>
-            <a:fld id="{5BCAD085-E8A6-8845-BD4E-CB4CCA059FC4}" type="datetimeFigureOut">
-              <a:rPr lang="en-US" smtClean="0"/>
-              <a:t>1/27/13</a:t>
+        <p:spPr>
+          <a:xfrm>
+            <a:off x="10652760" y="7269480"/>
+            <a:ext cx="941832" cy="201168"/>
+          </a:xfrm>
+          <a:prstGeom prst="rect">
+            <a:avLst/>
+          </a:prstGeom>
+          <a:extLst>
+            <a:ext uri="{C572A759-6A51-4108-AA02-DFA0A04FC94B}">
+              <ma14:wrappingTextBoxFlag xmlns:ma14="http://schemas.microsoft.com/office/mac/drawingml/2011/main" xmlns="" val="0"/>
+            </a:ext>
+          </a:extLst>
+        </p:spPr>
+        <p:txBody>
+          <a:bodyPr lIns="0" tIns="0" rIns="0" bIns="0"/>
+          <a:lstStyle>
+            <a:lvl1pPr>
+              <a:defRPr sz="900">
+                <a:solidFill>
+                  <a:schemeClr val="accent1"/>
+                </a:solidFill>
+              </a:defRPr>
+            </a:lvl1pPr>
+          </a:lstStyle>
+          <a:p>
+            <a:pPr algn="r"/>
+            <a:fld id="{F7021451-1387-4CA6-816F-3879F97B5CBC}" type="slidenum">
+              <a:rPr lang="en-US" b="0"/>
+              <a:t>‹N›</a:t>
             </a:fld>
             <a:endParaRPr lang="en-US"/>
           </a:p>
         </p:txBody>
       </p:sp>
-      <p:sp>
-        <p:nvSpPr>
-          <p:cNvPr id="5" name="Footer Placeholder 4"/>
-          <p:cNvSpPr>
-            <a:spLocks noGrp="1"/>
-          </p:cNvSpPr>
-          <p:nvPr>
-            <p:ph type="ftr" sz="quarter" idx="11"/>
-          </p:nvPr>
-        </p:nvSpPr>
-        <p:spPr/>
-        <p:txBody>
-          <a:bodyPr/>
-          <a:lstStyle/>
-          <a:p>
-            <a:endParaRPr lang="en-US"/>
-          </a:p>
-        </p:txBody>
-      </p:sp>
-      <p:sp>
-        <p:nvSpPr>
-          <p:cNvPr id="6" name="Slide Number Placeholder 5"/>
-          <p:cNvSpPr>
-            <a:spLocks noGrp="1"/>
-          </p:cNvSpPr>
-          <p:nvPr>
-            <p:ph type="sldNum" sz="quarter" idx="12"/>
-          </p:nvPr>
-        </p:nvSpPr>
-        <p:spPr/>
-        <p:txBody>
-          <a:bodyPr/>
-          <a:lstStyle/>
-          <a:p>
-            <a:fld id="{C1FF6DA9-008F-8B48-92A6-B652298478BF}" type="slidenum">
-              <a:rPr lang="en-US" smtClean="0"/>
-              <a:t>‹#›</a:t>
-            </a:fld>
-            <a:endParaRPr lang="en-US"/>
-          </a:p>
-        </p:txBody>
-      </p:sp>
     </p:spTree>
-    <p:extLst>
-      <p:ext uri="{BB962C8B-B14F-4D97-AF65-F5344CB8AC3E}">
-        <p14:creationId xmlns:p14="http://schemas.microsoft.com/office/powerpoint/2010/main" val="2614314258"/>
-      </p:ext>
-    </p:extLst>
   </p:cSld>
   <p:clrMapOvr>
     <a:masterClrMapping/>
@@ -885,9 +1052,23 @@
 </p:sldLayout>
 </file>
 
-<file path=ppt/slideLayouts/slideLayout3.xml><?xml version="1.0" encoding="utf-8"?>
-<p:sldLayout xmlns:a="http://schemas.openxmlformats.org/drawingml/2006/main" xmlns:r="http://schemas.openxmlformats.org/officeDocument/2006/relationships" xmlns:p="http://schemas.openxmlformats.org/presentationml/2006/main" type="secHead" preserve="1">
-  <p:cSld name="Section Header">
+<file path=ppt/slideLayouts/slideLayout4.xml><?xml version="1.0" encoding="utf-8"?>
+<p:sldLayout xmlns:a="http://schemas.openxmlformats.org/drawingml/2006/main" xmlns:r="http://schemas.openxmlformats.org/officeDocument/2006/relationships" xmlns:p="http://schemas.openxmlformats.org/presentationml/2006/main" preserve="1">
+  <p:cSld name="SEZIONE">
+    <p:bg>
+      <p:bgPr>
+        <a:blipFill dpi="0" rotWithShape="1">
+          <a:blip r:embed="rId2">
+            <a:lum/>
+          </a:blip>
+          <a:srcRect/>
+          <a:stretch>
+            <a:fillRect/>
+          </a:stretch>
+        </a:blipFill>
+        <a:effectLst/>
+      </p:bgPr>
+    </p:bg>
     <p:spTree>
       <p:nvGrpSpPr>
         <p:cNvPr id="1" name=""/>
@@ -904,226 +1085,299 @@
       </p:grpSpPr>
       <p:sp>
         <p:nvSpPr>
-          <p:cNvPr id="2" name="Title 1"/>
+          <p:cNvPr id="2" name="Shape 0"/>
+          <p:cNvSpPr/>
+          <p:nvPr/>
+        </p:nvSpPr>
+        <p:spPr>
+          <a:xfrm>
+            <a:off x="0" y="0"/>
+            <a:ext cx="7269480" cy="7620000"/>
+          </a:xfrm>
+          <a:prstGeom prst="rect">
+            <a:avLst/>
+          </a:prstGeom>
+          <a:solidFill>
+            <a:schemeClr val="accent1"/>
+          </a:solidFill>
+          <a:ln/>
+        </p:spPr>
+        <p:txBody>
+          <a:bodyPr/>
+          <a:lstStyle/>
+          <a:p>
+            <a:endParaRPr lang="it-IT"/>
+          </a:p>
+        </p:txBody>
+      </p:sp>
+      <p:sp>
+        <p:nvSpPr>
+          <p:cNvPr id="3" name="Text 1"/>
+          <p:cNvSpPr/>
+          <p:nvPr/>
+        </p:nvSpPr>
+        <p:spPr>
+          <a:xfrm>
+            <a:off x="594360" y="548640"/>
+            <a:ext cx="6400800" cy="228600"/>
+          </a:xfrm>
+          <a:prstGeom prst="rect">
+            <a:avLst/>
+          </a:prstGeom>
+          <a:noFill/>
+          <a:ln/>
+        </p:spPr>
+        <p:txBody>
+          <a:bodyPr wrap="square" lIns="0" tIns="0" rIns="0" bIns="0" rtlCol="0" anchor="ctr"/>
+          <a:lstStyle/>
+          <a:p>
+            <a:pPr marL="0" indent="0">
+              <a:buNone/>
+            </a:pPr>
+            <a:r>
+              <a:rPr lang="en-US" sz="1300" b="1" dirty="0">
+                <a:solidFill>
+                  <a:schemeClr val="bg1"/>
+                </a:solidFill>
+              </a:rPr>
+              <a:t>ITS MAKER ACADEMY · BOLOGNA</a:t>
+            </a:r>
+            <a:endParaRPr lang="en-US" sz="1300" dirty="0"/>
+          </a:p>
+        </p:txBody>
+      </p:sp>
+      <p:sp>
+        <p:nvSpPr>
+          <p:cNvPr id="4" name="Text 2"/>
           <p:cNvSpPr>
             <a:spLocks noGrp="1"/>
           </p:cNvSpPr>
           <p:nvPr>
-            <p:ph type="title"/>
+            <p:ph type="body" idx="102" hasCustomPrompt="1"/>
           </p:nvPr>
         </p:nvSpPr>
         <p:spPr>
           <a:xfrm>
-            <a:off x="722313" y="4406900"/>
-            <a:ext cx="7772400" cy="1362075"/>
-          </a:xfrm>
-        </p:spPr>
-        <p:txBody>
-          <a:bodyPr anchor="t"/>
+            <a:off x="594360" y="1234440"/>
+            <a:ext cx="3657600" cy="1371600"/>
+          </a:xfrm>
+          <a:prstGeom prst="rect">
+            <a:avLst/>
+          </a:prstGeom>
+          <a:noFill/>
+          <a:ln/>
+        </p:spPr>
+        <p:txBody>
+          <a:bodyPr wrap="square" rtlCol="0"/>
           <a:lstStyle>
-            <a:lvl1pPr algn="l">
-              <a:defRPr sz="4000" b="1" cap="all"/>
+            <a:lvl1pPr marL="0" indent="0" algn="l">
+              <a:buNone/>
+              <a:defRPr lang="en-US" sz="8000" b="1" dirty="0">
+                <a:solidFill>
+                  <a:srgbClr val="F5820B"/>
+                </a:solidFill>
+              </a:defRPr>
             </a:lvl1pPr>
           </a:lstStyle>
           <a:p>
-            <a:r>
-              <a:rPr lang="en-US" smtClean="0"/>
-              <a:t>Click to edit Master title style</a:t>
-            </a:r>
-            <a:endParaRPr lang="en-US"/>
-          </a:p>
-        </p:txBody>
-      </p:sp>
-      <p:sp>
-        <p:nvSpPr>
-          <p:cNvPr id="3" name="Text Placeholder 2"/>
+            <a:pPr marL="0" indent="0" algn="l">
+              <a:buNone/>
+            </a:pPr>
+            <a:endParaRPr lang="en-US" sz="8000" dirty="0"/>
+          </a:p>
+        </p:txBody>
+      </p:sp>
+      <p:sp>
+        <p:nvSpPr>
+          <p:cNvPr id="5" name="Text 2"/>
           <p:cNvSpPr>
             <a:spLocks noGrp="1"/>
           </p:cNvSpPr>
           <p:nvPr>
-            <p:ph type="body" idx="1"/>
+            <p:ph type="title" idx="103" hasCustomPrompt="1"/>
           </p:nvPr>
         </p:nvSpPr>
         <p:spPr>
           <a:xfrm>
-            <a:off x="722313" y="2906713"/>
-            <a:ext cx="7772400" cy="1500187"/>
-          </a:xfrm>
-        </p:spPr>
-        <p:txBody>
-          <a:bodyPr anchor="b"/>
+            <a:off x="594360" y="2697480"/>
+            <a:ext cx="6400800" cy="1325880"/>
+          </a:xfrm>
+          <a:prstGeom prst="rect">
+            <a:avLst/>
+          </a:prstGeom>
+          <a:noFill/>
+          <a:ln/>
+        </p:spPr>
+        <p:txBody>
+          <a:bodyPr wrap="square" rtlCol="0"/>
           <a:lstStyle>
-            <a:lvl1pPr marL="0" indent="0">
+            <a:lvl1pPr marL="0" indent="0" algn="l">
               <a:buNone/>
-              <a:defRPr sz="2000">
-                <a:solidFill>
-                  <a:schemeClr val="tx1">
-                    <a:tint val="75000"/>
-                  </a:schemeClr>
+              <a:defRPr lang="en-US" sz="3900" b="1" dirty="0">
+                <a:solidFill>
+                  <a:schemeClr val="bg1"/>
                 </a:solidFill>
               </a:defRPr>
             </a:lvl1pPr>
-            <a:lvl2pPr marL="457200" indent="0">
+          </a:lstStyle>
+          <a:p>
+            <a:pPr marL="0" indent="0" algn="l">
               <a:buNone/>
-              <a:defRPr sz="1800">
-                <a:solidFill>
-                  <a:schemeClr val="tx1">
-                    <a:tint val="75000"/>
-                  </a:schemeClr>
-                </a:solidFill>
-              </a:defRPr>
-            </a:lvl2pPr>
-            <a:lvl3pPr marL="914400" indent="0">
-              <a:buNone/>
-              <a:defRPr sz="1600">
-                <a:solidFill>
-                  <a:schemeClr val="tx1">
-                    <a:tint val="75000"/>
-                  </a:schemeClr>
-                </a:solidFill>
-              </a:defRPr>
-            </a:lvl3pPr>
-            <a:lvl4pPr marL="1371600" indent="0">
-              <a:buNone/>
-              <a:defRPr sz="1400">
-                <a:solidFill>
-                  <a:schemeClr val="tx1">
-                    <a:tint val="75000"/>
-                  </a:schemeClr>
-                </a:solidFill>
-              </a:defRPr>
-            </a:lvl4pPr>
-            <a:lvl5pPr marL="1828800" indent="0">
-              <a:buNone/>
-              <a:defRPr sz="1400">
-                <a:solidFill>
-                  <a:schemeClr val="tx1">
-                    <a:tint val="75000"/>
-                  </a:schemeClr>
-                </a:solidFill>
-              </a:defRPr>
-            </a:lvl5pPr>
-            <a:lvl6pPr marL="2286000" indent="0">
-              <a:buNone/>
-              <a:defRPr sz="1400">
-                <a:solidFill>
-                  <a:schemeClr val="tx1">
-                    <a:tint val="75000"/>
-                  </a:schemeClr>
-                </a:solidFill>
-              </a:defRPr>
-            </a:lvl6pPr>
-            <a:lvl7pPr marL="2743200" indent="0">
-              <a:buNone/>
-              <a:defRPr sz="1400">
-                <a:solidFill>
-                  <a:schemeClr val="tx1">
-                    <a:tint val="75000"/>
-                  </a:schemeClr>
-                </a:solidFill>
-              </a:defRPr>
-            </a:lvl7pPr>
-            <a:lvl8pPr marL="3200400" indent="0">
-              <a:buNone/>
-              <a:defRPr sz="1400">
-                <a:solidFill>
-                  <a:schemeClr val="tx1">
-                    <a:tint val="75000"/>
-                  </a:schemeClr>
-                </a:solidFill>
-              </a:defRPr>
-            </a:lvl8pPr>
-            <a:lvl9pPr marL="3657600" indent="0">
-              <a:buNone/>
-              <a:defRPr sz="1400">
-                <a:solidFill>
-                  <a:schemeClr val="tx1">
-                    <a:tint val="75000"/>
-                  </a:schemeClr>
-                </a:solidFill>
-              </a:defRPr>
-            </a:lvl9pPr>
-          </a:lstStyle>
-          <a:p>
-            <a:pPr lvl="0"/>
-            <a:r>
-              <a:rPr lang="en-US" smtClean="0"/>
-              <a:t>Click to edit Master text styles</a:t>
-            </a:r>
-          </a:p>
-        </p:txBody>
-      </p:sp>
-      <p:sp>
-        <p:nvSpPr>
-          <p:cNvPr id="4" name="Date Placeholder 3"/>
+            </a:pPr>
+            <a:endParaRPr lang="en-US" sz="3900" dirty="0"/>
+          </a:p>
+        </p:txBody>
+      </p:sp>
+      <p:sp>
+        <p:nvSpPr>
+          <p:cNvPr id="6" name="Shape 2"/>
+          <p:cNvSpPr/>
+          <p:nvPr/>
+        </p:nvSpPr>
+        <p:spPr>
+          <a:xfrm>
+            <a:off x="594360" y="4160520"/>
+            <a:ext cx="841248" cy="41148"/>
+          </a:xfrm>
+          <a:prstGeom prst="rect">
+            <a:avLst/>
+          </a:prstGeom>
+          <a:solidFill>
+            <a:srgbClr val="F5820B"/>
+          </a:solidFill>
+          <a:ln/>
+        </p:spPr>
+        <p:txBody>
+          <a:bodyPr/>
+          <a:lstStyle/>
+          <a:p>
+            <a:endParaRPr lang="it-IT"/>
+          </a:p>
+        </p:txBody>
+      </p:sp>
+      <p:sp>
+        <p:nvSpPr>
+          <p:cNvPr id="7" name="Text 3"/>
           <p:cNvSpPr>
             <a:spLocks noGrp="1"/>
           </p:cNvSpPr>
           <p:nvPr>
-            <p:ph type="dt" sz="half" idx="10"/>
+            <p:ph type="body" idx="105" hasCustomPrompt="1"/>
           </p:nvPr>
         </p:nvSpPr>
-        <p:spPr/>
-        <p:txBody>
-          <a:bodyPr/>
-          <a:lstStyle/>
-          <a:p>
-            <a:fld id="{5BCAD085-E8A6-8845-BD4E-CB4CCA059FC4}" type="datetimeFigureOut">
-              <a:rPr lang="en-US" smtClean="0"/>
-              <a:t>1/27/13</a:t>
-            </a:fld>
-            <a:endParaRPr lang="en-US"/>
-          </a:p>
-        </p:txBody>
-      </p:sp>
-      <p:sp>
-        <p:nvSpPr>
-          <p:cNvPr id="5" name="Footer Placeholder 4"/>
+        <p:spPr>
+          <a:xfrm>
+            <a:off x="594360" y="4343400"/>
+            <a:ext cx="6309360" cy="1463040"/>
+          </a:xfrm>
+          <a:prstGeom prst="rect">
+            <a:avLst/>
+          </a:prstGeom>
+          <a:noFill/>
+          <a:ln/>
+        </p:spPr>
+        <p:txBody>
+          <a:bodyPr wrap="square" rtlCol="0"/>
+          <a:lstStyle>
+            <a:lvl1pPr marL="0" indent="0" algn="l">
+              <a:buNone/>
+              <a:defRPr lang="en-US" sz="2300" dirty="0">
+                <a:solidFill>
+                  <a:schemeClr val="bg1"/>
+                </a:solidFill>
+              </a:defRPr>
+            </a:lvl1pPr>
+          </a:lstStyle>
+          <a:p>
+            <a:pPr marL="0" indent="0" algn="l">
+              <a:buNone/>
+            </a:pPr>
+            <a:endParaRPr lang="en-US" sz="2300" dirty="0"/>
+          </a:p>
+        </p:txBody>
+      </p:sp>
+      <p:sp>
+        <p:nvSpPr>
+          <p:cNvPr id="8" name="Text 3"/>
+          <p:cNvSpPr/>
+          <p:nvPr/>
+        </p:nvSpPr>
+        <p:spPr>
+          <a:xfrm>
+            <a:off x="594360" y="6830568"/>
+            <a:ext cx="6400800" cy="201168"/>
+          </a:xfrm>
+          <a:prstGeom prst="rect">
+            <a:avLst/>
+          </a:prstGeom>
+          <a:noFill/>
+          <a:ln/>
+        </p:spPr>
+        <p:txBody>
+          <a:bodyPr wrap="square" lIns="0" tIns="0" rIns="0" bIns="0" rtlCol="0" anchor="ctr"/>
+          <a:lstStyle/>
+          <a:p>
+            <a:pPr marL="0" indent="0">
+              <a:buNone/>
+            </a:pPr>
+            <a:r>
+              <a:rPr lang="en-US" sz="1200" dirty="0">
+                <a:solidFill>
+                  <a:schemeClr val="bg1"/>
+                </a:solidFill>
+              </a:rPr>
+              <a:t>ITS MAKER ACADEMY · BOLOGNA</a:t>
+            </a:r>
+            <a:endParaRPr lang="en-US" sz="1200" dirty="0"/>
+          </a:p>
+        </p:txBody>
+      </p:sp>
+      <p:sp>
+        <p:nvSpPr>
+          <p:cNvPr id="25" name="Slide Number Placeholder 0"/>
           <p:cNvSpPr>
             <a:spLocks noGrp="1"/>
           </p:cNvSpPr>
           <p:nvPr>
-            <p:ph type="ftr" sz="quarter" idx="11"/>
+            <p:ph type="sldNum" sz="quarter" idx="4294967295"/>
           </p:nvPr>
         </p:nvSpPr>
-        <p:spPr/>
-        <p:txBody>
-          <a:bodyPr/>
-          <a:lstStyle/>
-          <a:p>
-            <a:endParaRPr lang="en-US"/>
-          </a:p>
-        </p:txBody>
-      </p:sp>
-      <p:sp>
-        <p:nvSpPr>
-          <p:cNvPr id="6" name="Slide Number Placeholder 5"/>
-          <p:cNvSpPr>
-            <a:spLocks noGrp="1"/>
-          </p:cNvSpPr>
-          <p:nvPr>
-            <p:ph type="sldNum" sz="quarter" idx="12"/>
-          </p:nvPr>
-        </p:nvSpPr>
-        <p:spPr/>
-        <p:txBody>
-          <a:bodyPr/>
-          <a:lstStyle/>
-          <a:p>
-            <a:fld id="{C1FF6DA9-008F-8B48-92A6-B652298478BF}" type="slidenum">
-              <a:rPr lang="en-US" smtClean="0"/>
-              <a:t>‹#›</a:t>
+        <p:spPr>
+          <a:xfrm>
+            <a:off x="10652760" y="7269480"/>
+            <a:ext cx="941832" cy="201168"/>
+          </a:xfrm>
+          <a:prstGeom prst="rect">
+            <a:avLst/>
+          </a:prstGeom>
+          <a:extLst>
+            <a:ext uri="{C572A759-6A51-4108-AA02-DFA0A04FC94B}">
+              <ma14:wrappingTextBoxFlag xmlns:ma14="http://schemas.microsoft.com/office/mac/drawingml/2011/main" xmlns="" val="0"/>
+            </a:ext>
+          </a:extLst>
+        </p:spPr>
+        <p:txBody>
+          <a:bodyPr lIns="0" tIns="0" rIns="0" bIns="0"/>
+          <a:lstStyle>
+            <a:lvl1pPr>
+              <a:defRPr sz="900">
+                <a:solidFill>
+                  <a:schemeClr val="accent1"/>
+                </a:solidFill>
+              </a:defRPr>
+            </a:lvl1pPr>
+          </a:lstStyle>
+          <a:p>
+            <a:pPr algn="r"/>
+            <a:fld id="{F7021451-1387-4CA6-816F-3879F97B5CBC}" type="slidenum">
+              <a:rPr lang="en-US" b="0"/>
+              <a:t>‹N›</a:t>
             </a:fld>
             <a:endParaRPr lang="en-US"/>
           </a:p>
         </p:txBody>
       </p:sp>
     </p:spTree>
-    <p:extLst>
-      <p:ext uri="{BB962C8B-B14F-4D97-AF65-F5344CB8AC3E}">
-        <p14:creationId xmlns:p14="http://schemas.microsoft.com/office/powerpoint/2010/main" val="960648375"/>
-      </p:ext>
-    </p:extLst>
   </p:cSld>
   <p:clrMapOvr>
     <a:masterClrMapping/>
@@ -1131,9 +1385,23 @@
 </p:sldLayout>
 </file>
 
-<file path=ppt/slideLayouts/slideLayout4.xml><?xml version="1.0" encoding="utf-8"?>
-<p:sldLayout xmlns:a="http://schemas.openxmlformats.org/drawingml/2006/main" xmlns:r="http://schemas.openxmlformats.org/officeDocument/2006/relationships" xmlns:p="http://schemas.openxmlformats.org/presentationml/2006/main" type="twoObj" preserve="1">
-  <p:cSld name="Two Content">
+<file path=ppt/slideLayouts/slideLayout5.xml><?xml version="1.0" encoding="utf-8"?>
+<p:sldLayout xmlns:a="http://schemas.openxmlformats.org/drawingml/2006/main" xmlns:r="http://schemas.openxmlformats.org/officeDocument/2006/relationships" xmlns:p="http://schemas.openxmlformats.org/presentationml/2006/main" preserve="1">
+  <p:cSld name="CHIUSURA">
+    <p:bg>
+      <p:bgPr>
+        <a:blipFill dpi="0" rotWithShape="1">
+          <a:blip r:embed="rId2">
+            <a:lum/>
+          </a:blip>
+          <a:srcRect/>
+          <a:stretch>
+            <a:fillRect/>
+          </a:stretch>
+        </a:blipFill>
+        <a:effectLst/>
+      </p:bgPr>
+    </p:bg>
     <p:spTree>
       <p:nvGrpSpPr>
         <p:cNvPr id="1" name=""/>
@@ -1150,1433 +1418,273 @@
       </p:grpSpPr>
       <p:sp>
         <p:nvSpPr>
-          <p:cNvPr id="2" name="Title 1"/>
+          <p:cNvPr id="2" name="Shape 0"/>
+          <p:cNvSpPr/>
+          <p:nvPr/>
+        </p:nvSpPr>
+        <p:spPr>
+          <a:xfrm>
+            <a:off x="0" y="0"/>
+            <a:ext cx="7269480" cy="7620000"/>
+          </a:xfrm>
+          <a:prstGeom prst="rect">
+            <a:avLst/>
+          </a:prstGeom>
+          <a:solidFill>
+            <a:schemeClr val="accent1"/>
+          </a:solidFill>
+          <a:ln/>
+        </p:spPr>
+        <p:txBody>
+          <a:bodyPr/>
+          <a:lstStyle/>
+          <a:p>
+            <a:endParaRPr lang="it-IT"/>
+          </a:p>
+        </p:txBody>
+      </p:sp>
+      <p:sp>
+        <p:nvSpPr>
+          <p:cNvPr id="3" name="Text 1"/>
+          <p:cNvSpPr/>
+          <p:nvPr/>
+        </p:nvSpPr>
+        <p:spPr>
+          <a:xfrm>
+            <a:off x="594360" y="548640"/>
+            <a:ext cx="6400800" cy="228600"/>
+          </a:xfrm>
+          <a:prstGeom prst="rect">
+            <a:avLst/>
+          </a:prstGeom>
+          <a:noFill/>
+          <a:ln/>
+        </p:spPr>
+        <p:txBody>
+          <a:bodyPr wrap="square" lIns="0" tIns="0" rIns="0" bIns="0" rtlCol="0" anchor="ctr"/>
+          <a:lstStyle/>
+          <a:p>
+            <a:pPr marL="0" indent="0">
+              <a:buNone/>
+            </a:pPr>
+            <a:r>
+              <a:rPr lang="en-US" sz="1300" b="1" dirty="0">
+                <a:solidFill>
+                  <a:schemeClr val="bg1"/>
+                </a:solidFill>
+              </a:rPr>
+              <a:t>ITS MAKER ACADEMY · BOLOGNA</a:t>
+            </a:r>
+            <a:endParaRPr lang="en-US" sz="1300" dirty="0"/>
+          </a:p>
+        </p:txBody>
+      </p:sp>
+      <p:sp>
+        <p:nvSpPr>
+          <p:cNvPr id="4" name="Text 2"/>
           <p:cNvSpPr>
             <a:spLocks noGrp="1"/>
           </p:cNvSpPr>
           <p:nvPr>
-            <p:ph type="title"/>
+            <p:ph type="title" idx="102" hasCustomPrompt="1"/>
           </p:nvPr>
         </p:nvSpPr>
-        <p:spPr/>
+        <p:spPr>
+          <a:xfrm>
+            <a:off x="594360" y="2011680"/>
+            <a:ext cx="6492240" cy="1463040"/>
+          </a:xfrm>
+          <a:prstGeom prst="rect">
+            <a:avLst/>
+          </a:prstGeom>
+          <a:noFill/>
+          <a:ln/>
+        </p:spPr>
+        <p:txBody>
+          <a:bodyPr wrap="square" rtlCol="0"/>
+          <a:lstStyle>
+            <a:lvl1pPr marL="0" indent="0" algn="l">
+              <a:buNone/>
+              <a:defRPr lang="en-US" sz="3900" b="1" dirty="0">
+                <a:solidFill>
+                  <a:schemeClr val="bg1"/>
+                </a:solidFill>
+              </a:defRPr>
+            </a:lvl1pPr>
+          </a:lstStyle>
+          <a:p>
+            <a:pPr marL="0" indent="0" algn="l">
+              <a:buNone/>
+            </a:pPr>
+            <a:endParaRPr lang="en-US" sz="3900" dirty="0"/>
+          </a:p>
+        </p:txBody>
+      </p:sp>
+      <p:sp>
+        <p:nvSpPr>
+          <p:cNvPr id="5" name="Shape 2"/>
+          <p:cNvSpPr/>
+          <p:nvPr/>
+        </p:nvSpPr>
+        <p:spPr>
+          <a:xfrm>
+            <a:off x="594360" y="3639312"/>
+            <a:ext cx="841248" cy="41148"/>
+          </a:xfrm>
+          <a:prstGeom prst="rect">
+            <a:avLst/>
+          </a:prstGeom>
+          <a:solidFill>
+            <a:srgbClr val="F5820B"/>
+          </a:solidFill>
+          <a:ln/>
+        </p:spPr>
         <p:txBody>
           <a:bodyPr/>
           <a:lstStyle/>
           <a:p>
-            <a:r>
-              <a:rPr lang="en-US" smtClean="0"/>
-              <a:t>Click to edit Master title style</a:t>
-            </a:r>
-            <a:endParaRPr lang="en-US"/>
-          </a:p>
-        </p:txBody>
-      </p:sp>
-      <p:sp>
-        <p:nvSpPr>
-          <p:cNvPr id="3" name="Content Placeholder 2"/>
+            <a:endParaRPr lang="it-IT"/>
+          </a:p>
+        </p:txBody>
+      </p:sp>
+      <p:sp>
+        <p:nvSpPr>
+          <p:cNvPr id="6" name="Text 3"/>
           <p:cNvSpPr>
             <a:spLocks noGrp="1"/>
           </p:cNvSpPr>
           <p:nvPr>
-            <p:ph sz="half" idx="1"/>
+            <p:ph type="body" idx="104" hasCustomPrompt="1"/>
           </p:nvPr>
         </p:nvSpPr>
         <p:spPr>
           <a:xfrm>
-            <a:off x="457200" y="1600200"/>
-            <a:ext cx="4038600" cy="4525963"/>
-          </a:xfrm>
-        </p:spPr>
-        <p:txBody>
-          <a:bodyPr/>
+            <a:off x="594360" y="3840480"/>
+            <a:ext cx="6309360" cy="2011680"/>
+          </a:xfrm>
+          <a:prstGeom prst="rect">
+            <a:avLst/>
+          </a:prstGeom>
+          <a:noFill/>
+          <a:ln/>
+        </p:spPr>
+        <p:txBody>
+          <a:bodyPr wrap="square" rtlCol="0"/>
           <a:lstStyle>
-            <a:lvl1pPr>
-              <a:defRPr sz="2800"/>
-            </a:lvl1pPr>
-            <a:lvl2pPr>
-              <a:defRPr sz="2400"/>
-            </a:lvl2pPr>
-            <a:lvl3pPr>
-              <a:defRPr sz="2000"/>
-            </a:lvl3pPr>
-            <a:lvl4pPr>
-              <a:defRPr sz="1800"/>
-            </a:lvl4pPr>
-            <a:lvl5pPr>
-              <a:defRPr sz="1800"/>
-            </a:lvl5pPr>
-            <a:lvl6pPr>
-              <a:defRPr sz="1800"/>
-            </a:lvl6pPr>
-            <a:lvl7pPr>
-              <a:defRPr sz="1800"/>
-            </a:lvl7pPr>
-            <a:lvl8pPr>
-              <a:defRPr sz="1800"/>
-            </a:lvl8pPr>
-            <a:lvl9pPr>
-              <a:defRPr sz="1800"/>
-            </a:lvl9pPr>
-          </a:lstStyle>
-          <a:p>
-            <a:pPr lvl="0"/>
-            <a:r>
-              <a:rPr lang="en-US" smtClean="0"/>
-              <a:t>Click to edit Master text styles</a:t>
-            </a:r>
-          </a:p>
-          <a:p>
-            <a:pPr lvl="1"/>
-            <a:r>
-              <a:rPr lang="en-US" smtClean="0"/>
-              <a:t>Second level</a:t>
-            </a:r>
-          </a:p>
-          <a:p>
-            <a:pPr lvl="2"/>
-            <a:r>
-              <a:rPr lang="en-US" smtClean="0"/>
-              <a:t>Third level</a:t>
-            </a:r>
-          </a:p>
-          <a:p>
-            <a:pPr lvl="3"/>
-            <a:r>
-              <a:rPr lang="en-US" smtClean="0"/>
-              <a:t>Fourth level</a:t>
-            </a:r>
-          </a:p>
-          <a:p>
-            <a:pPr lvl="4"/>
-            <a:r>
-              <a:rPr lang="en-US" smtClean="0"/>
-              <a:t>Fifth level</a:t>
-            </a:r>
-            <a:endParaRPr lang="en-US"/>
-          </a:p>
-        </p:txBody>
-      </p:sp>
-      <p:sp>
-        <p:nvSpPr>
-          <p:cNvPr id="4" name="Content Placeholder 3"/>
-          <p:cNvSpPr>
-            <a:spLocks noGrp="1"/>
-          </p:cNvSpPr>
-          <p:nvPr>
-            <p:ph sz="half" idx="2"/>
-          </p:nvPr>
-        </p:nvSpPr>
-        <p:spPr>
-          <a:xfrm>
-            <a:off x="4648200" y="1600200"/>
-            <a:ext cx="4038600" cy="4525963"/>
-          </a:xfrm>
-        </p:spPr>
-        <p:txBody>
-          <a:bodyPr/>
-          <a:lstStyle>
-            <a:lvl1pPr>
-              <a:defRPr sz="2800"/>
-            </a:lvl1pPr>
-            <a:lvl2pPr>
-              <a:defRPr sz="2400"/>
-            </a:lvl2pPr>
-            <a:lvl3pPr>
-              <a:defRPr sz="2000"/>
-            </a:lvl3pPr>
-            <a:lvl4pPr>
-              <a:defRPr sz="1800"/>
-            </a:lvl4pPr>
-            <a:lvl5pPr>
-              <a:defRPr sz="1800"/>
-            </a:lvl5pPr>
-            <a:lvl6pPr>
-              <a:defRPr sz="1800"/>
-            </a:lvl6pPr>
-            <a:lvl7pPr>
-              <a:defRPr sz="1800"/>
-            </a:lvl7pPr>
-            <a:lvl8pPr>
-              <a:defRPr sz="1800"/>
-            </a:lvl8pPr>
-            <a:lvl9pPr>
-              <a:defRPr sz="1800"/>
-            </a:lvl9pPr>
-          </a:lstStyle>
-          <a:p>
-            <a:pPr lvl="0"/>
-            <a:r>
-              <a:rPr lang="en-US" smtClean="0"/>
-              <a:t>Click to edit Master text styles</a:t>
-            </a:r>
-          </a:p>
-          <a:p>
-            <a:pPr lvl="1"/>
-            <a:r>
-              <a:rPr lang="en-US" smtClean="0"/>
-              <a:t>Second level</a:t>
-            </a:r>
-          </a:p>
-          <a:p>
-            <a:pPr lvl="2"/>
-            <a:r>
-              <a:rPr lang="en-US" smtClean="0"/>
-              <a:t>Third level</a:t>
-            </a:r>
-          </a:p>
-          <a:p>
-            <a:pPr lvl="3"/>
-            <a:r>
-              <a:rPr lang="en-US" smtClean="0"/>
-              <a:t>Fourth level</a:t>
-            </a:r>
-          </a:p>
-          <a:p>
-            <a:pPr lvl="4"/>
-            <a:r>
-              <a:rPr lang="en-US" smtClean="0"/>
-              <a:t>Fifth level</a:t>
-            </a:r>
-            <a:endParaRPr lang="en-US"/>
-          </a:p>
-        </p:txBody>
-      </p:sp>
-      <p:sp>
-        <p:nvSpPr>
-          <p:cNvPr id="5" name="Date Placeholder 4"/>
-          <p:cNvSpPr>
-            <a:spLocks noGrp="1"/>
-          </p:cNvSpPr>
-          <p:nvPr>
-            <p:ph type="dt" sz="half" idx="10"/>
-          </p:nvPr>
-        </p:nvSpPr>
-        <p:spPr/>
-        <p:txBody>
-          <a:bodyPr/>
-          <a:lstStyle/>
-          <a:p>
-            <a:fld id="{5BCAD085-E8A6-8845-BD4E-CB4CCA059FC4}" type="datetimeFigureOut">
-              <a:rPr lang="en-US" smtClean="0"/>
-              <a:t>1/27/13</a:t>
-            </a:fld>
-            <a:endParaRPr lang="en-US"/>
-          </a:p>
-        </p:txBody>
-      </p:sp>
-      <p:sp>
-        <p:nvSpPr>
-          <p:cNvPr id="6" name="Footer Placeholder 5"/>
-          <p:cNvSpPr>
-            <a:spLocks noGrp="1"/>
-          </p:cNvSpPr>
-          <p:nvPr>
-            <p:ph type="ftr" sz="quarter" idx="11"/>
-          </p:nvPr>
-        </p:nvSpPr>
-        <p:spPr/>
-        <p:txBody>
-          <a:bodyPr/>
-          <a:lstStyle/>
-          <a:p>
-            <a:endParaRPr lang="en-US"/>
-          </a:p>
-        </p:txBody>
-      </p:sp>
-      <p:sp>
-        <p:nvSpPr>
-          <p:cNvPr id="7" name="Slide Number Placeholder 6"/>
-          <p:cNvSpPr>
-            <a:spLocks noGrp="1"/>
-          </p:cNvSpPr>
-          <p:nvPr>
-            <p:ph type="sldNum" sz="quarter" idx="12"/>
-          </p:nvPr>
-        </p:nvSpPr>
-        <p:spPr/>
-        <p:txBody>
-          <a:bodyPr/>
-          <a:lstStyle/>
-          <a:p>
-            <a:fld id="{C1FF6DA9-008F-8B48-92A6-B652298478BF}" type="slidenum">
-              <a:rPr lang="en-US" smtClean="0"/>
-              <a:t>‹#›</a:t>
-            </a:fld>
-            <a:endParaRPr lang="en-US"/>
-          </a:p>
-        </p:txBody>
-      </p:sp>
-    </p:spTree>
-    <p:extLst>
-      <p:ext uri="{BB962C8B-B14F-4D97-AF65-F5344CB8AC3E}">
-        <p14:creationId xmlns:p14="http://schemas.microsoft.com/office/powerpoint/2010/main" val="2782244947"/>
-      </p:ext>
-    </p:extLst>
-  </p:cSld>
-  <p:clrMapOvr>
-    <a:masterClrMapping/>
-  </p:clrMapOvr>
-</p:sldLayout>
-</file>
-
-<file path=ppt/slideLayouts/slideLayout5.xml><?xml version="1.0" encoding="utf-8"?>
-<p:sldLayout xmlns:a="http://schemas.openxmlformats.org/drawingml/2006/main" xmlns:r="http://schemas.openxmlformats.org/officeDocument/2006/relationships" xmlns:p="http://schemas.openxmlformats.org/presentationml/2006/main" type="twoTxTwoObj" preserve="1">
-  <p:cSld name="Comparison">
-    <p:spTree>
-      <p:nvGrpSpPr>
-        <p:cNvPr id="1" name=""/>
-        <p:cNvGrpSpPr/>
-        <p:nvPr/>
-      </p:nvGrpSpPr>
-      <p:grpSpPr>
-        <a:xfrm>
-          <a:off x="0" y="0"/>
-          <a:ext cx="0" cy="0"/>
-          <a:chOff x="0" y="0"/>
-          <a:chExt cx="0" cy="0"/>
-        </a:xfrm>
-      </p:grpSpPr>
-      <p:sp>
-        <p:nvSpPr>
-          <p:cNvPr id="2" name="Title 1"/>
-          <p:cNvSpPr>
-            <a:spLocks noGrp="1"/>
-          </p:cNvSpPr>
-          <p:nvPr>
-            <p:ph type="title"/>
-          </p:nvPr>
-        </p:nvSpPr>
-        <p:spPr/>
-        <p:txBody>
-          <a:bodyPr/>
-          <a:lstStyle>
-            <a:lvl1pPr>
-              <a:defRPr/>
+            <a:lvl1pPr marL="0" indent="0" algn="l">
+              <a:buNone/>
+              <a:defRPr lang="en-US" sz="2300" dirty="0">
+                <a:solidFill>
+                  <a:schemeClr val="bg1"/>
+                </a:solidFill>
+              </a:defRPr>
             </a:lvl1pPr>
           </a:lstStyle>
           <a:p>
-            <a:r>
-              <a:rPr lang="en-US" smtClean="0"/>
-              <a:t>Click to edit Master title style</a:t>
-            </a:r>
-            <a:endParaRPr lang="en-US"/>
-          </a:p>
-        </p:txBody>
-      </p:sp>
-      <p:sp>
-        <p:nvSpPr>
-          <p:cNvPr id="3" name="Text Placeholder 2"/>
-          <p:cNvSpPr>
-            <a:spLocks noGrp="1"/>
-          </p:cNvSpPr>
-          <p:nvPr>
-            <p:ph type="body" idx="1"/>
-          </p:nvPr>
-        </p:nvSpPr>
-        <p:spPr>
-          <a:xfrm>
-            <a:off x="457200" y="1535113"/>
-            <a:ext cx="4040188" cy="639762"/>
-          </a:xfrm>
-        </p:spPr>
-        <p:txBody>
-          <a:bodyPr anchor="b"/>
-          <a:lstStyle>
-            <a:lvl1pPr marL="0" indent="0">
+            <a:pPr marL="0" indent="0" algn="l">
               <a:buNone/>
-              <a:defRPr sz="2400" b="1"/>
-            </a:lvl1pPr>
-            <a:lvl2pPr marL="457200" indent="0">
+            </a:pPr>
+            <a:endParaRPr lang="en-US" sz="2300" dirty="0"/>
+          </a:p>
+        </p:txBody>
+      </p:sp>
+      <p:sp>
+        <p:nvSpPr>
+          <p:cNvPr id="7" name="Text 3"/>
+          <p:cNvSpPr/>
+          <p:nvPr/>
+        </p:nvSpPr>
+        <p:spPr>
+          <a:xfrm>
+            <a:off x="594360" y="6830568"/>
+            <a:ext cx="6400800" cy="201168"/>
+          </a:xfrm>
+          <a:prstGeom prst="rect">
+            <a:avLst/>
+          </a:prstGeom>
+          <a:noFill/>
+          <a:ln/>
+        </p:spPr>
+        <p:txBody>
+          <a:bodyPr wrap="square" lIns="0" tIns="0" rIns="0" bIns="0" rtlCol="0" anchor="ctr"/>
+          <a:lstStyle/>
+          <a:p>
+            <a:pPr marL="0" indent="0">
               <a:buNone/>
-              <a:defRPr sz="2000" b="1"/>
-            </a:lvl2pPr>
-            <a:lvl3pPr marL="914400" indent="0">
+            </a:pPr>
+            <a:r>
+              <a:rPr lang="en-US" sz="1200" dirty="0">
+                <a:solidFill>
+                  <a:schemeClr val="bg1"/>
+                </a:solidFill>
+              </a:rPr>
+              <a:t>ITS MAKER ACADEMY · BOLOGNA</a:t>
+            </a:r>
+            <a:endParaRPr lang="en-US" sz="1200" dirty="0"/>
+          </a:p>
+        </p:txBody>
+      </p:sp>
+      <p:pic>
+        <p:nvPicPr>
+          <p:cNvPr id="8" name="Image 0" descr="Logo ITS MAKER Academy"/>
+          <p:cNvPicPr>
+            <a:picLocks noChangeAspect="1"/>
+          </p:cNvPicPr>
+          <p:nvPr/>
+        </p:nvPicPr>
+        <p:blipFill>
+          <a:blip r:embed="rId3"/>
+          <a:stretch>
+            <a:fillRect/>
+          </a:stretch>
+        </p:blipFill>
+        <p:spPr>
+          <a:xfrm>
+            <a:off x="7909560" y="2587752"/>
+            <a:ext cx="3520440" cy="2377440"/>
+          </a:xfrm>
+          <a:prstGeom prst="rect">
+            <a:avLst/>
+          </a:prstGeom>
+        </p:spPr>
+      </p:pic>
+      <p:sp>
+        <p:nvSpPr>
+          <p:cNvPr id="9" name="Text 4"/>
+          <p:cNvSpPr/>
+          <p:nvPr/>
+        </p:nvSpPr>
+        <p:spPr>
+          <a:xfrm>
+            <a:off x="8229600" y="5468112"/>
+            <a:ext cx="3291840" cy="274320"/>
+          </a:xfrm>
+          <a:prstGeom prst="rect">
+            <a:avLst/>
+          </a:prstGeom>
+          <a:noFill/>
+          <a:ln/>
+        </p:spPr>
+        <p:txBody>
+          <a:bodyPr wrap="square" lIns="0" tIns="0" rIns="0" bIns="0" rtlCol="0" anchor="ctr"/>
+          <a:lstStyle/>
+          <a:p>
+            <a:pPr marL="0" indent="0" algn="ctr">
               <a:buNone/>
-              <a:defRPr sz="1800" b="1"/>
-            </a:lvl3pPr>
-            <a:lvl4pPr marL="1371600" indent="0">
-              <a:buNone/>
-              <a:defRPr sz="1600" b="1"/>
-            </a:lvl4pPr>
-            <a:lvl5pPr marL="1828800" indent="0">
-              <a:buNone/>
-              <a:defRPr sz="1600" b="1"/>
-            </a:lvl5pPr>
-            <a:lvl6pPr marL="2286000" indent="0">
-              <a:buNone/>
-              <a:defRPr sz="1600" b="1"/>
-            </a:lvl6pPr>
-            <a:lvl7pPr marL="2743200" indent="0">
-              <a:buNone/>
-              <a:defRPr sz="1600" b="1"/>
-            </a:lvl7pPr>
-            <a:lvl8pPr marL="3200400" indent="0">
-              <a:buNone/>
-              <a:defRPr sz="1600" b="1"/>
-            </a:lvl8pPr>
-            <a:lvl9pPr marL="3657600" indent="0">
-              <a:buNone/>
-              <a:defRPr sz="1600" b="1"/>
-            </a:lvl9pPr>
-          </a:lstStyle>
-          <a:p>
-            <a:pPr lvl="0"/>
-            <a:r>
-              <a:rPr lang="en-US" smtClean="0"/>
-              <a:t>Click to edit Master text styles</a:t>
-            </a:r>
-          </a:p>
-        </p:txBody>
-      </p:sp>
-      <p:sp>
-        <p:nvSpPr>
-          <p:cNvPr id="4" name="Content Placeholder 3"/>
-          <p:cNvSpPr>
-            <a:spLocks noGrp="1"/>
-          </p:cNvSpPr>
-          <p:nvPr>
-            <p:ph sz="half" idx="2"/>
-          </p:nvPr>
-        </p:nvSpPr>
-        <p:spPr>
-          <a:xfrm>
-            <a:off x="457200" y="2174875"/>
-            <a:ext cx="4040188" cy="3951288"/>
-          </a:xfrm>
-        </p:spPr>
-        <p:txBody>
-          <a:bodyPr/>
-          <a:lstStyle>
-            <a:lvl1pPr>
-              <a:defRPr sz="2400"/>
-            </a:lvl1pPr>
-            <a:lvl2pPr>
-              <a:defRPr sz="2000"/>
-            </a:lvl2pPr>
-            <a:lvl3pPr>
-              <a:defRPr sz="1800"/>
-            </a:lvl3pPr>
-            <a:lvl4pPr>
-              <a:defRPr sz="1600"/>
-            </a:lvl4pPr>
-            <a:lvl5pPr>
-              <a:defRPr sz="1600"/>
-            </a:lvl5pPr>
-            <a:lvl6pPr>
-              <a:defRPr sz="1600"/>
-            </a:lvl6pPr>
-            <a:lvl7pPr>
-              <a:defRPr sz="1600"/>
-            </a:lvl7pPr>
-            <a:lvl8pPr>
-              <a:defRPr sz="1600"/>
-            </a:lvl8pPr>
-            <a:lvl9pPr>
-              <a:defRPr sz="1600"/>
-            </a:lvl9pPr>
-          </a:lstStyle>
-          <a:p>
-            <a:pPr lvl="0"/>
-            <a:r>
-              <a:rPr lang="en-US" smtClean="0"/>
-              <a:t>Click to edit Master text styles</a:t>
-            </a:r>
-          </a:p>
-          <a:p>
-            <a:pPr lvl="1"/>
-            <a:r>
-              <a:rPr lang="en-US" smtClean="0"/>
-              <a:t>Second level</a:t>
-            </a:r>
-          </a:p>
-          <a:p>
-            <a:pPr lvl="2"/>
-            <a:r>
-              <a:rPr lang="en-US" smtClean="0"/>
-              <a:t>Third level</a:t>
-            </a:r>
-          </a:p>
-          <a:p>
-            <a:pPr lvl="3"/>
-            <a:r>
-              <a:rPr lang="en-US" smtClean="0"/>
-              <a:t>Fourth level</a:t>
-            </a:r>
-          </a:p>
-          <a:p>
-            <a:pPr lvl="4"/>
-            <a:r>
-              <a:rPr lang="en-US" smtClean="0"/>
-              <a:t>Fifth level</a:t>
-            </a:r>
-            <a:endParaRPr lang="en-US"/>
-          </a:p>
-        </p:txBody>
-      </p:sp>
-      <p:sp>
-        <p:nvSpPr>
-          <p:cNvPr id="5" name="Text Placeholder 4"/>
-          <p:cNvSpPr>
-            <a:spLocks noGrp="1"/>
-          </p:cNvSpPr>
-          <p:nvPr>
-            <p:ph type="body" sz="quarter" idx="3"/>
-          </p:nvPr>
-        </p:nvSpPr>
-        <p:spPr>
-          <a:xfrm>
-            <a:off x="4645025" y="1535113"/>
-            <a:ext cx="4041775" cy="639762"/>
-          </a:xfrm>
-        </p:spPr>
-        <p:txBody>
-          <a:bodyPr anchor="b"/>
-          <a:lstStyle>
-            <a:lvl1pPr marL="0" indent="0">
-              <a:buNone/>
-              <a:defRPr sz="2400" b="1"/>
-            </a:lvl1pPr>
-            <a:lvl2pPr marL="457200" indent="0">
-              <a:buNone/>
-              <a:defRPr sz="2000" b="1"/>
-            </a:lvl2pPr>
-            <a:lvl3pPr marL="914400" indent="0">
-              <a:buNone/>
-              <a:defRPr sz="1800" b="1"/>
-            </a:lvl3pPr>
-            <a:lvl4pPr marL="1371600" indent="0">
-              <a:buNone/>
-              <a:defRPr sz="1600" b="1"/>
-            </a:lvl4pPr>
-            <a:lvl5pPr marL="1828800" indent="0">
-              <a:buNone/>
-              <a:defRPr sz="1600" b="1"/>
-            </a:lvl5pPr>
-            <a:lvl6pPr marL="2286000" indent="0">
-              <a:buNone/>
-              <a:defRPr sz="1600" b="1"/>
-            </a:lvl6pPr>
-            <a:lvl7pPr marL="2743200" indent="0">
-              <a:buNone/>
-              <a:defRPr sz="1600" b="1"/>
-            </a:lvl7pPr>
-            <a:lvl8pPr marL="3200400" indent="0">
-              <a:buNone/>
-              <a:defRPr sz="1600" b="1"/>
-            </a:lvl8pPr>
-            <a:lvl9pPr marL="3657600" indent="0">
-              <a:buNone/>
-              <a:defRPr sz="1600" b="1"/>
-            </a:lvl9pPr>
-          </a:lstStyle>
-          <a:p>
-            <a:pPr lvl="0"/>
-            <a:r>
-              <a:rPr lang="en-US" smtClean="0"/>
-              <a:t>Click to edit Master text styles</a:t>
-            </a:r>
-          </a:p>
-        </p:txBody>
-      </p:sp>
-      <p:sp>
-        <p:nvSpPr>
-          <p:cNvPr id="6" name="Content Placeholder 5"/>
-          <p:cNvSpPr>
-            <a:spLocks noGrp="1"/>
-          </p:cNvSpPr>
-          <p:nvPr>
-            <p:ph sz="quarter" idx="4"/>
-          </p:nvPr>
-        </p:nvSpPr>
-        <p:spPr>
-          <a:xfrm>
-            <a:off x="4645025" y="2174875"/>
-            <a:ext cx="4041775" cy="3951288"/>
-          </a:xfrm>
-        </p:spPr>
-        <p:txBody>
-          <a:bodyPr/>
-          <a:lstStyle>
-            <a:lvl1pPr>
-              <a:defRPr sz="2400"/>
-            </a:lvl1pPr>
-            <a:lvl2pPr>
-              <a:defRPr sz="2000"/>
-            </a:lvl2pPr>
-            <a:lvl3pPr>
-              <a:defRPr sz="1800"/>
-            </a:lvl3pPr>
-            <a:lvl4pPr>
-              <a:defRPr sz="1600"/>
-            </a:lvl4pPr>
-            <a:lvl5pPr>
-              <a:defRPr sz="1600"/>
-            </a:lvl5pPr>
-            <a:lvl6pPr>
-              <a:defRPr sz="1600"/>
-            </a:lvl6pPr>
-            <a:lvl7pPr>
-              <a:defRPr sz="1600"/>
-            </a:lvl7pPr>
-            <a:lvl8pPr>
-              <a:defRPr sz="1600"/>
-            </a:lvl8pPr>
-            <a:lvl9pPr>
-              <a:defRPr sz="1600"/>
-            </a:lvl9pPr>
-          </a:lstStyle>
-          <a:p>
-            <a:pPr lvl="0"/>
-            <a:r>
-              <a:rPr lang="en-US" smtClean="0"/>
-              <a:t>Click to edit Master text styles</a:t>
-            </a:r>
-          </a:p>
-          <a:p>
-            <a:pPr lvl="1"/>
-            <a:r>
-              <a:rPr lang="en-US" smtClean="0"/>
-              <a:t>Second level</a:t>
-            </a:r>
-          </a:p>
-          <a:p>
-            <a:pPr lvl="2"/>
-            <a:r>
-              <a:rPr lang="en-US" smtClean="0"/>
-              <a:t>Third level</a:t>
-            </a:r>
-          </a:p>
-          <a:p>
-            <a:pPr lvl="3"/>
-            <a:r>
-              <a:rPr lang="en-US" smtClean="0"/>
-              <a:t>Fourth level</a:t>
-            </a:r>
-          </a:p>
-          <a:p>
-            <a:pPr lvl="4"/>
-            <a:r>
-              <a:rPr lang="en-US" smtClean="0"/>
-              <a:t>Fifth level</a:t>
-            </a:r>
-            <a:endParaRPr lang="en-US"/>
-          </a:p>
-        </p:txBody>
-      </p:sp>
-      <p:sp>
-        <p:nvSpPr>
-          <p:cNvPr id="7" name="Date Placeholder 6"/>
-          <p:cNvSpPr>
-            <a:spLocks noGrp="1"/>
-          </p:cNvSpPr>
-          <p:nvPr>
-            <p:ph type="dt" sz="half" idx="10"/>
-          </p:nvPr>
-        </p:nvSpPr>
-        <p:spPr/>
-        <p:txBody>
-          <a:bodyPr/>
-          <a:lstStyle/>
-          <a:p>
-            <a:fld id="{5BCAD085-E8A6-8845-BD4E-CB4CCA059FC4}" type="datetimeFigureOut">
-              <a:rPr lang="en-US" smtClean="0"/>
-              <a:t>1/27/13</a:t>
-            </a:fld>
-            <a:endParaRPr lang="en-US"/>
-          </a:p>
-        </p:txBody>
-      </p:sp>
-      <p:sp>
-        <p:nvSpPr>
-          <p:cNvPr id="8" name="Footer Placeholder 7"/>
-          <p:cNvSpPr>
-            <a:spLocks noGrp="1"/>
-          </p:cNvSpPr>
-          <p:nvPr>
-            <p:ph type="ftr" sz="quarter" idx="11"/>
-          </p:nvPr>
-        </p:nvSpPr>
-        <p:spPr/>
-        <p:txBody>
-          <a:bodyPr/>
-          <a:lstStyle/>
-          <a:p>
-            <a:endParaRPr lang="en-US"/>
-          </a:p>
-        </p:txBody>
-      </p:sp>
-      <p:sp>
-        <p:nvSpPr>
-          <p:cNvPr id="9" name="Slide Number Placeholder 8"/>
-          <p:cNvSpPr>
-            <a:spLocks noGrp="1"/>
-          </p:cNvSpPr>
-          <p:nvPr>
-            <p:ph type="sldNum" sz="quarter" idx="12"/>
-          </p:nvPr>
-        </p:nvSpPr>
-        <p:spPr/>
-        <p:txBody>
-          <a:bodyPr/>
-          <a:lstStyle/>
-          <a:p>
-            <a:fld id="{C1FF6DA9-008F-8B48-92A6-B652298478BF}" type="slidenum">
-              <a:rPr lang="en-US" smtClean="0"/>
-              <a:t>‹#›</a:t>
-            </a:fld>
-            <a:endParaRPr lang="en-US"/>
+            </a:pPr>
+            <a:r>
+              <a:rPr lang="en-US" sz="1700" b="1" dirty="0">
+                <a:solidFill>
+                  <a:schemeClr val="accent1"/>
+                </a:solidFill>
+              </a:rPr>
+              <a:t>WWW.ITSMAKER.IT</a:t>
+            </a:r>
+            <a:endParaRPr lang="en-US" sz="1700" dirty="0"/>
           </a:p>
         </p:txBody>
       </p:sp>
     </p:spTree>
-    <p:extLst>
-      <p:ext uri="{BB962C8B-B14F-4D97-AF65-F5344CB8AC3E}">
-        <p14:creationId xmlns:p14="http://schemas.microsoft.com/office/powerpoint/2010/main" val="990158736"/>
-      </p:ext>
-    </p:extLst>
-  </p:cSld>
-  <p:clrMapOvr>
-    <a:masterClrMapping/>
-  </p:clrMapOvr>
-</p:sldLayout>
-</file>
-
-<file path=ppt/slideLayouts/slideLayout6.xml><?xml version="1.0" encoding="utf-8"?>
-<p:sldLayout xmlns:a="http://schemas.openxmlformats.org/drawingml/2006/main" xmlns:r="http://schemas.openxmlformats.org/officeDocument/2006/relationships" xmlns:p="http://schemas.openxmlformats.org/presentationml/2006/main" type="titleOnly" preserve="1">
-  <p:cSld name="Title Only">
-    <p:spTree>
-      <p:nvGrpSpPr>
-        <p:cNvPr id="1" name=""/>
-        <p:cNvGrpSpPr/>
-        <p:nvPr/>
-      </p:nvGrpSpPr>
-      <p:grpSpPr>
-        <a:xfrm>
-          <a:off x="0" y="0"/>
-          <a:ext cx="0" cy="0"/>
-          <a:chOff x="0" y="0"/>
-          <a:chExt cx="0" cy="0"/>
-        </a:xfrm>
-      </p:grpSpPr>
-      <p:sp>
-        <p:nvSpPr>
-          <p:cNvPr id="2" name="Title 1"/>
-          <p:cNvSpPr>
-            <a:spLocks noGrp="1"/>
-          </p:cNvSpPr>
-          <p:nvPr>
-            <p:ph type="title"/>
-          </p:nvPr>
-        </p:nvSpPr>
-        <p:spPr/>
-        <p:txBody>
-          <a:bodyPr/>
-          <a:lstStyle/>
-          <a:p>
-            <a:r>
-              <a:rPr lang="en-US" smtClean="0"/>
-              <a:t>Click to edit Master title style</a:t>
-            </a:r>
-            <a:endParaRPr lang="en-US"/>
-          </a:p>
-        </p:txBody>
-      </p:sp>
-      <p:sp>
-        <p:nvSpPr>
-          <p:cNvPr id="3" name="Date Placeholder 2"/>
-          <p:cNvSpPr>
-            <a:spLocks noGrp="1"/>
-          </p:cNvSpPr>
-          <p:nvPr>
-            <p:ph type="dt" sz="half" idx="10"/>
-          </p:nvPr>
-        </p:nvSpPr>
-        <p:spPr/>
-        <p:txBody>
-          <a:bodyPr/>
-          <a:lstStyle/>
-          <a:p>
-            <a:fld id="{5BCAD085-E8A6-8845-BD4E-CB4CCA059FC4}" type="datetimeFigureOut">
-              <a:rPr lang="en-US" smtClean="0"/>
-              <a:t>1/27/13</a:t>
-            </a:fld>
-            <a:endParaRPr lang="en-US"/>
-          </a:p>
-        </p:txBody>
-      </p:sp>
-      <p:sp>
-        <p:nvSpPr>
-          <p:cNvPr id="4" name="Footer Placeholder 3"/>
-          <p:cNvSpPr>
-            <a:spLocks noGrp="1"/>
-          </p:cNvSpPr>
-          <p:nvPr>
-            <p:ph type="ftr" sz="quarter" idx="11"/>
-          </p:nvPr>
-        </p:nvSpPr>
-        <p:spPr/>
-        <p:txBody>
-          <a:bodyPr/>
-          <a:lstStyle/>
-          <a:p>
-            <a:endParaRPr lang="en-US"/>
-          </a:p>
-        </p:txBody>
-      </p:sp>
-      <p:sp>
-        <p:nvSpPr>
-          <p:cNvPr id="5" name="Slide Number Placeholder 4"/>
-          <p:cNvSpPr>
-            <a:spLocks noGrp="1"/>
-          </p:cNvSpPr>
-          <p:nvPr>
-            <p:ph type="sldNum" sz="quarter" idx="12"/>
-          </p:nvPr>
-        </p:nvSpPr>
-        <p:spPr/>
-        <p:txBody>
-          <a:bodyPr/>
-          <a:lstStyle/>
-          <a:p>
-            <a:fld id="{C1FF6DA9-008F-8B48-92A6-B652298478BF}" type="slidenum">
-              <a:rPr lang="en-US" smtClean="0"/>
-              <a:t>‹#›</a:t>
-            </a:fld>
-            <a:endParaRPr lang="en-US"/>
-          </a:p>
-        </p:txBody>
-      </p:sp>
-    </p:spTree>
-    <p:extLst>
-      <p:ext uri="{BB962C8B-B14F-4D97-AF65-F5344CB8AC3E}">
-        <p14:creationId xmlns:p14="http://schemas.microsoft.com/office/powerpoint/2010/main" val="727027711"/>
-      </p:ext>
-    </p:extLst>
-  </p:cSld>
-  <p:clrMapOvr>
-    <a:masterClrMapping/>
-  </p:clrMapOvr>
-</p:sldLayout>
-</file>
-
-<file path=ppt/slideLayouts/slideLayout7.xml><?xml version="1.0" encoding="utf-8"?>
-<p:sldLayout xmlns:a="http://schemas.openxmlformats.org/drawingml/2006/main" xmlns:r="http://schemas.openxmlformats.org/officeDocument/2006/relationships" xmlns:p="http://schemas.openxmlformats.org/presentationml/2006/main" type="blank" preserve="1">
-  <p:cSld name="Blank">
-    <p:spTree>
-      <p:nvGrpSpPr>
-        <p:cNvPr id="1" name=""/>
-        <p:cNvGrpSpPr/>
-        <p:nvPr/>
-      </p:nvGrpSpPr>
-      <p:grpSpPr>
-        <a:xfrm>
-          <a:off x="0" y="0"/>
-          <a:ext cx="0" cy="0"/>
-          <a:chOff x="0" y="0"/>
-          <a:chExt cx="0" cy="0"/>
-        </a:xfrm>
-      </p:grpSpPr>
-      <p:sp>
-        <p:nvSpPr>
-          <p:cNvPr id="2" name="Date Placeholder 1"/>
-          <p:cNvSpPr>
-            <a:spLocks noGrp="1"/>
-          </p:cNvSpPr>
-          <p:nvPr>
-            <p:ph type="dt" sz="half" idx="10"/>
-          </p:nvPr>
-        </p:nvSpPr>
-        <p:spPr/>
-        <p:txBody>
-          <a:bodyPr/>
-          <a:lstStyle/>
-          <a:p>
-            <a:fld id="{5BCAD085-E8A6-8845-BD4E-CB4CCA059FC4}" type="datetimeFigureOut">
-              <a:rPr lang="en-US" smtClean="0"/>
-              <a:t>1/27/13</a:t>
-            </a:fld>
-            <a:endParaRPr lang="en-US"/>
-          </a:p>
-        </p:txBody>
-      </p:sp>
-      <p:sp>
-        <p:nvSpPr>
-          <p:cNvPr id="3" name="Footer Placeholder 2"/>
-          <p:cNvSpPr>
-            <a:spLocks noGrp="1"/>
-          </p:cNvSpPr>
-          <p:nvPr>
-            <p:ph type="ftr" sz="quarter" idx="11"/>
-          </p:nvPr>
-        </p:nvSpPr>
-        <p:spPr/>
-        <p:txBody>
-          <a:bodyPr/>
-          <a:lstStyle/>
-          <a:p>
-            <a:endParaRPr lang="en-US"/>
-          </a:p>
-        </p:txBody>
-      </p:sp>
-      <p:sp>
-        <p:nvSpPr>
-          <p:cNvPr id="4" name="Slide Number Placeholder 3"/>
-          <p:cNvSpPr>
-            <a:spLocks noGrp="1"/>
-          </p:cNvSpPr>
-          <p:nvPr>
-            <p:ph type="sldNum" sz="quarter" idx="12"/>
-          </p:nvPr>
-        </p:nvSpPr>
-        <p:spPr/>
-        <p:txBody>
-          <a:bodyPr/>
-          <a:lstStyle/>
-          <a:p>
-            <a:fld id="{C1FF6DA9-008F-8B48-92A6-B652298478BF}" type="slidenum">
-              <a:rPr lang="en-US" smtClean="0"/>
-              <a:t>‹#›</a:t>
-            </a:fld>
-            <a:endParaRPr lang="en-US"/>
-          </a:p>
-        </p:txBody>
-      </p:sp>
-    </p:spTree>
-    <p:extLst>
-      <p:ext uri="{BB962C8B-B14F-4D97-AF65-F5344CB8AC3E}">
-        <p14:creationId xmlns:p14="http://schemas.microsoft.com/office/powerpoint/2010/main" val="1212999818"/>
-      </p:ext>
-    </p:extLst>
-  </p:cSld>
-  <p:clrMapOvr>
-    <a:masterClrMapping/>
-  </p:clrMapOvr>
-</p:sldLayout>
-</file>
-
-<file path=ppt/slideLayouts/slideLayout8.xml><?xml version="1.0" encoding="utf-8"?>
-<p:sldLayout xmlns:a="http://schemas.openxmlformats.org/drawingml/2006/main" xmlns:r="http://schemas.openxmlformats.org/officeDocument/2006/relationships" xmlns:p="http://schemas.openxmlformats.org/presentationml/2006/main" type="objTx" preserve="1">
-  <p:cSld name="Content with Caption">
-    <p:spTree>
-      <p:nvGrpSpPr>
-        <p:cNvPr id="1" name=""/>
-        <p:cNvGrpSpPr/>
-        <p:nvPr/>
-      </p:nvGrpSpPr>
-      <p:grpSpPr>
-        <a:xfrm>
-          <a:off x="0" y="0"/>
-          <a:ext cx="0" cy="0"/>
-          <a:chOff x="0" y="0"/>
-          <a:chExt cx="0" cy="0"/>
-        </a:xfrm>
-      </p:grpSpPr>
-      <p:sp>
-        <p:nvSpPr>
-          <p:cNvPr id="2" name="Title 1"/>
-          <p:cNvSpPr>
-            <a:spLocks noGrp="1"/>
-          </p:cNvSpPr>
-          <p:nvPr>
-            <p:ph type="title"/>
-          </p:nvPr>
-        </p:nvSpPr>
-        <p:spPr>
-          <a:xfrm>
-            <a:off x="457200" y="273050"/>
-            <a:ext cx="3008313" cy="1162050"/>
-          </a:xfrm>
-        </p:spPr>
-        <p:txBody>
-          <a:bodyPr anchor="b"/>
-          <a:lstStyle>
-            <a:lvl1pPr algn="l">
-              <a:defRPr sz="2000" b="1"/>
-            </a:lvl1pPr>
-          </a:lstStyle>
-          <a:p>
-            <a:r>
-              <a:rPr lang="en-US" smtClean="0"/>
-              <a:t>Click to edit Master title style</a:t>
-            </a:r>
-            <a:endParaRPr lang="en-US"/>
-          </a:p>
-        </p:txBody>
-      </p:sp>
-      <p:sp>
-        <p:nvSpPr>
-          <p:cNvPr id="3" name="Content Placeholder 2"/>
-          <p:cNvSpPr>
-            <a:spLocks noGrp="1"/>
-          </p:cNvSpPr>
-          <p:nvPr>
-            <p:ph idx="1"/>
-          </p:nvPr>
-        </p:nvSpPr>
-        <p:spPr>
-          <a:xfrm>
-            <a:off x="3575050" y="273050"/>
-            <a:ext cx="5111750" cy="5853113"/>
-          </a:xfrm>
-        </p:spPr>
-        <p:txBody>
-          <a:bodyPr/>
-          <a:lstStyle>
-            <a:lvl1pPr>
-              <a:defRPr sz="3200"/>
-            </a:lvl1pPr>
-            <a:lvl2pPr>
-              <a:defRPr sz="2800"/>
-            </a:lvl2pPr>
-            <a:lvl3pPr>
-              <a:defRPr sz="2400"/>
-            </a:lvl3pPr>
-            <a:lvl4pPr>
-              <a:defRPr sz="2000"/>
-            </a:lvl4pPr>
-            <a:lvl5pPr>
-              <a:defRPr sz="2000"/>
-            </a:lvl5pPr>
-            <a:lvl6pPr>
-              <a:defRPr sz="2000"/>
-            </a:lvl6pPr>
-            <a:lvl7pPr>
-              <a:defRPr sz="2000"/>
-            </a:lvl7pPr>
-            <a:lvl8pPr>
-              <a:defRPr sz="2000"/>
-            </a:lvl8pPr>
-            <a:lvl9pPr>
-              <a:defRPr sz="2000"/>
-            </a:lvl9pPr>
-          </a:lstStyle>
-          <a:p>
-            <a:pPr lvl="0"/>
-            <a:r>
-              <a:rPr lang="en-US" smtClean="0"/>
-              <a:t>Click to edit Master text styles</a:t>
-            </a:r>
-          </a:p>
-          <a:p>
-            <a:pPr lvl="1"/>
-            <a:r>
-              <a:rPr lang="en-US" smtClean="0"/>
-              <a:t>Second level</a:t>
-            </a:r>
-          </a:p>
-          <a:p>
-            <a:pPr lvl="2"/>
-            <a:r>
-              <a:rPr lang="en-US" smtClean="0"/>
-              <a:t>Third level</a:t>
-            </a:r>
-          </a:p>
-          <a:p>
-            <a:pPr lvl="3"/>
-            <a:r>
-              <a:rPr lang="en-US" smtClean="0"/>
-              <a:t>Fourth level</a:t>
-            </a:r>
-          </a:p>
-          <a:p>
-            <a:pPr lvl="4"/>
-            <a:r>
-              <a:rPr lang="en-US" smtClean="0"/>
-              <a:t>Fifth level</a:t>
-            </a:r>
-            <a:endParaRPr lang="en-US"/>
-          </a:p>
-        </p:txBody>
-      </p:sp>
-      <p:sp>
-        <p:nvSpPr>
-          <p:cNvPr id="4" name="Text Placeholder 3"/>
-          <p:cNvSpPr>
-            <a:spLocks noGrp="1"/>
-          </p:cNvSpPr>
-          <p:nvPr>
-            <p:ph type="body" sz="half" idx="2"/>
-          </p:nvPr>
-        </p:nvSpPr>
-        <p:spPr>
-          <a:xfrm>
-            <a:off x="457200" y="1435100"/>
-            <a:ext cx="3008313" cy="4691063"/>
-          </a:xfrm>
-        </p:spPr>
-        <p:txBody>
-          <a:bodyPr/>
-          <a:lstStyle>
-            <a:lvl1pPr marL="0" indent="0">
-              <a:buNone/>
-              <a:defRPr sz="1400"/>
-            </a:lvl1pPr>
-            <a:lvl2pPr marL="457200" indent="0">
-              <a:buNone/>
-              <a:defRPr sz="1200"/>
-            </a:lvl2pPr>
-            <a:lvl3pPr marL="914400" indent="0">
-              <a:buNone/>
-              <a:defRPr sz="1000"/>
-            </a:lvl3pPr>
-            <a:lvl4pPr marL="1371600" indent="0">
-              <a:buNone/>
-              <a:defRPr sz="900"/>
-            </a:lvl4pPr>
-            <a:lvl5pPr marL="1828800" indent="0">
-              <a:buNone/>
-              <a:defRPr sz="900"/>
-            </a:lvl5pPr>
-            <a:lvl6pPr marL="2286000" indent="0">
-              <a:buNone/>
-              <a:defRPr sz="900"/>
-            </a:lvl6pPr>
-            <a:lvl7pPr marL="2743200" indent="0">
-              <a:buNone/>
-              <a:defRPr sz="900"/>
-            </a:lvl7pPr>
-            <a:lvl8pPr marL="3200400" indent="0">
-              <a:buNone/>
-              <a:defRPr sz="900"/>
-            </a:lvl8pPr>
-            <a:lvl9pPr marL="3657600" indent="0">
-              <a:buNone/>
-              <a:defRPr sz="900"/>
-            </a:lvl9pPr>
-          </a:lstStyle>
-          <a:p>
-            <a:pPr lvl="0"/>
-            <a:r>
-              <a:rPr lang="en-US" smtClean="0"/>
-              <a:t>Click to edit Master text styles</a:t>
-            </a:r>
-          </a:p>
-        </p:txBody>
-      </p:sp>
-      <p:sp>
-        <p:nvSpPr>
-          <p:cNvPr id="5" name="Date Placeholder 4"/>
-          <p:cNvSpPr>
-            <a:spLocks noGrp="1"/>
-          </p:cNvSpPr>
-          <p:nvPr>
-            <p:ph type="dt" sz="half" idx="10"/>
-          </p:nvPr>
-        </p:nvSpPr>
-        <p:spPr/>
-        <p:txBody>
-          <a:bodyPr/>
-          <a:lstStyle/>
-          <a:p>
-            <a:fld id="{5BCAD085-E8A6-8845-BD4E-CB4CCA059FC4}" type="datetimeFigureOut">
-              <a:rPr lang="en-US" smtClean="0"/>
-              <a:t>1/27/13</a:t>
-            </a:fld>
-            <a:endParaRPr lang="en-US"/>
-          </a:p>
-        </p:txBody>
-      </p:sp>
-      <p:sp>
-        <p:nvSpPr>
-          <p:cNvPr id="6" name="Footer Placeholder 5"/>
-          <p:cNvSpPr>
-            <a:spLocks noGrp="1"/>
-          </p:cNvSpPr>
-          <p:nvPr>
-            <p:ph type="ftr" sz="quarter" idx="11"/>
-          </p:nvPr>
-        </p:nvSpPr>
-        <p:spPr/>
-        <p:txBody>
-          <a:bodyPr/>
-          <a:lstStyle/>
-          <a:p>
-            <a:endParaRPr lang="en-US"/>
-          </a:p>
-        </p:txBody>
-      </p:sp>
-      <p:sp>
-        <p:nvSpPr>
-          <p:cNvPr id="7" name="Slide Number Placeholder 6"/>
-          <p:cNvSpPr>
-            <a:spLocks noGrp="1"/>
-          </p:cNvSpPr>
-          <p:nvPr>
-            <p:ph type="sldNum" sz="quarter" idx="12"/>
-          </p:nvPr>
-        </p:nvSpPr>
-        <p:spPr/>
-        <p:txBody>
-          <a:bodyPr/>
-          <a:lstStyle/>
-          <a:p>
-            <a:fld id="{C1FF6DA9-008F-8B48-92A6-B652298478BF}" type="slidenum">
-              <a:rPr lang="en-US" smtClean="0"/>
-              <a:t>‹#›</a:t>
-            </a:fld>
-            <a:endParaRPr lang="en-US"/>
-          </a:p>
-        </p:txBody>
-      </p:sp>
-    </p:spTree>
-    <p:extLst>
-      <p:ext uri="{BB962C8B-B14F-4D97-AF65-F5344CB8AC3E}">
-        <p14:creationId xmlns:p14="http://schemas.microsoft.com/office/powerpoint/2010/main" val="1840726560"/>
-      </p:ext>
-    </p:extLst>
-  </p:cSld>
-  <p:clrMapOvr>
-    <a:masterClrMapping/>
-  </p:clrMapOvr>
-</p:sldLayout>
-</file>
-
-<file path=ppt/slideLayouts/slideLayout9.xml><?xml version="1.0" encoding="utf-8"?>
-<p:sldLayout xmlns:a="http://schemas.openxmlformats.org/drawingml/2006/main" xmlns:r="http://schemas.openxmlformats.org/officeDocument/2006/relationships" xmlns:p="http://schemas.openxmlformats.org/presentationml/2006/main" type="picTx" preserve="1">
-  <p:cSld name="Picture with Caption">
-    <p:spTree>
-      <p:nvGrpSpPr>
-        <p:cNvPr id="1" name=""/>
-        <p:cNvGrpSpPr/>
-        <p:nvPr/>
-      </p:nvGrpSpPr>
-      <p:grpSpPr>
-        <a:xfrm>
-          <a:off x="0" y="0"/>
-          <a:ext cx="0" cy="0"/>
-          <a:chOff x="0" y="0"/>
-          <a:chExt cx="0" cy="0"/>
-        </a:xfrm>
-      </p:grpSpPr>
-      <p:sp>
-        <p:nvSpPr>
-          <p:cNvPr id="2" name="Title 1"/>
-          <p:cNvSpPr>
-            <a:spLocks noGrp="1"/>
-          </p:cNvSpPr>
-          <p:nvPr>
-            <p:ph type="title"/>
-          </p:nvPr>
-        </p:nvSpPr>
-        <p:spPr>
-          <a:xfrm>
-            <a:off x="1792288" y="4800600"/>
-            <a:ext cx="5486400" cy="566738"/>
-          </a:xfrm>
-        </p:spPr>
-        <p:txBody>
-          <a:bodyPr anchor="b"/>
-          <a:lstStyle>
-            <a:lvl1pPr algn="l">
-              <a:defRPr sz="2000" b="1"/>
-            </a:lvl1pPr>
-          </a:lstStyle>
-          <a:p>
-            <a:r>
-              <a:rPr lang="en-US" smtClean="0"/>
-              <a:t>Click to edit Master title style</a:t>
-            </a:r>
-            <a:endParaRPr lang="en-US"/>
-          </a:p>
-        </p:txBody>
-      </p:sp>
-      <p:sp>
-        <p:nvSpPr>
-          <p:cNvPr id="3" name="Picture Placeholder 2"/>
-          <p:cNvSpPr>
-            <a:spLocks noGrp="1"/>
-          </p:cNvSpPr>
-          <p:nvPr>
-            <p:ph type="pic" idx="1"/>
-          </p:nvPr>
-        </p:nvSpPr>
-        <p:spPr>
-          <a:xfrm>
-            <a:off x="1792288" y="612775"/>
-            <a:ext cx="5486400" cy="4114800"/>
-          </a:xfrm>
-        </p:spPr>
-        <p:txBody>
-          <a:bodyPr/>
-          <a:lstStyle>
-            <a:lvl1pPr marL="0" indent="0">
-              <a:buNone/>
-              <a:defRPr sz="3200"/>
-            </a:lvl1pPr>
-            <a:lvl2pPr marL="457200" indent="0">
-              <a:buNone/>
-              <a:defRPr sz="2800"/>
-            </a:lvl2pPr>
-            <a:lvl3pPr marL="914400" indent="0">
-              <a:buNone/>
-              <a:defRPr sz="2400"/>
-            </a:lvl3pPr>
-            <a:lvl4pPr marL="1371600" indent="0">
-              <a:buNone/>
-              <a:defRPr sz="2000"/>
-            </a:lvl4pPr>
-            <a:lvl5pPr marL="1828800" indent="0">
-              <a:buNone/>
-              <a:defRPr sz="2000"/>
-            </a:lvl5pPr>
-            <a:lvl6pPr marL="2286000" indent="0">
-              <a:buNone/>
-              <a:defRPr sz="2000"/>
-            </a:lvl6pPr>
-            <a:lvl7pPr marL="2743200" indent="0">
-              <a:buNone/>
-              <a:defRPr sz="2000"/>
-            </a:lvl7pPr>
-            <a:lvl8pPr marL="3200400" indent="0">
-              <a:buNone/>
-              <a:defRPr sz="2000"/>
-            </a:lvl8pPr>
-            <a:lvl9pPr marL="3657600" indent="0">
-              <a:buNone/>
-              <a:defRPr sz="2000"/>
-            </a:lvl9pPr>
-          </a:lstStyle>
-          <a:p>
-            <a:endParaRPr lang="en-US"/>
-          </a:p>
-        </p:txBody>
-      </p:sp>
-      <p:sp>
-        <p:nvSpPr>
-          <p:cNvPr id="4" name="Text Placeholder 3"/>
-          <p:cNvSpPr>
-            <a:spLocks noGrp="1"/>
-          </p:cNvSpPr>
-          <p:nvPr>
-            <p:ph type="body" sz="half" idx="2"/>
-          </p:nvPr>
-        </p:nvSpPr>
-        <p:spPr>
-          <a:xfrm>
-            <a:off x="1792288" y="5367338"/>
-            <a:ext cx="5486400" cy="804862"/>
-          </a:xfrm>
-        </p:spPr>
-        <p:txBody>
-          <a:bodyPr/>
-          <a:lstStyle>
-            <a:lvl1pPr marL="0" indent="0">
-              <a:buNone/>
-              <a:defRPr sz="1400"/>
-            </a:lvl1pPr>
-            <a:lvl2pPr marL="457200" indent="0">
-              <a:buNone/>
-              <a:defRPr sz="1200"/>
-            </a:lvl2pPr>
-            <a:lvl3pPr marL="914400" indent="0">
-              <a:buNone/>
-              <a:defRPr sz="1000"/>
-            </a:lvl3pPr>
-            <a:lvl4pPr marL="1371600" indent="0">
-              <a:buNone/>
-              <a:defRPr sz="900"/>
-            </a:lvl4pPr>
-            <a:lvl5pPr marL="1828800" indent="0">
-              <a:buNone/>
-              <a:defRPr sz="900"/>
-            </a:lvl5pPr>
-            <a:lvl6pPr marL="2286000" indent="0">
-              <a:buNone/>
-              <a:defRPr sz="900"/>
-            </a:lvl6pPr>
-            <a:lvl7pPr marL="2743200" indent="0">
-              <a:buNone/>
-              <a:defRPr sz="900"/>
-            </a:lvl7pPr>
-            <a:lvl8pPr marL="3200400" indent="0">
-              <a:buNone/>
-              <a:defRPr sz="900"/>
-            </a:lvl8pPr>
-            <a:lvl9pPr marL="3657600" indent="0">
-              <a:buNone/>
-              <a:defRPr sz="900"/>
-            </a:lvl9pPr>
-          </a:lstStyle>
-          <a:p>
-            <a:pPr lvl="0"/>
-            <a:r>
-              <a:rPr lang="en-US" smtClean="0"/>
-              <a:t>Click to edit Master text styles</a:t>
-            </a:r>
-          </a:p>
-        </p:txBody>
-      </p:sp>
-      <p:sp>
-        <p:nvSpPr>
-          <p:cNvPr id="5" name="Date Placeholder 4"/>
-          <p:cNvSpPr>
-            <a:spLocks noGrp="1"/>
-          </p:cNvSpPr>
-          <p:nvPr>
-            <p:ph type="dt" sz="half" idx="10"/>
-          </p:nvPr>
-        </p:nvSpPr>
-        <p:spPr/>
-        <p:txBody>
-          <a:bodyPr/>
-          <a:lstStyle/>
-          <a:p>
-            <a:fld id="{5BCAD085-E8A6-8845-BD4E-CB4CCA059FC4}" type="datetimeFigureOut">
-              <a:rPr lang="en-US" smtClean="0"/>
-              <a:t>1/27/13</a:t>
-            </a:fld>
-            <a:endParaRPr lang="en-US"/>
-          </a:p>
-        </p:txBody>
-      </p:sp>
-      <p:sp>
-        <p:nvSpPr>
-          <p:cNvPr id="6" name="Footer Placeholder 5"/>
-          <p:cNvSpPr>
-            <a:spLocks noGrp="1"/>
-          </p:cNvSpPr>
-          <p:nvPr>
-            <p:ph type="ftr" sz="quarter" idx="11"/>
-          </p:nvPr>
-        </p:nvSpPr>
-        <p:spPr/>
-        <p:txBody>
-          <a:bodyPr/>
-          <a:lstStyle/>
-          <a:p>
-            <a:endParaRPr lang="en-US"/>
-          </a:p>
-        </p:txBody>
-      </p:sp>
-      <p:sp>
-        <p:nvSpPr>
-          <p:cNvPr id="7" name="Slide Number Placeholder 6"/>
-          <p:cNvSpPr>
-            <a:spLocks noGrp="1"/>
-          </p:cNvSpPr>
-          <p:nvPr>
-            <p:ph type="sldNum" sz="quarter" idx="12"/>
-          </p:nvPr>
-        </p:nvSpPr>
-        <p:spPr/>
-        <p:txBody>
-          <a:bodyPr/>
-          <a:lstStyle/>
-          <a:p>
-            <a:fld id="{C1FF6DA9-008F-8B48-92A6-B652298478BF}" type="slidenum">
-              <a:rPr lang="en-US" smtClean="0"/>
-              <a:t>‹#›</a:t>
-            </a:fld>
-            <a:endParaRPr lang="en-US"/>
-          </a:p>
-        </p:txBody>
-      </p:sp>
-    </p:spTree>
-    <p:extLst>
-      <p:ext uri="{BB962C8B-B14F-4D97-AF65-F5344CB8AC3E}">
-        <p14:creationId xmlns:p14="http://schemas.microsoft.com/office/powerpoint/2010/main" val="3889236939"/>
-      </p:ext>
-    </p:extLst>
   </p:cSld>
   <p:clrMapOvr>
     <a:masterClrMapping/>
@@ -2608,224 +1716,50 @@
       </p:grpSpPr>
       <p:sp>
         <p:nvSpPr>
-          <p:cNvPr id="2" name="Title Placeholder 1"/>
+          <p:cNvPr id="25" name="Slide Number Placeholder 0"/>
           <p:cNvSpPr>
             <a:spLocks noGrp="1"/>
           </p:cNvSpPr>
           <p:nvPr>
-            <p:ph type="title"/>
+            <p:ph type="sldNum" sz="quarter" idx="4294967295"/>
           </p:nvPr>
         </p:nvSpPr>
         <p:spPr>
           <a:xfrm>
-            <a:off x="457200" y="274638"/>
-            <a:ext cx="8229600" cy="1143000"/>
+            <a:off x="10652760" y="7269480"/>
+            <a:ext cx="941832" cy="201168"/>
           </a:xfrm>
           <a:prstGeom prst="rect">
             <a:avLst/>
           </a:prstGeom>
-        </p:spPr>
-        <p:txBody>
-          <a:bodyPr vert="horz" lIns="91440" tIns="45720" rIns="91440" bIns="45720" rtlCol="0" anchor="ctr">
-            <a:normAutofit/>
-          </a:bodyPr>
-          <a:lstStyle/>
-          <a:p>
-            <a:r>
-              <a:rPr lang="en-US" smtClean="0"/>
-              <a:t>Click to edit Master title style</a:t>
-            </a:r>
-            <a:endParaRPr lang="en-US"/>
-          </a:p>
-        </p:txBody>
-      </p:sp>
-      <p:sp>
-        <p:nvSpPr>
-          <p:cNvPr id="3" name="Text Placeholder 2"/>
-          <p:cNvSpPr>
-            <a:spLocks noGrp="1"/>
-          </p:cNvSpPr>
-          <p:nvPr>
-            <p:ph type="body" idx="1"/>
-          </p:nvPr>
-        </p:nvSpPr>
-        <p:spPr>
-          <a:xfrm>
-            <a:off x="457200" y="1600200"/>
-            <a:ext cx="8229600" cy="4525963"/>
-          </a:xfrm>
-          <a:prstGeom prst="rect">
-            <a:avLst/>
-          </a:prstGeom>
-        </p:spPr>
-        <p:txBody>
-          <a:bodyPr vert="horz" lIns="91440" tIns="45720" rIns="91440" bIns="45720" rtlCol="0">
-            <a:normAutofit/>
-          </a:bodyPr>
-          <a:lstStyle/>
-          <a:p>
-            <a:pPr lvl="0"/>
-            <a:r>
-              <a:rPr lang="en-US" smtClean="0"/>
-              <a:t>Click to edit Master text styles</a:t>
-            </a:r>
-          </a:p>
-          <a:p>
-            <a:pPr lvl="1"/>
-            <a:r>
-              <a:rPr lang="en-US" smtClean="0"/>
-              <a:t>Second level</a:t>
-            </a:r>
-          </a:p>
-          <a:p>
-            <a:pPr lvl="2"/>
-            <a:r>
-              <a:rPr lang="en-US" smtClean="0"/>
-              <a:t>Third level</a:t>
-            </a:r>
-          </a:p>
-          <a:p>
-            <a:pPr lvl="3"/>
-            <a:r>
-              <a:rPr lang="en-US" smtClean="0"/>
-              <a:t>Fourth level</a:t>
-            </a:r>
-          </a:p>
-          <a:p>
-            <a:pPr lvl="4"/>
-            <a:r>
-              <a:rPr lang="en-US" smtClean="0"/>
-              <a:t>Fifth level</a:t>
-            </a:r>
-            <a:endParaRPr lang="en-US"/>
-          </a:p>
-        </p:txBody>
-      </p:sp>
-      <p:sp>
-        <p:nvSpPr>
-          <p:cNvPr id="4" name="Date Placeholder 3"/>
-          <p:cNvSpPr>
-            <a:spLocks noGrp="1"/>
-          </p:cNvSpPr>
-          <p:nvPr>
-            <p:ph type="dt" sz="half" idx="2"/>
-          </p:nvPr>
-        </p:nvSpPr>
-        <p:spPr>
-          <a:xfrm>
-            <a:off x="457200" y="6356350"/>
-            <a:ext cx="2133600" cy="365125"/>
-          </a:xfrm>
-          <a:prstGeom prst="rect">
-            <a:avLst/>
-          </a:prstGeom>
-        </p:spPr>
-        <p:txBody>
-          <a:bodyPr vert="horz" lIns="91440" tIns="45720" rIns="91440" bIns="45720" rtlCol="0" anchor="ctr"/>
+          <a:extLst>
+            <a:ext uri="{C572A759-6A51-4108-AA02-DFA0A04FC94B}">
+              <ma14:wrappingTextBoxFlag xmlns:ma14="http://schemas.microsoft.com/office/mac/drawingml/2011/main" xmlns="" val="0"/>
+            </a:ext>
+          </a:extLst>
+        </p:spPr>
+        <p:txBody>
+          <a:bodyPr lIns="0" tIns="0" rIns="0" bIns="0"/>
           <a:lstStyle>
-            <a:lvl1pPr algn="l">
-              <a:defRPr sz="1200">
-                <a:solidFill>
-                  <a:schemeClr val="tx1">
-                    <a:tint val="75000"/>
-                  </a:schemeClr>
+            <a:lvl1pPr>
+              <a:defRPr sz="900">
+                <a:solidFill>
+                  <a:schemeClr val="accent1"/>
                 </a:solidFill>
               </a:defRPr>
             </a:lvl1pPr>
           </a:lstStyle>
           <a:p>
-            <a:fld id="{5BCAD085-E8A6-8845-BD4E-CB4CCA059FC4}" type="datetimeFigureOut">
-              <a:rPr lang="en-US" smtClean="0"/>
-              <a:t>1/27/13</a:t>
+            <a:pPr algn="r"/>
+            <a:fld id="{F7021451-1387-4CA6-816F-3879F97B5CBC}" type="slidenum">
+              <a:rPr lang="en-US" b="0"/>
+              <a:t>‹N›</a:t>
             </a:fld>
             <a:endParaRPr lang="en-US"/>
           </a:p>
         </p:txBody>
       </p:sp>
-      <p:sp>
-        <p:nvSpPr>
-          <p:cNvPr id="5" name="Footer Placeholder 4"/>
-          <p:cNvSpPr>
-            <a:spLocks noGrp="1"/>
-          </p:cNvSpPr>
-          <p:nvPr>
-            <p:ph type="ftr" sz="quarter" idx="3"/>
-          </p:nvPr>
-        </p:nvSpPr>
-        <p:spPr>
-          <a:xfrm>
-            <a:off x="3124200" y="6356350"/>
-            <a:ext cx="2895600" cy="365125"/>
-          </a:xfrm>
-          <a:prstGeom prst="rect">
-            <a:avLst/>
-          </a:prstGeom>
-        </p:spPr>
-        <p:txBody>
-          <a:bodyPr vert="horz" lIns="91440" tIns="45720" rIns="91440" bIns="45720" rtlCol="0" anchor="ctr"/>
-          <a:lstStyle>
-            <a:lvl1pPr algn="ctr">
-              <a:defRPr sz="1200">
-                <a:solidFill>
-                  <a:schemeClr val="tx1">
-                    <a:tint val="75000"/>
-                  </a:schemeClr>
-                </a:solidFill>
-              </a:defRPr>
-            </a:lvl1pPr>
-          </a:lstStyle>
-          <a:p>
-            <a:endParaRPr lang="en-US"/>
-          </a:p>
-        </p:txBody>
-      </p:sp>
-      <p:sp>
-        <p:nvSpPr>
-          <p:cNvPr id="6" name="Slide Number Placeholder 5"/>
-          <p:cNvSpPr>
-            <a:spLocks noGrp="1"/>
-          </p:cNvSpPr>
-          <p:nvPr>
-            <p:ph type="sldNum" sz="quarter" idx="4"/>
-          </p:nvPr>
-        </p:nvSpPr>
-        <p:spPr>
-          <a:xfrm>
-            <a:off x="6553200" y="6356350"/>
-            <a:ext cx="2133600" cy="365125"/>
-          </a:xfrm>
-          <a:prstGeom prst="rect">
-            <a:avLst/>
-          </a:prstGeom>
-        </p:spPr>
-        <p:txBody>
-          <a:bodyPr vert="horz" lIns="91440" tIns="45720" rIns="91440" bIns="45720" rtlCol="0" anchor="ctr"/>
-          <a:lstStyle>
-            <a:lvl1pPr algn="r">
-              <a:defRPr sz="1200">
-                <a:solidFill>
-                  <a:schemeClr val="tx1">
-                    <a:tint val="75000"/>
-                  </a:schemeClr>
-                </a:solidFill>
-              </a:defRPr>
-            </a:lvl1pPr>
-          </a:lstStyle>
-          <a:p>
-            <a:fld id="{C1FF6DA9-008F-8B48-92A6-B652298478BF}" type="slidenum">
-              <a:rPr lang="en-US" smtClean="0"/>
-              <a:t>‹#›</a:t>
-            </a:fld>
-            <a:endParaRPr lang="en-US"/>
-          </a:p>
-        </p:txBody>
-      </p:sp>
     </p:spTree>
-    <p:extLst>
-      <p:ext uri="{BB962C8B-B14F-4D97-AF65-F5344CB8AC3E}">
-        <p14:creationId xmlns:p14="http://schemas.microsoft.com/office/powerpoint/2010/main" val="2209977519"/>
-      </p:ext>
-    </p:extLst>
   </p:cSld>
   <p:clrMap bg1="lt1" tx1="dk1" bg2="lt2" tx2="dk2" accent1="accent1" accent2="accent2" accent3="accent3" accent4="accent4" accent5="accent5" accent6="accent6" hlink="hlink" folHlink="folHlink"/>
   <p:sldLayoutIdLst>
@@ -2834,16 +1768,11 @@
     <p:sldLayoutId id="2147483651" r:id="rId3"/>
     <p:sldLayoutId id="2147483652" r:id="rId4"/>
     <p:sldLayoutId id="2147483653" r:id="rId5"/>
-    <p:sldLayoutId id="2147483654" r:id="rId6"/>
-    <p:sldLayoutId id="2147483655" r:id="rId7"/>
-    <p:sldLayoutId id="2147483656" r:id="rId8"/>
-    <p:sldLayoutId id="2147483657" r:id="rId9"/>
-    <p:sldLayoutId id="2147483658" r:id="rId10"/>
-    <p:sldLayoutId id="2147483659" r:id="rId11"/>
   </p:sldLayoutIdLst>
+  <p:hf sldNum="0" hdr="0" ftr="0" dt="0"/>
   <p:txStyles>
     <p:titleStyle>
-      <a:lvl1pPr algn="ctr" defTabSz="457200" rtl="0" eaLnBrk="1" latinLnBrk="0" hangingPunct="1">
+      <a:lvl1pPr algn="ctr" defTabSz="914400" rtl="0" eaLnBrk="1" latinLnBrk="0" hangingPunct="1">
         <a:spcBef>
           <a:spcPct val="0"/>
         </a:spcBef>
@@ -2859,11 +1788,11 @@
       </a:lvl1pPr>
     </p:titleStyle>
     <p:bodyStyle>
-      <a:lvl1pPr marL="342900" indent="-342900" algn="l" defTabSz="457200" rtl="0" eaLnBrk="1" latinLnBrk="0" hangingPunct="1">
+      <a:lvl1pPr marL="342900" indent="-342900" algn="l" defTabSz="914400" rtl="0" eaLnBrk="1" latinLnBrk="0" hangingPunct="1">
         <a:spcBef>
           <a:spcPct val="20000"/>
         </a:spcBef>
-        <a:buFont typeface="Arial"/>
+        <a:buFont typeface="Arial" pitchFamily="34" charset="0"/>
         <a:buChar char="•"/>
         <a:defRPr sz="3200" kern="1200">
           <a:solidFill>
@@ -2874,11 +1803,11 @@
           <a:cs typeface="+mn-cs"/>
         </a:defRPr>
       </a:lvl1pPr>
-      <a:lvl2pPr marL="742950" indent="-285750" algn="l" defTabSz="457200" rtl="0" eaLnBrk="1" latinLnBrk="0" hangingPunct="1">
+      <a:lvl2pPr marL="742950" indent="-285750" algn="l" defTabSz="914400" rtl="0" eaLnBrk="1" latinLnBrk="0" hangingPunct="1">
         <a:spcBef>
           <a:spcPct val="20000"/>
         </a:spcBef>
-        <a:buFont typeface="Arial"/>
+        <a:buFont typeface="Arial" pitchFamily="34" charset="0"/>
         <a:buChar char="–"/>
         <a:defRPr sz="2800" kern="1200">
           <a:solidFill>
@@ -2889,11 +1818,11 @@
           <a:cs typeface="+mn-cs"/>
         </a:defRPr>
       </a:lvl2pPr>
-      <a:lvl3pPr marL="1143000" indent="-228600" algn="l" defTabSz="457200" rtl="0" eaLnBrk="1" latinLnBrk="0" hangingPunct="1">
+      <a:lvl3pPr marL="1143000" indent="-228600" algn="l" defTabSz="914400" rtl="0" eaLnBrk="1" latinLnBrk="0" hangingPunct="1">
         <a:spcBef>
           <a:spcPct val="20000"/>
         </a:spcBef>
-        <a:buFont typeface="Arial"/>
+        <a:buFont typeface="Arial" pitchFamily="34" charset="0"/>
         <a:buChar char="•"/>
         <a:defRPr sz="2400" kern="1200">
           <a:solidFill>
@@ -2904,11 +1833,11 @@
           <a:cs typeface="+mn-cs"/>
         </a:defRPr>
       </a:lvl3pPr>
-      <a:lvl4pPr marL="1600200" indent="-228600" algn="l" defTabSz="457200" rtl="0" eaLnBrk="1" latinLnBrk="0" hangingPunct="1">
+      <a:lvl4pPr marL="1600200" indent="-228600" algn="l" defTabSz="914400" rtl="0" eaLnBrk="1" latinLnBrk="0" hangingPunct="1">
         <a:spcBef>
           <a:spcPct val="20000"/>
         </a:spcBef>
-        <a:buFont typeface="Arial"/>
+        <a:buFont typeface="Arial" pitchFamily="34" charset="0"/>
         <a:buChar char="–"/>
         <a:defRPr sz="2000" kern="1200">
           <a:solidFill>
@@ -2919,11 +1848,11 @@
           <a:cs typeface="+mn-cs"/>
         </a:defRPr>
       </a:lvl4pPr>
-      <a:lvl5pPr marL="2057400" indent="-228600" algn="l" defTabSz="457200" rtl="0" eaLnBrk="1" latinLnBrk="0" hangingPunct="1">
+      <a:lvl5pPr marL="2057400" indent="-228600" algn="l" defTabSz="914400" rtl="0" eaLnBrk="1" latinLnBrk="0" hangingPunct="1">
         <a:spcBef>
           <a:spcPct val="20000"/>
         </a:spcBef>
-        <a:buFont typeface="Arial"/>
+        <a:buFont typeface="Arial" pitchFamily="34" charset="0"/>
         <a:buChar char="»"/>
         <a:defRPr sz="2000" kern="1200">
           <a:solidFill>
@@ -2934,11 +1863,11 @@
           <a:cs typeface="+mn-cs"/>
         </a:defRPr>
       </a:lvl5pPr>
-      <a:lvl6pPr marL="2514600" indent="-228600" algn="l" defTabSz="457200" rtl="0" eaLnBrk="1" latinLnBrk="0" hangingPunct="1">
+      <a:lvl6pPr marL="2514600" indent="-228600" algn="l" defTabSz="914400" rtl="0" eaLnBrk="1" latinLnBrk="0" hangingPunct="1">
         <a:spcBef>
           <a:spcPct val="20000"/>
         </a:spcBef>
-        <a:buFont typeface="Arial"/>
+        <a:buFont typeface="Arial" pitchFamily="34" charset="0"/>
         <a:buChar char="•"/>
         <a:defRPr sz="2000" kern="1200">
           <a:solidFill>
@@ -2949,11 +1878,11 @@
           <a:cs typeface="+mn-cs"/>
         </a:defRPr>
       </a:lvl6pPr>
-      <a:lvl7pPr marL="2971800" indent="-228600" algn="l" defTabSz="457200" rtl="0" eaLnBrk="1" latinLnBrk="0" hangingPunct="1">
+      <a:lvl7pPr marL="2971800" indent="-228600" algn="l" defTabSz="914400" rtl="0" eaLnBrk="1" latinLnBrk="0" hangingPunct="1">
         <a:spcBef>
           <a:spcPct val="20000"/>
         </a:spcBef>
-        <a:buFont typeface="Arial"/>
+        <a:buFont typeface="Arial" pitchFamily="34" charset="0"/>
         <a:buChar char="•"/>
         <a:defRPr sz="2000" kern="1200">
           <a:solidFill>
@@ -2964,11 +1893,11 @@
           <a:cs typeface="+mn-cs"/>
         </a:defRPr>
       </a:lvl7pPr>
-      <a:lvl8pPr marL="3429000" indent="-228600" algn="l" defTabSz="457200" rtl="0" eaLnBrk="1" latinLnBrk="0" hangingPunct="1">
+      <a:lvl8pPr marL="3429000" indent="-228600" algn="l" defTabSz="914400" rtl="0" eaLnBrk="1" latinLnBrk="0" hangingPunct="1">
         <a:spcBef>
           <a:spcPct val="20000"/>
         </a:spcBef>
-        <a:buFont typeface="Arial"/>
+        <a:buFont typeface="Arial" pitchFamily="34" charset="0"/>
         <a:buChar char="•"/>
         <a:defRPr sz="2000" kern="1200">
           <a:solidFill>
@@ -2979,11 +1908,11 @@
           <a:cs typeface="+mn-cs"/>
         </a:defRPr>
       </a:lvl8pPr>
-      <a:lvl9pPr marL="3886200" indent="-228600" algn="l" defTabSz="457200" rtl="0" eaLnBrk="1" latinLnBrk="0" hangingPunct="1">
+      <a:lvl9pPr marL="3886200" indent="-228600" algn="l" defTabSz="914400" rtl="0" eaLnBrk="1" latinLnBrk="0" hangingPunct="1">
         <a:spcBef>
           <a:spcPct val="20000"/>
         </a:spcBef>
-        <a:buFont typeface="Arial"/>
+        <a:buFont typeface="Arial" pitchFamily="34" charset="0"/>
         <a:buChar char="•"/>
         <a:defRPr sz="2000" kern="1200">
           <a:solidFill>
@@ -2999,7 +1928,7 @@
       <a:defPPr>
         <a:defRPr lang="en-US"/>
       </a:defPPr>
-      <a:lvl1pPr marL="0" algn="l" defTabSz="457200" rtl="0" eaLnBrk="1" latinLnBrk="0" hangingPunct="1">
+      <a:lvl1pPr marL="0" algn="l" defTabSz="914400" rtl="0" eaLnBrk="1" latinLnBrk="0" hangingPunct="1">
         <a:defRPr sz="1800" kern="1200">
           <a:solidFill>
             <a:schemeClr val="tx1"/>
@@ -3009,7 +1938,7 @@
           <a:cs typeface="+mn-cs"/>
         </a:defRPr>
       </a:lvl1pPr>
-      <a:lvl2pPr marL="457200" algn="l" defTabSz="457200" rtl="0" eaLnBrk="1" latinLnBrk="0" hangingPunct="1">
+      <a:lvl2pPr marL="457200" algn="l" defTabSz="914400" rtl="0" eaLnBrk="1" latinLnBrk="0" hangingPunct="1">
         <a:defRPr sz="1800" kern="1200">
           <a:solidFill>
             <a:schemeClr val="tx1"/>
@@ -3019,7 +1948,7 @@
           <a:cs typeface="+mn-cs"/>
         </a:defRPr>
       </a:lvl2pPr>
-      <a:lvl3pPr marL="914400" algn="l" defTabSz="457200" rtl="0" eaLnBrk="1" latinLnBrk="0" hangingPunct="1">
+      <a:lvl3pPr marL="914400" algn="l" defTabSz="914400" rtl="0" eaLnBrk="1" latinLnBrk="0" hangingPunct="1">
         <a:defRPr sz="1800" kern="1200">
           <a:solidFill>
             <a:schemeClr val="tx1"/>
@@ -3029,7 +1958,7 @@
           <a:cs typeface="+mn-cs"/>
         </a:defRPr>
       </a:lvl3pPr>
-      <a:lvl4pPr marL="1371600" algn="l" defTabSz="457200" rtl="0" eaLnBrk="1" latinLnBrk="0" hangingPunct="1">
+      <a:lvl4pPr marL="1371600" algn="l" defTabSz="914400" rtl="0" eaLnBrk="1" latinLnBrk="0" hangingPunct="1">
         <a:defRPr sz="1800" kern="1200">
           <a:solidFill>
             <a:schemeClr val="tx1"/>
@@ -3039,7 +1968,7 @@
           <a:cs typeface="+mn-cs"/>
         </a:defRPr>
       </a:lvl4pPr>
-      <a:lvl5pPr marL="1828800" algn="l" defTabSz="457200" rtl="0" eaLnBrk="1" latinLnBrk="0" hangingPunct="1">
+      <a:lvl5pPr marL="1828800" algn="l" defTabSz="914400" rtl="0" eaLnBrk="1" latinLnBrk="0" hangingPunct="1">
         <a:defRPr sz="1800" kern="1200">
           <a:solidFill>
             <a:schemeClr val="tx1"/>
@@ -3049,7 +1978,7 @@
           <a:cs typeface="+mn-cs"/>
         </a:defRPr>
       </a:lvl5pPr>
-      <a:lvl6pPr marL="2286000" algn="l" defTabSz="457200" rtl="0" eaLnBrk="1" latinLnBrk="0" hangingPunct="1">
+      <a:lvl6pPr marL="2286000" algn="l" defTabSz="914400" rtl="0" eaLnBrk="1" latinLnBrk="0" hangingPunct="1">
         <a:defRPr sz="1800" kern="1200">
           <a:solidFill>
             <a:schemeClr val="tx1"/>
@@ -3059,7 +1988,7 @@
           <a:cs typeface="+mn-cs"/>
         </a:defRPr>
       </a:lvl6pPr>
-      <a:lvl7pPr marL="2743200" algn="l" defTabSz="457200" rtl="0" eaLnBrk="1" latinLnBrk="0" hangingPunct="1">
+      <a:lvl7pPr marL="2743200" algn="l" defTabSz="914400" rtl="0" eaLnBrk="1" latinLnBrk="0" hangingPunct="1">
         <a:defRPr sz="1800" kern="1200">
           <a:solidFill>
             <a:schemeClr val="tx1"/>
@@ -3069,7 +1998,7 @@
           <a:cs typeface="+mn-cs"/>
         </a:defRPr>
       </a:lvl7pPr>
-      <a:lvl8pPr marL="3200400" algn="l" defTabSz="457200" rtl="0" eaLnBrk="1" latinLnBrk="0" hangingPunct="1">
+      <a:lvl8pPr marL="3200400" algn="l" defTabSz="914400" rtl="0" eaLnBrk="1" latinLnBrk="0" hangingPunct="1">
         <a:defRPr sz="1800" kern="1200">
           <a:solidFill>
             <a:schemeClr val="tx1"/>
@@ -3079,7 +2008,7 @@
           <a:cs typeface="+mn-cs"/>
         </a:defRPr>
       </a:lvl8pPr>
-      <a:lvl9pPr marL="3657600" algn="l" defTabSz="457200" rtl="0" eaLnBrk="1" latinLnBrk="0" hangingPunct="1">
+      <a:lvl9pPr marL="3657600" algn="l" defTabSz="914400" rtl="0" eaLnBrk="1" latinLnBrk="0" hangingPunct="1">
         <a:defRPr sz="1800" kern="1200">
           <a:solidFill>
             <a:schemeClr val="tx1"/>
@@ -3106,119 +2035,63 @@
       <p:grpSpPr/>
       <p:sp>
         <p:nvSpPr>
-          <p:cNvPr id="2" name="Rectangle 1"/>
-          <p:cNvSpPr/>
-          <p:nvPr/>
-        </p:nvSpPr>
-        <p:spPr>
-          <a:xfrm>
-            <a:off x="0" y="0"/>
-            <a:ext cx="12191695" cy="6858000"/>
-          </a:xfrm>
-          <a:prstGeom prst="rect">
-            <a:avLst/>
-          </a:prstGeom>
-          <a:solidFill>
-            <a:srgbClr val="17344D"/>
-          </a:solidFill>
-          <a:ln>
-            <a:noFill/>
-          </a:ln>
-        </p:spPr>
-        <p:style>
-          <a:lnRef idx="1">
-            <a:schemeClr val="accent1"/>
-          </a:lnRef>
-          <a:fillRef idx="3">
-            <a:schemeClr val="accent1"/>
-          </a:fillRef>
-          <a:effectRef idx="2">
-            <a:schemeClr val="accent1"/>
-          </a:effectRef>
-          <a:fontRef idx="minor">
-            <a:schemeClr val="lt1"/>
-          </a:fontRef>
-        </p:style>
-        <p:txBody>
-          <a:bodyPr rtlCol="0" anchor="ctr"/>
-          <a:lstStyle/>
-          <a:p>
-            <a:pPr algn="ctr"/>
-          </a:p>
-        </p:txBody>
-      </p:sp>
-      <p:sp>
-        <p:nvSpPr>
-          <p:cNvPr id="3" name="TextBox 2"/>
-          <p:cNvSpPr txBox="1"/>
-          <p:nvPr/>
-        </p:nvSpPr>
-        <p:spPr>
-          <a:xfrm>
-            <a:off x="1097280" y="1645920"/>
-            <a:ext cx="10058400" cy="4114800"/>
-          </a:xfrm>
-          <a:prstGeom prst="rect">
-            <a:avLst/>
-          </a:prstGeom>
-          <a:noFill/>
-        </p:spPr>
-        <p:txBody>
-          <a:bodyPr wrap="square">
-            <a:spAutoFit/>
-          </a:bodyPr>
-          <a:lstStyle/>
-          <a:p>
-            <a:pPr>
-              <a:spcAft>
-                <a:spcPts val="1400"/>
-              </a:spcAft>
-              <a:defRPr sz="1500" b="1">
-                <a:solidFill>
-                  <a:srgbClr val="7DD3FC"/>
-                </a:solidFill>
-                <a:latin typeface="Arial"/>
-              </a:defRPr>
-            </a:pPr>
-            <a:r>
-              <a:t>DIGITALIZZARE I PROCESSI CON L'AI</a:t>
-            </a:r>
-          </a:p>
-          <a:p>
-            <a:pPr>
-              <a:spcAft>
-                <a:spcPts val="2200"/>
-              </a:spcAft>
-              <a:defRPr sz="3200" b="1">
-                <a:solidFill>
-                  <a:srgbClr val="FFFFFF"/>
-                </a:solidFill>
-                <a:latin typeface="Arial"/>
-              </a:defRPr>
-            </a:pPr>
-            <a:r>
-              <a:t>Lezione 2 · Tecniche di Prompting d'Officina</a:t>
-            </a:r>
-            <a:br/>
-            <a:r>
-              <a:t>e Guida Operativa degli LLM</a:t>
-            </a:r>
-          </a:p>
-          <a:p>
-            <a:pPr>
-              <a:defRPr sz="1600">
-                <a:solidFill>
-                  <a:srgbClr val="CBD5E1"/>
-                </a:solidFill>
-                <a:latin typeface="Arial"/>
-              </a:defRPr>
-            </a:pPr>
-            <a:r>
-              <a:t>ITS MAKER Bologna · Corso Tecnico Superiore Digitalizzazione Processi Industriali</a:t>
-            </a:r>
-            <a:br/>
-            <a:r>
-              <a:t>4 micro-attività pratiche a coppie: formato, few-shot, calcoli e allucinazioni</a:t>
+          <p:cNvPr id="2" name="Title 1"/>
+          <p:cNvSpPr>
+            <a:spLocks noGrp="1"/>
+          </p:cNvSpPr>
+          <p:nvPr>
+            <p:ph type="title" idx="104"/>
+          </p:nvPr>
+        </p:nvSpPr>
+        <p:spPr/>
+        <p:txBody>
+          <a:bodyPr/>
+          <a:lstStyle/>
+          <a:p>
+            <a:r>
+              <a:t>Digitalizzare i processi con l'Intelligenza Artificiale</a:t>
+            </a:r>
+          </a:p>
+        </p:txBody>
+      </p:sp>
+      <p:sp>
+        <p:nvSpPr>
+          <p:cNvPr id="3" name="Text Placeholder 2"/>
+          <p:cNvSpPr>
+            <a:spLocks noGrp="1"/>
+          </p:cNvSpPr>
+          <p:nvPr>
+            <p:ph type="body" idx="105"/>
+          </p:nvPr>
+        </p:nvSpPr>
+        <p:spPr/>
+        <p:txBody>
+          <a:bodyPr/>
+          <a:lstStyle/>
+          <a:p>
+            <a:r>
+              <a:t>Lezione 2 · Tecniche di Prompting d'Officina e Guida Operativa degli LLM</a:t>
+            </a:r>
+          </a:p>
+        </p:txBody>
+      </p:sp>
+      <p:sp>
+        <p:nvSpPr>
+          <p:cNvPr id="4" name="Text Placeholder 3"/>
+          <p:cNvSpPr>
+            <a:spLocks noGrp="1"/>
+          </p:cNvSpPr>
+          <p:nvPr>
+            <p:ph type="body" idx="106"/>
+          </p:nvPr>
+        </p:nvSpPr>
+        <p:spPr/>
+        <p:txBody>
+          <a:bodyPr/>
+          <a:lstStyle/>
+          <a:p>
+            <a:r>
+              <a:t>Corso di Intelligenza Artificiale · Anno formativo 2026/27 · ITS MAKER Bologna</a:t>
             </a:r>
           </a:p>
         </p:txBody>
@@ -3243,70 +2116,19 @@
       <p:grpSpPr/>
       <p:sp>
         <p:nvSpPr>
-          <p:cNvPr id="2" name="TextBox 1"/>
-          <p:cNvSpPr txBox="1"/>
-          <p:nvPr/>
-        </p:nvSpPr>
-        <p:spPr>
-          <a:xfrm>
-            <a:off x="731520" y="365760"/>
-            <a:ext cx="10698480" cy="320040"/>
-          </a:xfrm>
-          <a:prstGeom prst="rect">
-            <a:avLst/>
-          </a:prstGeom>
-          <a:noFill/>
-        </p:spPr>
-        <p:txBody>
-          <a:bodyPr wrap="square">
-            <a:spAutoFit/>
-          </a:bodyPr>
-          <a:lstStyle/>
-          <a:p>
-            <a:pPr>
-              <a:defRPr sz="1100" b="1">
-                <a:solidFill>
-                  <a:srgbClr val="1064A0"/>
-                </a:solidFill>
-                <a:latin typeface="Arial"/>
-              </a:defRPr>
-            </a:pPr>
-            <a:r>
-              <a:t>ITS MAKER · DIGITALIZZAZIONE PROCESSI</a:t>
-            </a:r>
-          </a:p>
-        </p:txBody>
-      </p:sp>
-      <p:sp>
-        <p:nvSpPr>
-          <p:cNvPr id="3" name="TextBox 2"/>
-          <p:cNvSpPr txBox="1"/>
-          <p:nvPr/>
-        </p:nvSpPr>
-        <p:spPr>
-          <a:xfrm>
-            <a:off x="731520" y="658368"/>
-            <a:ext cx="10698480" cy="685800"/>
-          </a:xfrm>
-          <a:prstGeom prst="rect">
-            <a:avLst/>
-          </a:prstGeom>
-          <a:noFill/>
-        </p:spPr>
-        <p:txBody>
-          <a:bodyPr wrap="square">
-            <a:spAutoFit/>
-          </a:bodyPr>
-          <a:lstStyle/>
-          <a:p>
-            <a:pPr>
-              <a:defRPr sz="2200" b="1">
-                <a:solidFill>
-                  <a:srgbClr val="17344D"/>
-                </a:solidFill>
-                <a:latin typeface="Arial"/>
-              </a:defRPr>
-            </a:pPr>
+          <p:cNvPr id="2" name="Title 1"/>
+          <p:cNvSpPr>
+            <a:spLocks noGrp="1"/>
+          </p:cNvSpPr>
+          <p:nvPr>
+            <p:ph type="title" idx="102"/>
+          </p:nvPr>
+        </p:nvSpPr>
+        <p:spPr/>
+        <p:txBody>
+          <a:bodyPr/>
+          <a:lstStyle/>
+          <a:p>
             <a:r>
               <a:t>Sfida 3 · «La calcolatrice che sbaglia» (Il problema)</a:t>
             </a:r>
@@ -3315,14 +2137,14 @@
       </p:sp>
       <p:sp>
         <p:nvSpPr>
-          <p:cNvPr id="4" name="Rounded Rectangle 3"/>
+          <p:cNvPr id="3" name="Rounded Rectangle 2"/>
           <p:cNvSpPr/>
           <p:nvPr/>
         </p:nvSpPr>
         <p:spPr>
           <a:xfrm>
-            <a:off x="731520" y="1463040"/>
-            <a:ext cx="5120640" cy="4754880"/>
+            <a:off x="594360" y="1920240"/>
+            <a:ext cx="5303520" cy="4937760"/>
           </a:xfrm>
           <a:prstGeom prst="roundRect">
             <a:avLst/>
@@ -3360,14 +2182,14 @@
       </p:sp>
       <p:sp>
         <p:nvSpPr>
-          <p:cNvPr id="5" name="TextBox 4"/>
+          <p:cNvPr id="4" name="TextBox 3"/>
           <p:cNvSpPr txBox="1"/>
           <p:nvPr/>
         </p:nvSpPr>
         <p:spPr>
           <a:xfrm>
-            <a:off x="1005840" y="1737360"/>
-            <a:ext cx="4572000" cy="4206240"/>
+            <a:off x="822960" y="2103120"/>
+            <a:ext cx="4846320" cy="4480560"/>
           </a:xfrm>
           <a:prstGeom prst="rect">
             <a:avLst/>
@@ -3458,14 +2280,14 @@
       </p:sp>
       <p:sp>
         <p:nvSpPr>
-          <p:cNvPr id="6" name="Rounded Rectangle 5"/>
+          <p:cNvPr id="5" name="Rounded Rectangle 4"/>
           <p:cNvSpPr/>
           <p:nvPr/>
         </p:nvSpPr>
         <p:spPr>
           <a:xfrm>
-            <a:off x="6217920" y="1463040"/>
-            <a:ext cx="5212080" cy="4754880"/>
+            <a:off x="6172200" y="1920240"/>
+            <a:ext cx="5394960" cy="4937760"/>
           </a:xfrm>
           <a:prstGeom prst="roundRect">
             <a:avLst/>
@@ -3503,14 +2325,14 @@
       </p:sp>
       <p:sp>
         <p:nvSpPr>
-          <p:cNvPr id="7" name="TextBox 6"/>
+          <p:cNvPr id="6" name="TextBox 5"/>
           <p:cNvSpPr txBox="1"/>
           <p:nvPr/>
         </p:nvSpPr>
         <p:spPr>
           <a:xfrm>
-            <a:off x="6492240" y="1737360"/>
-            <a:ext cx="4663440" cy="4206240"/>
+            <a:off x="6400800" y="2103120"/>
+            <a:ext cx="4937760" cy="4480560"/>
           </a:xfrm>
           <a:prstGeom prst="rect">
             <a:avLst/>
@@ -3649,70 +2471,19 @@
       <p:grpSpPr/>
       <p:sp>
         <p:nvSpPr>
-          <p:cNvPr id="2" name="TextBox 1"/>
-          <p:cNvSpPr txBox="1"/>
-          <p:nvPr/>
-        </p:nvSpPr>
-        <p:spPr>
-          <a:xfrm>
-            <a:off x="731520" y="365760"/>
-            <a:ext cx="10698480" cy="320040"/>
-          </a:xfrm>
-          <a:prstGeom prst="rect">
-            <a:avLst/>
-          </a:prstGeom>
-          <a:noFill/>
-        </p:spPr>
-        <p:txBody>
-          <a:bodyPr wrap="square">
-            <a:spAutoFit/>
-          </a:bodyPr>
-          <a:lstStyle/>
-          <a:p>
-            <a:pPr>
-              <a:defRPr sz="1100" b="1">
-                <a:solidFill>
-                  <a:srgbClr val="1064A0"/>
-                </a:solidFill>
-                <a:latin typeface="Arial"/>
-              </a:defRPr>
-            </a:pPr>
-            <a:r>
-              <a:t>ATTIVITÀ PRATICA 3</a:t>
-            </a:r>
-          </a:p>
-        </p:txBody>
-      </p:sp>
-      <p:sp>
-        <p:nvSpPr>
-          <p:cNvPr id="3" name="TextBox 2"/>
-          <p:cNvSpPr txBox="1"/>
-          <p:nvPr/>
-        </p:nvSpPr>
-        <p:spPr>
-          <a:xfrm>
-            <a:off x="731520" y="658368"/>
-            <a:ext cx="10698480" cy="685800"/>
-          </a:xfrm>
-          <a:prstGeom prst="rect">
-            <a:avLst/>
-          </a:prstGeom>
-          <a:noFill/>
-        </p:spPr>
-        <p:txBody>
-          <a:bodyPr wrap="square">
-            <a:spAutoFit/>
-          </a:bodyPr>
-          <a:lstStyle/>
-          <a:p>
-            <a:pPr>
-              <a:defRPr sz="2200" b="1">
-                <a:solidFill>
-                  <a:srgbClr val="17344D"/>
-                </a:solidFill>
-                <a:latin typeface="Arial"/>
-              </a:defRPr>
-            </a:pPr>
+          <p:cNvPr id="2" name="Title 1"/>
+          <p:cNvSpPr>
+            <a:spLocks noGrp="1"/>
+          </p:cNvSpPr>
+          <p:nvPr>
+            <p:ph type="title" idx="102"/>
+          </p:nvPr>
+        </p:nvSpPr>
+        <p:spPr/>
+        <p:txBody>
+          <a:bodyPr/>
+          <a:lstStyle/>
+          <a:p>
             <a:r>
               <a:t>Sfida 3 · Al lavoro a coppie (10 minuti)</a:t>
             </a:r>
@@ -3721,14 +2492,14 @@
       </p:sp>
       <p:sp>
         <p:nvSpPr>
-          <p:cNvPr id="4" name="Rounded Rectangle 3"/>
+          <p:cNvPr id="3" name="Rounded Rectangle 2"/>
           <p:cNvSpPr/>
           <p:nvPr/>
         </p:nvSpPr>
         <p:spPr>
           <a:xfrm>
-            <a:off x="731520" y="1463040"/>
-            <a:ext cx="6217920" cy="4754880"/>
+            <a:off x="594360" y="1920240"/>
+            <a:ext cx="6492240" cy="4937760"/>
           </a:xfrm>
           <a:prstGeom prst="roundRect">
             <a:avLst/>
@@ -3766,14 +2537,14 @@
       </p:sp>
       <p:sp>
         <p:nvSpPr>
-          <p:cNvPr id="5" name="TextBox 4"/>
+          <p:cNvPr id="4" name="TextBox 3"/>
           <p:cNvSpPr txBox="1"/>
           <p:nvPr/>
         </p:nvSpPr>
         <p:spPr>
           <a:xfrm>
-            <a:off x="1005840" y="1645920"/>
-            <a:ext cx="5669280" cy="4389120"/>
+            <a:off x="822960" y="2103120"/>
+            <a:ext cx="6035040" cy="4480560"/>
           </a:xfrm>
           <a:prstGeom prst="rect">
             <a:avLst/>
@@ -3873,14 +2644,14 @@
       </p:sp>
       <p:sp>
         <p:nvSpPr>
-          <p:cNvPr id="6" name="Rounded Rectangle 5"/>
+          <p:cNvPr id="5" name="Rounded Rectangle 4"/>
           <p:cNvSpPr/>
           <p:nvPr/>
         </p:nvSpPr>
         <p:spPr>
           <a:xfrm>
-            <a:off x="7315200" y="1463040"/>
-            <a:ext cx="4114800" cy="4754880"/>
+            <a:off x="7360920" y="1920240"/>
+            <a:ext cx="4206240" cy="4937760"/>
           </a:xfrm>
           <a:prstGeom prst="roundRect">
             <a:avLst/>
@@ -3918,14 +2689,14 @@
       </p:sp>
       <p:sp>
         <p:nvSpPr>
-          <p:cNvPr id="7" name="TextBox 6"/>
+          <p:cNvPr id="6" name="TextBox 5"/>
           <p:cNvSpPr txBox="1"/>
           <p:nvPr/>
         </p:nvSpPr>
         <p:spPr>
           <a:xfrm>
-            <a:off x="7589520" y="1645920"/>
-            <a:ext cx="3566160" cy="4389120"/>
+            <a:off x="7589520" y="2103120"/>
+            <a:ext cx="3749039" cy="4480560"/>
           </a:xfrm>
           <a:prstGeom prst="rect">
             <a:avLst/>
@@ -4049,86 +2820,35 @@
       <p:grpSpPr/>
       <p:sp>
         <p:nvSpPr>
-          <p:cNvPr id="2" name="TextBox 1"/>
-          <p:cNvSpPr txBox="1"/>
-          <p:nvPr/>
-        </p:nvSpPr>
-        <p:spPr>
-          <a:xfrm>
-            <a:off x="731520" y="365760"/>
-            <a:ext cx="10698480" cy="320040"/>
-          </a:xfrm>
-          <a:prstGeom prst="rect">
-            <a:avLst/>
-          </a:prstGeom>
-          <a:noFill/>
-        </p:spPr>
-        <p:txBody>
-          <a:bodyPr wrap="square">
-            <a:spAutoFit/>
-          </a:bodyPr>
-          <a:lstStyle/>
-          <a:p>
-            <a:pPr>
-              <a:defRPr sz="1100" b="1">
-                <a:solidFill>
-                  <a:srgbClr val="1064A0"/>
-                </a:solidFill>
-                <a:latin typeface="Arial"/>
-              </a:defRPr>
-            </a:pPr>
-            <a:r>
-              <a:t>ITS MAKER · DIGITALIZZAZIONE PROCESSI</a:t>
-            </a:r>
-          </a:p>
-        </p:txBody>
-      </p:sp>
-      <p:sp>
-        <p:nvSpPr>
-          <p:cNvPr id="3" name="TextBox 2"/>
-          <p:cNvSpPr txBox="1"/>
-          <p:nvPr/>
-        </p:nvSpPr>
-        <p:spPr>
-          <a:xfrm>
-            <a:off x="731520" y="658368"/>
-            <a:ext cx="10698480" cy="685800"/>
-          </a:xfrm>
-          <a:prstGeom prst="rect">
-            <a:avLst/>
-          </a:prstGeom>
-          <a:noFill/>
-        </p:spPr>
-        <p:txBody>
-          <a:bodyPr wrap="square">
-            <a:spAutoFit/>
-          </a:bodyPr>
-          <a:lstStyle/>
-          <a:p>
-            <a:pPr>
-              <a:defRPr sz="2200" b="1">
-                <a:solidFill>
-                  <a:srgbClr val="17344D"/>
-                </a:solidFill>
-                <a:latin typeface="Arial"/>
-              </a:defRPr>
-            </a:pPr>
-            <a:r>
-              <a:t>Sfida 3 · Debrief &amp; Regola 3</a:t>
-            </a:r>
-          </a:p>
-        </p:txBody>
-      </p:sp>
-      <p:sp>
-        <p:nvSpPr>
-          <p:cNvPr id="4" name="Rounded Rectangle 3"/>
+          <p:cNvPr id="2" name="Title 1"/>
+          <p:cNvSpPr>
+            <a:spLocks noGrp="1"/>
+          </p:cNvSpPr>
+          <p:nvPr>
+            <p:ph type="title" idx="102"/>
+          </p:nvPr>
+        </p:nvSpPr>
+        <p:spPr/>
+        <p:txBody>
+          <a:bodyPr/>
+          <a:lstStyle/>
+          <a:p>
+            <a:r>
+              <a:t>Sfida 3 · Cosa impariamo &amp; Regola 3</a:t>
+            </a:r>
+          </a:p>
+        </p:txBody>
+      </p:sp>
+      <p:sp>
+        <p:nvSpPr>
+          <p:cNvPr id="3" name="Rounded Rectangle 2"/>
           <p:cNvSpPr/>
           <p:nvPr/>
         </p:nvSpPr>
         <p:spPr>
           <a:xfrm>
-            <a:off x="731520" y="1463040"/>
-            <a:ext cx="10698480" cy="2926080"/>
+            <a:off x="594360" y="1920240"/>
+            <a:ext cx="10972800" cy="3108960"/>
           </a:xfrm>
           <a:prstGeom prst="roundRect">
             <a:avLst/>
@@ -4166,14 +2886,14 @@
       </p:sp>
       <p:sp>
         <p:nvSpPr>
-          <p:cNvPr id="5" name="TextBox 4"/>
+          <p:cNvPr id="4" name="TextBox 3"/>
           <p:cNvSpPr txBox="1"/>
           <p:nvPr/>
         </p:nvSpPr>
         <p:spPr>
           <a:xfrm>
-            <a:off x="1005840" y="1645920"/>
-            <a:ext cx="10149840" cy="2560320"/>
+            <a:off x="868680" y="2103120"/>
+            <a:ext cx="10424160" cy="2743200"/>
           </a:xfrm>
           <a:prstGeom prst="rect">
             <a:avLst/>
@@ -4228,14 +2948,14 @@
       </p:sp>
       <p:sp>
         <p:nvSpPr>
-          <p:cNvPr id="6" name="Rounded Rectangle 5"/>
+          <p:cNvPr id="5" name="Rounded Rectangle 4"/>
           <p:cNvSpPr/>
           <p:nvPr/>
         </p:nvSpPr>
         <p:spPr>
           <a:xfrm>
-            <a:off x="731520" y="4663440"/>
-            <a:ext cx="10698480" cy="1554480"/>
+            <a:off x="594360" y="5303520"/>
+            <a:ext cx="10972800" cy="1554480"/>
           </a:xfrm>
           <a:prstGeom prst="roundRect">
             <a:avLst/>
@@ -4273,14 +2993,14 @@
       </p:sp>
       <p:sp>
         <p:nvSpPr>
-          <p:cNvPr id="7" name="TextBox 6"/>
+          <p:cNvPr id="6" name="TextBox 5"/>
           <p:cNvSpPr txBox="1"/>
           <p:nvPr/>
         </p:nvSpPr>
         <p:spPr>
           <a:xfrm>
-            <a:off x="1005840" y="4846320"/>
-            <a:ext cx="10149840" cy="1188719"/>
+            <a:off x="868680" y="5440680"/>
+            <a:ext cx="10424160" cy="1280160"/>
           </a:xfrm>
           <a:prstGeom prst="rect">
             <a:avLst/>
@@ -4295,7 +3015,7 @@
           <a:p>
             <a:pPr>
               <a:spcAft>
-                <a:spcPts val="600"/>
+                <a:spcPts val="400"/>
               </a:spcAft>
               <a:defRPr sz="1300" b="1">
                 <a:solidFill>
@@ -4305,12 +3025,12 @@
               </a:defRPr>
             </a:pPr>
             <a:r>
-              <a:t>💡 REGOLA D'ORO 3:</a:t>
-            </a:r>
-          </a:p>
-          <a:p>
-            <a:pPr>
-              <a:defRPr sz="1400" b="1">
+              <a:t>💡 REGOLA PRATICA 3:</a:t>
+            </a:r>
+          </a:p>
+          <a:p>
+            <a:pPr>
+              <a:defRPr sz="1300" b="1">
                 <a:solidFill>
                   <a:srgbClr val="92400E"/>
                 </a:solidFill>
@@ -4343,70 +3063,19 @@
       <p:grpSpPr/>
       <p:sp>
         <p:nvSpPr>
-          <p:cNvPr id="2" name="TextBox 1"/>
-          <p:cNvSpPr txBox="1"/>
-          <p:nvPr/>
-        </p:nvSpPr>
-        <p:spPr>
-          <a:xfrm>
-            <a:off x="731520" y="365760"/>
-            <a:ext cx="10698480" cy="320040"/>
-          </a:xfrm>
-          <a:prstGeom prst="rect">
-            <a:avLst/>
-          </a:prstGeom>
-          <a:noFill/>
-        </p:spPr>
-        <p:txBody>
-          <a:bodyPr wrap="square">
-            <a:spAutoFit/>
-          </a:bodyPr>
-          <a:lstStyle/>
-          <a:p>
-            <a:pPr>
-              <a:defRPr sz="1100" b="1">
-                <a:solidFill>
-                  <a:srgbClr val="1064A0"/>
-                </a:solidFill>
-                <a:latin typeface="Arial"/>
-              </a:defRPr>
-            </a:pPr>
-            <a:r>
-              <a:t>ITS MAKER · DIGITALIZZAZIONE PROCESSI</a:t>
-            </a:r>
-          </a:p>
-        </p:txBody>
-      </p:sp>
-      <p:sp>
-        <p:nvSpPr>
-          <p:cNvPr id="3" name="TextBox 2"/>
-          <p:cNvSpPr txBox="1"/>
-          <p:nvPr/>
-        </p:nvSpPr>
-        <p:spPr>
-          <a:xfrm>
-            <a:off x="731520" y="658368"/>
-            <a:ext cx="10698480" cy="685800"/>
-          </a:xfrm>
-          <a:prstGeom prst="rect">
-            <a:avLst/>
-          </a:prstGeom>
-          <a:noFill/>
-        </p:spPr>
-        <p:txBody>
-          <a:bodyPr wrap="square">
-            <a:spAutoFit/>
-          </a:bodyPr>
-          <a:lstStyle/>
-          <a:p>
-            <a:pPr>
-              <a:defRPr sz="2200" b="1">
-                <a:solidFill>
-                  <a:srgbClr val="17344D"/>
-                </a:solidFill>
-                <a:latin typeface="Arial"/>
-              </a:defRPr>
-            </a:pPr>
+          <p:cNvPr id="2" name="Title 1"/>
+          <p:cNvSpPr>
+            <a:spLocks noGrp="1"/>
+          </p:cNvSpPr>
+          <p:nvPr>
+            <p:ph type="title" idx="102"/>
+          </p:nvPr>
+        </p:nvSpPr>
+        <p:spPr/>
+        <p:txBody>
+          <a:bodyPr/>
+          <a:lstStyle/>
+          <a:p>
             <a:r>
               <a:t>Sfida 4 · «Il test del trabocchetto» (Il problema)</a:t>
             </a:r>
@@ -4415,14 +3084,14 @@
       </p:sp>
       <p:sp>
         <p:nvSpPr>
-          <p:cNvPr id="4" name="Rounded Rectangle 3"/>
+          <p:cNvPr id="3" name="Rounded Rectangle 2"/>
           <p:cNvSpPr/>
           <p:nvPr/>
         </p:nvSpPr>
         <p:spPr>
           <a:xfrm>
-            <a:off x="731520" y="1463040"/>
-            <a:ext cx="5120640" cy="4754880"/>
+            <a:off x="594360" y="1920240"/>
+            <a:ext cx="5303520" cy="4937760"/>
           </a:xfrm>
           <a:prstGeom prst="roundRect">
             <a:avLst/>
@@ -4460,14 +3129,14 @@
       </p:sp>
       <p:sp>
         <p:nvSpPr>
-          <p:cNvPr id="5" name="TextBox 4"/>
+          <p:cNvPr id="4" name="TextBox 3"/>
           <p:cNvSpPr txBox="1"/>
           <p:nvPr/>
         </p:nvSpPr>
         <p:spPr>
           <a:xfrm>
-            <a:off x="1005840" y="1737360"/>
-            <a:ext cx="4572000" cy="4206240"/>
+            <a:off x="822960" y="2103120"/>
+            <a:ext cx="4846320" cy="4480560"/>
           </a:xfrm>
           <a:prstGeom prst="rect">
             <a:avLst/>
@@ -4558,14 +3227,14 @@
       </p:sp>
       <p:sp>
         <p:nvSpPr>
-          <p:cNvPr id="6" name="Rounded Rectangle 5"/>
+          <p:cNvPr id="5" name="Rounded Rectangle 4"/>
           <p:cNvSpPr/>
           <p:nvPr/>
         </p:nvSpPr>
         <p:spPr>
           <a:xfrm>
-            <a:off x="6217920" y="1463040"/>
-            <a:ext cx="5212080" cy="4754880"/>
+            <a:off x="6172200" y="1920240"/>
+            <a:ext cx="5394960" cy="4937760"/>
           </a:xfrm>
           <a:prstGeom prst="roundRect">
             <a:avLst/>
@@ -4603,14 +3272,14 @@
       </p:sp>
       <p:sp>
         <p:nvSpPr>
-          <p:cNvPr id="7" name="TextBox 6"/>
+          <p:cNvPr id="6" name="TextBox 5"/>
           <p:cNvSpPr txBox="1"/>
           <p:nvPr/>
         </p:nvSpPr>
         <p:spPr>
           <a:xfrm>
-            <a:off x="6492240" y="1737360"/>
-            <a:ext cx="4663440" cy="4206240"/>
+            <a:off x="6400800" y="2103120"/>
+            <a:ext cx="4937760" cy="4480560"/>
           </a:xfrm>
           <a:prstGeom prst="rect">
             <a:avLst/>
@@ -4719,70 +3388,19 @@
       <p:grpSpPr/>
       <p:sp>
         <p:nvSpPr>
-          <p:cNvPr id="2" name="TextBox 1"/>
-          <p:cNvSpPr txBox="1"/>
-          <p:nvPr/>
-        </p:nvSpPr>
-        <p:spPr>
-          <a:xfrm>
-            <a:off x="731520" y="365760"/>
-            <a:ext cx="10698480" cy="320040"/>
-          </a:xfrm>
-          <a:prstGeom prst="rect">
-            <a:avLst/>
-          </a:prstGeom>
-          <a:noFill/>
-        </p:spPr>
-        <p:txBody>
-          <a:bodyPr wrap="square">
-            <a:spAutoFit/>
-          </a:bodyPr>
-          <a:lstStyle/>
-          <a:p>
-            <a:pPr>
-              <a:defRPr sz="1100" b="1">
-                <a:solidFill>
-                  <a:srgbClr val="1064A0"/>
-                </a:solidFill>
-                <a:latin typeface="Arial"/>
-              </a:defRPr>
-            </a:pPr>
-            <a:r>
-              <a:t>ATTIVITÀ PRATICA 4</a:t>
-            </a:r>
-          </a:p>
-        </p:txBody>
-      </p:sp>
-      <p:sp>
-        <p:nvSpPr>
-          <p:cNvPr id="3" name="TextBox 2"/>
-          <p:cNvSpPr txBox="1"/>
-          <p:nvPr/>
-        </p:nvSpPr>
-        <p:spPr>
-          <a:xfrm>
-            <a:off x="731520" y="658368"/>
-            <a:ext cx="10698480" cy="685800"/>
-          </a:xfrm>
-          <a:prstGeom prst="rect">
-            <a:avLst/>
-          </a:prstGeom>
-          <a:noFill/>
-        </p:spPr>
-        <p:txBody>
-          <a:bodyPr wrap="square">
-            <a:spAutoFit/>
-          </a:bodyPr>
-          <a:lstStyle/>
-          <a:p>
-            <a:pPr>
-              <a:defRPr sz="2200" b="1">
-                <a:solidFill>
-                  <a:srgbClr val="17344D"/>
-                </a:solidFill>
-                <a:latin typeface="Arial"/>
-              </a:defRPr>
-            </a:pPr>
+          <p:cNvPr id="2" name="Title 1"/>
+          <p:cNvSpPr>
+            <a:spLocks noGrp="1"/>
+          </p:cNvSpPr>
+          <p:nvPr>
+            <p:ph type="title" idx="102"/>
+          </p:nvPr>
+        </p:nvSpPr>
+        <p:spPr/>
+        <p:txBody>
+          <a:bodyPr/>
+          <a:lstStyle/>
+          <a:p>
             <a:r>
               <a:t>Sfida 4 · Al lavoro a coppie (10 minuti)</a:t>
             </a:r>
@@ -4791,14 +3409,14 @@
       </p:sp>
       <p:sp>
         <p:nvSpPr>
-          <p:cNvPr id="4" name="Rounded Rectangle 3"/>
+          <p:cNvPr id="3" name="Rounded Rectangle 2"/>
           <p:cNvSpPr/>
           <p:nvPr/>
         </p:nvSpPr>
         <p:spPr>
           <a:xfrm>
-            <a:off x="731520" y="1463040"/>
-            <a:ext cx="6217920" cy="4754880"/>
+            <a:off x="594360" y="1920240"/>
+            <a:ext cx="6492240" cy="4937760"/>
           </a:xfrm>
           <a:prstGeom prst="roundRect">
             <a:avLst/>
@@ -4836,14 +3454,14 @@
       </p:sp>
       <p:sp>
         <p:nvSpPr>
-          <p:cNvPr id="5" name="TextBox 4"/>
+          <p:cNvPr id="4" name="TextBox 3"/>
           <p:cNvSpPr txBox="1"/>
           <p:nvPr/>
         </p:nvSpPr>
         <p:spPr>
           <a:xfrm>
-            <a:off x="1005840" y="1645920"/>
-            <a:ext cx="5669280" cy="4389120"/>
+            <a:off x="822960" y="2103120"/>
+            <a:ext cx="6035040" cy="4480560"/>
           </a:xfrm>
           <a:prstGeom prst="rect">
             <a:avLst/>
@@ -4935,14 +3553,14 @@
       </p:sp>
       <p:sp>
         <p:nvSpPr>
-          <p:cNvPr id="6" name="Rounded Rectangle 5"/>
+          <p:cNvPr id="5" name="Rounded Rectangle 4"/>
           <p:cNvSpPr/>
           <p:nvPr/>
         </p:nvSpPr>
         <p:spPr>
           <a:xfrm>
-            <a:off x="7315200" y="1463040"/>
-            <a:ext cx="4114800" cy="4754880"/>
+            <a:off x="7360920" y="1920240"/>
+            <a:ext cx="4206240" cy="4937760"/>
           </a:xfrm>
           <a:prstGeom prst="roundRect">
             <a:avLst/>
@@ -4980,14 +3598,14 @@
       </p:sp>
       <p:sp>
         <p:nvSpPr>
-          <p:cNvPr id="7" name="TextBox 6"/>
+          <p:cNvPr id="6" name="TextBox 5"/>
           <p:cNvSpPr txBox="1"/>
           <p:nvPr/>
         </p:nvSpPr>
         <p:spPr>
           <a:xfrm>
-            <a:off x="7589520" y="1645920"/>
-            <a:ext cx="3566160" cy="4389120"/>
+            <a:off x="7589520" y="2103120"/>
+            <a:ext cx="3749039" cy="4480560"/>
           </a:xfrm>
           <a:prstGeom prst="rect">
             <a:avLst/>
@@ -5111,86 +3729,35 @@
       <p:grpSpPr/>
       <p:sp>
         <p:nvSpPr>
-          <p:cNvPr id="2" name="TextBox 1"/>
-          <p:cNvSpPr txBox="1"/>
-          <p:nvPr/>
-        </p:nvSpPr>
-        <p:spPr>
-          <a:xfrm>
-            <a:off x="731520" y="365760"/>
-            <a:ext cx="10698480" cy="320040"/>
-          </a:xfrm>
-          <a:prstGeom prst="rect">
-            <a:avLst/>
-          </a:prstGeom>
-          <a:noFill/>
-        </p:spPr>
-        <p:txBody>
-          <a:bodyPr wrap="square">
-            <a:spAutoFit/>
-          </a:bodyPr>
-          <a:lstStyle/>
-          <a:p>
-            <a:pPr>
-              <a:defRPr sz="1100" b="1">
-                <a:solidFill>
-                  <a:srgbClr val="1064A0"/>
-                </a:solidFill>
-                <a:latin typeface="Arial"/>
-              </a:defRPr>
-            </a:pPr>
-            <a:r>
-              <a:t>ITS MAKER · DIGITALIZZAZIONE PROCESSI</a:t>
-            </a:r>
-          </a:p>
-        </p:txBody>
-      </p:sp>
-      <p:sp>
-        <p:nvSpPr>
-          <p:cNvPr id="3" name="TextBox 2"/>
-          <p:cNvSpPr txBox="1"/>
-          <p:nvPr/>
-        </p:nvSpPr>
-        <p:spPr>
-          <a:xfrm>
-            <a:off x="731520" y="658368"/>
-            <a:ext cx="10698480" cy="685800"/>
-          </a:xfrm>
-          <a:prstGeom prst="rect">
-            <a:avLst/>
-          </a:prstGeom>
-          <a:noFill/>
-        </p:spPr>
-        <p:txBody>
-          <a:bodyPr wrap="square">
-            <a:spAutoFit/>
-          </a:bodyPr>
-          <a:lstStyle/>
-          <a:p>
-            <a:pPr>
-              <a:defRPr sz="2200" b="1">
-                <a:solidFill>
-                  <a:srgbClr val="17344D"/>
-                </a:solidFill>
-                <a:latin typeface="Arial"/>
-              </a:defRPr>
-            </a:pPr>
-            <a:r>
-              <a:t>Sfida 4 · Debrief &amp; Regola 4</a:t>
-            </a:r>
-          </a:p>
-        </p:txBody>
-      </p:sp>
-      <p:sp>
-        <p:nvSpPr>
-          <p:cNvPr id="4" name="Rounded Rectangle 3"/>
+          <p:cNvPr id="2" name="Title 1"/>
+          <p:cNvSpPr>
+            <a:spLocks noGrp="1"/>
+          </p:cNvSpPr>
+          <p:nvPr>
+            <p:ph type="title" idx="102"/>
+          </p:nvPr>
+        </p:nvSpPr>
+        <p:spPr/>
+        <p:txBody>
+          <a:bodyPr/>
+          <a:lstStyle/>
+          <a:p>
+            <a:r>
+              <a:t>Sfida 4 · Cosa impariamo &amp; Regola 4</a:t>
+            </a:r>
+          </a:p>
+        </p:txBody>
+      </p:sp>
+      <p:sp>
+        <p:nvSpPr>
+          <p:cNvPr id="3" name="Rounded Rectangle 2"/>
           <p:cNvSpPr/>
           <p:nvPr/>
         </p:nvSpPr>
         <p:spPr>
           <a:xfrm>
-            <a:off x="731520" y="1463040"/>
-            <a:ext cx="10698480" cy="2926080"/>
+            <a:off x="594360" y="1920240"/>
+            <a:ext cx="10972800" cy="3108960"/>
           </a:xfrm>
           <a:prstGeom prst="roundRect">
             <a:avLst/>
@@ -5228,14 +3795,14 @@
       </p:sp>
       <p:sp>
         <p:nvSpPr>
-          <p:cNvPr id="5" name="TextBox 4"/>
+          <p:cNvPr id="4" name="TextBox 3"/>
           <p:cNvSpPr txBox="1"/>
           <p:nvPr/>
         </p:nvSpPr>
         <p:spPr>
           <a:xfrm>
-            <a:off x="1005840" y="1645920"/>
-            <a:ext cx="10149840" cy="2560320"/>
+            <a:off x="868680" y="2103120"/>
+            <a:ext cx="10424160" cy="2743200"/>
           </a:xfrm>
           <a:prstGeom prst="rect">
             <a:avLst/>
@@ -5290,14 +3857,14 @@
       </p:sp>
       <p:sp>
         <p:nvSpPr>
-          <p:cNvPr id="6" name="Rounded Rectangle 5"/>
+          <p:cNvPr id="5" name="Rounded Rectangle 4"/>
           <p:cNvSpPr/>
           <p:nvPr/>
         </p:nvSpPr>
         <p:spPr>
           <a:xfrm>
-            <a:off x="731520" y="4663440"/>
-            <a:ext cx="10698480" cy="1554480"/>
+            <a:off x="594360" y="5303520"/>
+            <a:ext cx="10972800" cy="1554480"/>
           </a:xfrm>
           <a:prstGeom prst="roundRect">
             <a:avLst/>
@@ -5335,14 +3902,14 @@
       </p:sp>
       <p:sp>
         <p:nvSpPr>
-          <p:cNvPr id="7" name="TextBox 6"/>
+          <p:cNvPr id="6" name="TextBox 5"/>
           <p:cNvSpPr txBox="1"/>
           <p:nvPr/>
         </p:nvSpPr>
         <p:spPr>
           <a:xfrm>
-            <a:off x="1005840" y="4846320"/>
-            <a:ext cx="10149840" cy="1188719"/>
+            <a:off x="868680" y="5440680"/>
+            <a:ext cx="10424160" cy="1280160"/>
           </a:xfrm>
           <a:prstGeom prst="rect">
             <a:avLst/>
@@ -5357,7 +3924,7 @@
           <a:p>
             <a:pPr>
               <a:spcAft>
-                <a:spcPts val="600"/>
+                <a:spcPts val="400"/>
               </a:spcAft>
               <a:defRPr sz="1300" b="1">
                 <a:solidFill>
@@ -5367,12 +3934,12 @@
               </a:defRPr>
             </a:pPr>
             <a:r>
-              <a:t>💡 REGOLA D'ORO 4:</a:t>
-            </a:r>
-          </a:p>
-          <a:p>
-            <a:pPr>
-              <a:defRPr sz="1400" b="1">
+              <a:t>💡 REGOLA PRATICA 4:</a:t>
+            </a:r>
+          </a:p>
+          <a:p>
+            <a:pPr>
+              <a:defRPr sz="1300" b="1">
                 <a:solidFill>
                   <a:srgbClr val="92400E"/>
                 </a:solidFill>
@@ -5405,70 +3972,19 @@
       <p:grpSpPr/>
       <p:sp>
         <p:nvSpPr>
-          <p:cNvPr id="2" name="TextBox 1"/>
-          <p:cNvSpPr txBox="1"/>
-          <p:nvPr/>
-        </p:nvSpPr>
-        <p:spPr>
-          <a:xfrm>
-            <a:off x="731520" y="365760"/>
-            <a:ext cx="10698480" cy="320040"/>
-          </a:xfrm>
-          <a:prstGeom prst="rect">
-            <a:avLst/>
-          </a:prstGeom>
-          <a:noFill/>
-        </p:spPr>
-        <p:txBody>
-          <a:bodyPr wrap="square">
-            <a:spAutoFit/>
-          </a:bodyPr>
-          <a:lstStyle/>
-          <a:p>
-            <a:pPr>
-              <a:defRPr sz="1100" b="1">
-                <a:solidFill>
-                  <a:srgbClr val="1064A0"/>
-                </a:solidFill>
-                <a:latin typeface="Arial"/>
-              </a:defRPr>
-            </a:pPr>
-            <a:r>
-              <a:t>ITS MAKER · DIGITALIZZAZIONE PROCESSI</a:t>
-            </a:r>
-          </a:p>
-        </p:txBody>
-      </p:sp>
-      <p:sp>
-        <p:nvSpPr>
-          <p:cNvPr id="3" name="TextBox 2"/>
-          <p:cNvSpPr txBox="1"/>
-          <p:nvPr/>
-        </p:nvSpPr>
-        <p:spPr>
-          <a:xfrm>
-            <a:off x="731520" y="658368"/>
-            <a:ext cx="10698480" cy="685800"/>
-          </a:xfrm>
-          <a:prstGeom prst="rect">
-            <a:avLst/>
-          </a:prstGeom>
-          <a:noFill/>
-        </p:spPr>
-        <p:txBody>
-          <a:bodyPr wrap="square">
-            <a:spAutoFit/>
-          </a:bodyPr>
-          <a:lstStyle/>
-          <a:p>
-            <a:pPr>
-              <a:defRPr sz="2200" b="1">
-                <a:solidFill>
-                  <a:srgbClr val="17344D"/>
-                </a:solidFill>
-                <a:latin typeface="Arial"/>
-              </a:defRPr>
-            </a:pPr>
+          <p:cNvPr id="2" name="Title 1"/>
+          <p:cNvSpPr>
+            <a:spLocks noGrp="1"/>
+          </p:cNvSpPr>
+          <p:nvPr>
+            <p:ph type="title" idx="102"/>
+          </p:nvPr>
+        </p:nvSpPr>
+        <p:spPr/>
+        <p:txBody>
+          <a:bodyPr/>
+          <a:lstStyle/>
+          <a:p>
             <a:r>
               <a:t>Il ponte verso Unsloth Studio e i Documenti (RAG)</a:t>
             </a:r>
@@ -5477,15 +3993,15 @@
       </p:sp>
       <p:graphicFrame>
         <p:nvGraphicFramePr>
-          <p:cNvPr id="4" name="Table 3"/>
+          <p:cNvPr id="3" name="Table 2"/>
           <p:cNvGraphicFramePr>
             <a:graphicFrameLocks noGrp="1"/>
           </p:cNvGraphicFramePr>
           <p:nvPr/>
         </p:nvGraphicFramePr>
         <p:xfrm>
-          <a:off x="731520" y="1463040"/>
-          <a:ext cx="10698480" cy="3840480"/>
+          <a:off x="594360" y="1920240"/>
+          <a:ext cx="10972800" cy="3931920"/>
         </p:xfrm>
         <a:graphic>
           <a:graphicData uri="http://schemas.openxmlformats.org/drawingml/2006/table">
@@ -5494,18 +4010,18 @@
                 <a:tableStyleId>{5C22544A-7EE6-4342-B048-85BDC9FD1C3A}</a:tableStyleId>
               </a:tblPr>
               <a:tblGrid>
-                <a:gridCol w="2926080"/>
-                <a:gridCol w="3840480"/>
+                <a:gridCol w="3108960"/>
+                <a:gridCol w="3931920"/>
                 <a:gridCol w="3931920"/>
               </a:tblGrid>
-              <a:tr h="768096">
+              <a:tr h="786384">
                 <a:tc>
                   <a:txBody>
                     <a:bodyPr/>
                     <a:lstStyle/>
                     <a:p>
                       <a:pPr>
-                        <a:defRPr b="1" sz="1200">
+                        <a:defRPr b="1" sz="1300">
                           <a:solidFill>
                             <a:srgbClr val="FFFFFF"/>
                           </a:solidFill>
@@ -5528,7 +4044,7 @@
                     <a:lstStyle/>
                     <a:p>
                       <a:pPr>
-                        <a:defRPr b="1" sz="1200">
+                        <a:defRPr b="1" sz="1300">
                           <a:solidFill>
                             <a:srgbClr val="FFFFFF"/>
                           </a:solidFill>
@@ -5551,7 +4067,7 @@
                     <a:lstStyle/>
                     <a:p>
                       <a:pPr>
-                        <a:defRPr b="1" sz="1200">
+                        <a:defRPr b="1" sz="1300">
                           <a:solidFill>
                             <a:srgbClr val="FFFFFF"/>
                           </a:solidFill>
@@ -5569,14 +4085,14 @@
                   </a:tcPr>
                 </a:tc>
               </a:tr>
-              <a:tr h="768096">
+              <a:tr h="786384">
                 <a:tc>
                   <a:txBody>
                     <a:bodyPr/>
                     <a:lstStyle/>
                     <a:p>
                       <a:pPr>
-                        <a:defRPr sz="1100">
+                        <a:defRPr sz="1200">
                           <a:solidFill>
                             <a:srgbClr val="1E293B"/>
                           </a:solidFill>
@@ -5599,7 +4115,7 @@
                     <a:lstStyle/>
                     <a:p>
                       <a:pPr>
-                        <a:defRPr sz="1100">
+                        <a:defRPr sz="1200">
                           <a:solidFill>
                             <a:srgbClr val="1E293B"/>
                           </a:solidFill>
@@ -5622,7 +4138,7 @@
                     <a:lstStyle/>
                     <a:p>
                       <a:pPr>
-                        <a:defRPr sz="1100">
+                        <a:defRPr sz="1200">
                           <a:solidFill>
                             <a:srgbClr val="1E293B"/>
                           </a:solidFill>
@@ -5640,14 +4156,14 @@
                   </a:tcPr>
                 </a:tc>
               </a:tr>
-              <a:tr h="768096">
+              <a:tr h="786384">
                 <a:tc>
                   <a:txBody>
                     <a:bodyPr/>
                     <a:lstStyle/>
                     <a:p>
                       <a:pPr>
-                        <a:defRPr sz="1100">
+                        <a:defRPr sz="1200">
                           <a:solidFill>
                             <a:srgbClr val="1E293B"/>
                           </a:solidFill>
@@ -5670,7 +4186,7 @@
                     <a:lstStyle/>
                     <a:p>
                       <a:pPr>
-                        <a:defRPr sz="1100">
+                        <a:defRPr sz="1200">
                           <a:solidFill>
                             <a:srgbClr val="1E293B"/>
                           </a:solidFill>
@@ -5693,7 +4209,7 @@
                     <a:lstStyle/>
                     <a:p>
                       <a:pPr>
-                        <a:defRPr sz="1100">
+                        <a:defRPr sz="1200">
                           <a:solidFill>
                             <a:srgbClr val="1E293B"/>
                           </a:solidFill>
@@ -5711,14 +4227,14 @@
                   </a:tcPr>
                 </a:tc>
               </a:tr>
-              <a:tr h="768096">
+              <a:tr h="786384">
                 <a:tc>
                   <a:txBody>
                     <a:bodyPr/>
                     <a:lstStyle/>
                     <a:p>
                       <a:pPr>
-                        <a:defRPr sz="1100">
+                        <a:defRPr sz="1200">
                           <a:solidFill>
                             <a:srgbClr val="1E293B"/>
                           </a:solidFill>
@@ -5741,7 +4257,7 @@
                     <a:lstStyle/>
                     <a:p>
                       <a:pPr>
-                        <a:defRPr sz="1100">
+                        <a:defRPr sz="1200">
                           <a:solidFill>
                             <a:srgbClr val="1E293B"/>
                           </a:solidFill>
@@ -5764,7 +4280,7 @@
                     <a:lstStyle/>
                     <a:p>
                       <a:pPr>
-                        <a:defRPr sz="1100">
+                        <a:defRPr sz="1200">
                           <a:solidFill>
                             <a:srgbClr val="1E293B"/>
                           </a:solidFill>
@@ -5782,14 +4298,14 @@
                   </a:tcPr>
                 </a:tc>
               </a:tr>
-              <a:tr h="768096">
+              <a:tr h="786384">
                 <a:tc>
                   <a:txBody>
                     <a:bodyPr/>
                     <a:lstStyle/>
                     <a:p>
                       <a:pPr>
-                        <a:defRPr sz="1100">
+                        <a:defRPr sz="1200">
                           <a:solidFill>
                             <a:srgbClr val="1E293B"/>
                           </a:solidFill>
@@ -5812,7 +4328,7 @@
                     <a:lstStyle/>
                     <a:p>
                       <a:pPr>
-                        <a:defRPr sz="1100">
+                        <a:defRPr sz="1200">
                           <a:solidFill>
                             <a:srgbClr val="1E293B"/>
                           </a:solidFill>
@@ -5835,7 +4351,7 @@
                     <a:lstStyle/>
                     <a:p>
                       <a:pPr>
-                        <a:defRPr sz="1100">
+                        <a:defRPr sz="1200">
                           <a:solidFill>
                             <a:srgbClr val="1E293B"/>
                           </a:solidFill>
@@ -5859,14 +4375,14 @@
       </p:graphicFrame>
       <p:sp>
         <p:nvSpPr>
-          <p:cNvPr id="5" name="Rounded Rectangle 4"/>
+          <p:cNvPr id="4" name="Rounded Rectangle 3"/>
           <p:cNvSpPr/>
           <p:nvPr/>
         </p:nvSpPr>
         <p:spPr>
           <a:xfrm>
-            <a:off x="731520" y="5486400"/>
-            <a:ext cx="10698480" cy="822960"/>
+            <a:off x="594360" y="6035040"/>
+            <a:ext cx="10972800" cy="822960"/>
           </a:xfrm>
           <a:prstGeom prst="roundRect">
             <a:avLst/>
@@ -5902,14 +4418,14 @@
       </p:sp>
       <p:sp>
         <p:nvSpPr>
-          <p:cNvPr id="6" name="TextBox 5"/>
+          <p:cNvPr id="5" name="TextBox 4"/>
           <p:cNvSpPr txBox="1"/>
           <p:nvPr/>
         </p:nvSpPr>
         <p:spPr>
           <a:xfrm>
-            <a:off x="914400" y="5532120"/>
-            <a:ext cx="10332720" cy="731520"/>
+            <a:off x="822960" y="6080760"/>
+            <a:ext cx="10515600" cy="731520"/>
           </a:xfrm>
           <a:prstGeom prst="rect">
             <a:avLst/>
@@ -5955,70 +4471,19 @@
       <p:grpSpPr/>
       <p:sp>
         <p:nvSpPr>
-          <p:cNvPr id="2" name="TextBox 1"/>
-          <p:cNvSpPr txBox="1"/>
-          <p:nvPr/>
-        </p:nvSpPr>
-        <p:spPr>
-          <a:xfrm>
-            <a:off x="731520" y="365760"/>
-            <a:ext cx="10698480" cy="320040"/>
-          </a:xfrm>
-          <a:prstGeom prst="rect">
-            <a:avLst/>
-          </a:prstGeom>
-          <a:noFill/>
-        </p:spPr>
-        <p:txBody>
-          <a:bodyPr wrap="square">
-            <a:spAutoFit/>
-          </a:bodyPr>
-          <a:lstStyle/>
-          <a:p>
-            <a:pPr>
-              <a:defRPr sz="1100" b="1">
-                <a:solidFill>
-                  <a:srgbClr val="1064A0"/>
-                </a:solidFill>
-                <a:latin typeface="Arial"/>
-              </a:defRPr>
-            </a:pPr>
-            <a:r>
-              <a:t>ITS MAKER · DIGITALIZZAZIONE PROCESSI</a:t>
-            </a:r>
-          </a:p>
-        </p:txBody>
-      </p:sp>
-      <p:sp>
-        <p:nvSpPr>
-          <p:cNvPr id="3" name="TextBox 2"/>
-          <p:cNvSpPr txBox="1"/>
-          <p:nvPr/>
-        </p:nvSpPr>
-        <p:spPr>
-          <a:xfrm>
-            <a:off x="731520" y="658368"/>
-            <a:ext cx="10698480" cy="685800"/>
-          </a:xfrm>
-          <a:prstGeom prst="rect">
-            <a:avLst/>
-          </a:prstGeom>
-          <a:noFill/>
-        </p:spPr>
-        <p:txBody>
-          <a:bodyPr wrap="square">
-            <a:spAutoFit/>
-          </a:bodyPr>
-          <a:lstStyle/>
-          <a:p>
-            <a:pPr>
-              <a:defRPr sz="2200" b="1">
-                <a:solidFill>
-                  <a:srgbClr val="17344D"/>
-                </a:solidFill>
-                <a:latin typeface="Arial"/>
-              </a:defRPr>
-            </a:pPr>
+          <p:cNvPr id="2" name="Title 1"/>
+          <p:cNvSpPr>
+            <a:spLocks noGrp="1"/>
+          </p:cNvSpPr>
+          <p:nvPr>
+            <p:ph type="title" idx="102"/>
+          </p:nvPr>
+        </p:nvSpPr>
+        <p:spPr/>
+        <p:txBody>
+          <a:bodyPr/>
+          <a:lstStyle/>
+          <a:p>
             <a:r>
               <a:t>Riepilogo finale: cosa sappiamo fare da oggi</a:t>
             </a:r>
@@ -6027,14 +4492,14 @@
       </p:sp>
       <p:sp>
         <p:nvSpPr>
-          <p:cNvPr id="4" name="Rounded Rectangle 3"/>
+          <p:cNvPr id="3" name="Rounded Rectangle 2"/>
           <p:cNvSpPr/>
           <p:nvPr/>
         </p:nvSpPr>
         <p:spPr>
           <a:xfrm>
-            <a:off x="731520" y="1463040"/>
-            <a:ext cx="10698480" cy="4023360"/>
+            <a:off x="594360" y="1920240"/>
+            <a:ext cx="10972800" cy="4023360"/>
           </a:xfrm>
           <a:prstGeom prst="roundRect">
             <a:avLst/>
@@ -6072,14 +4537,14 @@
       </p:sp>
       <p:sp>
         <p:nvSpPr>
-          <p:cNvPr id="5" name="TextBox 4"/>
+          <p:cNvPr id="4" name="TextBox 3"/>
           <p:cNvSpPr txBox="1"/>
           <p:nvPr/>
         </p:nvSpPr>
         <p:spPr>
           <a:xfrm>
-            <a:off x="1005840" y="1645920"/>
-            <a:ext cx="10149840" cy="3657600"/>
+            <a:off x="868680" y="2103120"/>
+            <a:ext cx="10424160" cy="3657600"/>
           </a:xfrm>
           <a:prstGeom prst="rect">
             <a:avLst/>
@@ -6170,14 +4635,14 @@
       </p:sp>
       <p:sp>
         <p:nvSpPr>
-          <p:cNvPr id="6" name="Rounded Rectangle 5"/>
+          <p:cNvPr id="5" name="Rounded Rectangle 4"/>
           <p:cNvSpPr/>
           <p:nvPr/>
         </p:nvSpPr>
         <p:spPr>
           <a:xfrm>
-            <a:off x="731520" y="5577840"/>
-            <a:ext cx="10698480" cy="822960"/>
+            <a:off x="594360" y="6126480"/>
+            <a:ext cx="10972800" cy="822960"/>
           </a:xfrm>
           <a:prstGeom prst="roundRect">
             <a:avLst/>
@@ -6213,14 +4678,14 @@
       </p:sp>
       <p:sp>
         <p:nvSpPr>
-          <p:cNvPr id="7" name="TextBox 6"/>
+          <p:cNvPr id="6" name="TextBox 5"/>
           <p:cNvSpPr txBox="1"/>
           <p:nvPr/>
         </p:nvSpPr>
         <p:spPr>
           <a:xfrm>
-            <a:off x="914400" y="5623560"/>
-            <a:ext cx="10332720" cy="731520"/>
+            <a:off x="822960" y="6172200"/>
+            <a:ext cx="10515600" cy="731520"/>
           </a:xfrm>
           <a:prstGeom prst="rect">
             <a:avLst/>
@@ -6266,70 +4731,19 @@
       <p:grpSpPr/>
       <p:sp>
         <p:nvSpPr>
-          <p:cNvPr id="2" name="TextBox 1"/>
-          <p:cNvSpPr txBox="1"/>
-          <p:nvPr/>
-        </p:nvSpPr>
-        <p:spPr>
-          <a:xfrm>
-            <a:off x="731520" y="365760"/>
-            <a:ext cx="10698480" cy="320040"/>
-          </a:xfrm>
-          <a:prstGeom prst="rect">
-            <a:avLst/>
-          </a:prstGeom>
-          <a:noFill/>
-        </p:spPr>
-        <p:txBody>
-          <a:bodyPr wrap="square">
-            <a:spAutoFit/>
-          </a:bodyPr>
-          <a:lstStyle/>
-          <a:p>
-            <a:pPr>
-              <a:defRPr sz="1100" b="1">
-                <a:solidFill>
-                  <a:srgbClr val="1064A0"/>
-                </a:solidFill>
-                <a:latin typeface="Arial"/>
-              </a:defRPr>
-            </a:pPr>
-            <a:r>
-              <a:t>ITS MAKER · DIGITALIZZAZIONE PROCESSI</a:t>
-            </a:r>
-          </a:p>
-        </p:txBody>
-      </p:sp>
-      <p:sp>
-        <p:nvSpPr>
-          <p:cNvPr id="3" name="TextBox 2"/>
-          <p:cNvSpPr txBox="1"/>
-          <p:nvPr/>
-        </p:nvSpPr>
-        <p:spPr>
-          <a:xfrm>
-            <a:off x="731520" y="658368"/>
-            <a:ext cx="10698480" cy="685800"/>
-          </a:xfrm>
-          <a:prstGeom prst="rect">
-            <a:avLst/>
-          </a:prstGeom>
-          <a:noFill/>
-        </p:spPr>
-        <p:txBody>
-          <a:bodyPr wrap="square">
-            <a:spAutoFit/>
-          </a:bodyPr>
-          <a:lstStyle/>
-          <a:p>
-            <a:pPr>
-              <a:defRPr sz="2200" b="1">
-                <a:solidFill>
-                  <a:srgbClr val="17344D"/>
-                </a:solidFill>
-                <a:latin typeface="Arial"/>
-              </a:defRPr>
-            </a:pPr>
+          <p:cNvPr id="2" name="Title 1"/>
+          <p:cNvSpPr>
+            <a:spLocks noGrp="1"/>
+          </p:cNvSpPr>
+          <p:nvPr>
+            <p:ph type="title" idx="102"/>
+          </p:nvPr>
+        </p:nvSpPr>
+        <p:spPr/>
+        <p:txBody>
+          <a:bodyPr/>
+          <a:lstStyle/>
+          <a:p>
             <a:r>
               <a:t>Il piano di oggi: la regola del «10 – 10 – 5»</a:t>
             </a:r>
@@ -6338,14 +4752,14 @@
       </p:sp>
       <p:sp>
         <p:nvSpPr>
-          <p:cNvPr id="4" name="Rounded Rectangle 3"/>
+          <p:cNvPr id="3" name="Rounded Rectangle 2"/>
           <p:cNvSpPr/>
           <p:nvPr/>
         </p:nvSpPr>
         <p:spPr>
           <a:xfrm>
-            <a:off x="731520" y="1463040"/>
-            <a:ext cx="3337560" cy="2926080"/>
+            <a:off x="594360" y="1920240"/>
+            <a:ext cx="3474720" cy="3108960"/>
           </a:xfrm>
           <a:prstGeom prst="roundRect">
             <a:avLst/>
@@ -6383,14 +4797,14 @@
       </p:sp>
       <p:sp>
         <p:nvSpPr>
-          <p:cNvPr id="5" name="TextBox 4"/>
+          <p:cNvPr id="4" name="TextBox 3"/>
           <p:cNvSpPr txBox="1"/>
           <p:nvPr/>
         </p:nvSpPr>
         <p:spPr>
           <a:xfrm>
-            <a:off x="914400" y="1645920"/>
-            <a:ext cx="2971800" cy="2560320"/>
+            <a:off x="777240" y="2057400"/>
+            <a:ext cx="3108960" cy="2743200"/>
           </a:xfrm>
           <a:prstGeom prst="rect">
             <a:avLst/>
@@ -6405,9 +4819,9 @@
           <a:p>
             <a:pPr>
               <a:spcAft>
-                <a:spcPts val="800"/>
-              </a:spcAft>
-              <a:defRPr sz="1600" b="1">
+                <a:spcPts val="600"/>
+              </a:spcAft>
+              <a:defRPr sz="1500" b="1">
                 <a:solidFill>
                   <a:srgbClr val="1064A0"/>
                 </a:solidFill>
@@ -6448,14 +4862,14 @@
       </p:sp>
       <p:sp>
         <p:nvSpPr>
-          <p:cNvPr id="6" name="Rounded Rectangle 5"/>
+          <p:cNvPr id="5" name="Rounded Rectangle 4"/>
           <p:cNvSpPr/>
           <p:nvPr/>
         </p:nvSpPr>
         <p:spPr>
           <a:xfrm>
-            <a:off x="4416552" y="1463040"/>
-            <a:ext cx="3337560" cy="2926080"/>
+            <a:off x="4343400" y="1920240"/>
+            <a:ext cx="3474720" cy="3108960"/>
           </a:xfrm>
           <a:prstGeom prst="roundRect">
             <a:avLst/>
@@ -6493,14 +4907,14 @@
       </p:sp>
       <p:sp>
         <p:nvSpPr>
-          <p:cNvPr id="7" name="TextBox 6"/>
+          <p:cNvPr id="6" name="TextBox 5"/>
           <p:cNvSpPr txBox="1"/>
           <p:nvPr/>
         </p:nvSpPr>
         <p:spPr>
           <a:xfrm>
-            <a:off x="4599432" y="1645920"/>
-            <a:ext cx="2971800" cy="2560320"/>
+            <a:off x="4526280" y="2057400"/>
+            <a:ext cx="3108960" cy="2743200"/>
           </a:xfrm>
           <a:prstGeom prst="rect">
             <a:avLst/>
@@ -6515,9 +4929,9 @@
           <a:p>
             <a:pPr>
               <a:spcAft>
-                <a:spcPts val="800"/>
-              </a:spcAft>
-              <a:defRPr sz="1600" b="1">
+                <a:spcPts val="600"/>
+              </a:spcAft>
+              <a:defRPr sz="1500" b="1">
                 <a:solidFill>
                   <a:srgbClr val="E27100"/>
                 </a:solidFill>
@@ -6558,14 +4972,14 @@
       </p:sp>
       <p:sp>
         <p:nvSpPr>
-          <p:cNvPr id="8" name="Rounded Rectangle 7"/>
+          <p:cNvPr id="7" name="Rounded Rectangle 6"/>
           <p:cNvSpPr/>
           <p:nvPr/>
         </p:nvSpPr>
         <p:spPr>
           <a:xfrm>
-            <a:off x="8101584" y="1463040"/>
-            <a:ext cx="3337560" cy="2926080"/>
+            <a:off x="8092440" y="1920240"/>
+            <a:ext cx="3474720" cy="3108960"/>
           </a:xfrm>
           <a:prstGeom prst="roundRect">
             <a:avLst/>
@@ -6603,14 +5017,14 @@
       </p:sp>
       <p:sp>
         <p:nvSpPr>
-          <p:cNvPr id="9" name="TextBox 8"/>
+          <p:cNvPr id="8" name="TextBox 7"/>
           <p:cNvSpPr txBox="1"/>
           <p:nvPr/>
         </p:nvSpPr>
         <p:spPr>
           <a:xfrm>
-            <a:off x="8284464" y="1645920"/>
-            <a:ext cx="2971800" cy="2560320"/>
+            <a:off x="8275319" y="2057400"/>
+            <a:ext cx="3108960" cy="2743200"/>
           </a:xfrm>
           <a:prstGeom prst="rect">
             <a:avLst/>
@@ -6625,16 +5039,16 @@
           <a:p>
             <a:pPr>
               <a:spcAft>
-                <a:spcPts val="800"/>
-              </a:spcAft>
-              <a:defRPr sz="1600" b="1">
+                <a:spcPts val="600"/>
+              </a:spcAft>
+              <a:defRPr sz="1500" b="1">
                 <a:solidFill>
                   <a:srgbClr val="1A9C8C"/>
                 </a:solidFill>
               </a:defRPr>
             </a:pPr>
             <a:r>
-              <a:t>3. Debrief (5 min)</a:t>
+              <a:t>3. Confronto e regola (5 min)</a:t>
             </a:r>
           </a:p>
           <a:p>
@@ -6649,7 +5063,7 @@
               </a:defRPr>
             </a:pPr>
             <a:r>
-              <a:t>Regola d'oro di processo</a:t>
+              <a:t>Messa a punto e regola pratica</a:t>
             </a:r>
           </a:p>
           <a:p>
@@ -6668,14 +5082,14 @@
       </p:sp>
       <p:sp>
         <p:nvSpPr>
-          <p:cNvPr id="10" name="Rounded Rectangle 9"/>
+          <p:cNvPr id="9" name="Rounded Rectangle 8"/>
           <p:cNvSpPr/>
           <p:nvPr/>
         </p:nvSpPr>
         <p:spPr>
           <a:xfrm>
-            <a:off x="731520" y="4663440"/>
-            <a:ext cx="10698480" cy="1463040"/>
+            <a:off x="594360" y="5303520"/>
+            <a:ext cx="10972800" cy="1554480"/>
           </a:xfrm>
           <a:prstGeom prst="roundRect">
             <a:avLst/>
@@ -6713,14 +5127,14 @@
       </p:sp>
       <p:sp>
         <p:nvSpPr>
-          <p:cNvPr id="11" name="TextBox 10"/>
+          <p:cNvPr id="10" name="TextBox 9"/>
           <p:cNvSpPr txBox="1"/>
           <p:nvPr/>
         </p:nvSpPr>
         <p:spPr>
           <a:xfrm>
-            <a:off x="914400" y="4754880"/>
-            <a:ext cx="10332720" cy="1280160"/>
+            <a:off x="822960" y="5394960"/>
+            <a:ext cx="10515600" cy="1371600"/>
           </a:xfrm>
           <a:prstGeom prst="rect">
             <a:avLst/>
@@ -6785,70 +5199,19 @@
       <p:grpSpPr/>
       <p:sp>
         <p:nvSpPr>
-          <p:cNvPr id="2" name="TextBox 1"/>
-          <p:cNvSpPr txBox="1"/>
-          <p:nvPr/>
-        </p:nvSpPr>
-        <p:spPr>
-          <a:xfrm>
-            <a:off x="731520" y="365760"/>
-            <a:ext cx="10698480" cy="320040"/>
-          </a:xfrm>
-          <a:prstGeom prst="rect">
-            <a:avLst/>
-          </a:prstGeom>
-          <a:noFill/>
-        </p:spPr>
-        <p:txBody>
-          <a:bodyPr wrap="square">
-            <a:spAutoFit/>
-          </a:bodyPr>
-          <a:lstStyle/>
-          <a:p>
-            <a:pPr>
-              <a:defRPr sz="1100" b="1">
-                <a:solidFill>
-                  <a:srgbClr val="1064A0"/>
-                </a:solidFill>
-                <a:latin typeface="Arial"/>
-              </a:defRPr>
-            </a:pPr>
-            <a:r>
-              <a:t>ITS MAKER · DIGITALIZZAZIONE PROCESSI</a:t>
-            </a:r>
-          </a:p>
-        </p:txBody>
-      </p:sp>
-      <p:sp>
-        <p:nvSpPr>
-          <p:cNvPr id="3" name="TextBox 2"/>
-          <p:cNvSpPr txBox="1"/>
-          <p:nvPr/>
-        </p:nvSpPr>
-        <p:spPr>
-          <a:xfrm>
-            <a:off x="731520" y="658368"/>
-            <a:ext cx="10698480" cy="685800"/>
-          </a:xfrm>
-          <a:prstGeom prst="rect">
-            <a:avLst/>
-          </a:prstGeom>
-          <a:noFill/>
-        </p:spPr>
-        <p:txBody>
-          <a:bodyPr wrap="square">
-            <a:spAutoFit/>
-          </a:bodyPr>
-          <a:lstStyle/>
-          <a:p>
-            <a:pPr>
-              <a:defRPr sz="2200" b="1">
-                <a:solidFill>
-                  <a:srgbClr val="17344D"/>
-                </a:solidFill>
-                <a:latin typeface="Arial"/>
-              </a:defRPr>
-            </a:pPr>
+          <p:cNvPr id="2" name="Title 1"/>
+          <p:cNvSpPr>
+            <a:spLocks noGrp="1"/>
+          </p:cNvSpPr>
+          <p:nvPr>
+            <p:ph type="title" idx="102"/>
+          </p:nvPr>
+        </p:nvSpPr>
+        <p:spPr/>
+        <p:txBody>
+          <a:bodyPr/>
+          <a:lstStyle/>
+          <a:p>
             <a:r>
               <a:t>Il nostro pezzo grezzo: il rapporto di fermo (DOC-FERMO)</a:t>
             </a:r>
@@ -6857,14 +5220,14 @@
       </p:sp>
       <p:sp>
         <p:nvSpPr>
-          <p:cNvPr id="4" name="Rounded Rectangle 3"/>
+          <p:cNvPr id="3" name="Rounded Rectangle 2"/>
           <p:cNvSpPr/>
           <p:nvPr/>
         </p:nvSpPr>
         <p:spPr>
           <a:xfrm>
-            <a:off x="731520" y="1463040"/>
-            <a:ext cx="4114800" cy="4754880"/>
+            <a:off x="594360" y="1920240"/>
+            <a:ext cx="4206240" cy="4937760"/>
           </a:xfrm>
           <a:prstGeom prst="roundRect">
             <a:avLst/>
@@ -6902,14 +5265,14 @@
       </p:sp>
       <p:sp>
         <p:nvSpPr>
-          <p:cNvPr id="5" name="TextBox 4"/>
+          <p:cNvPr id="4" name="TextBox 3"/>
           <p:cNvSpPr txBox="1"/>
           <p:nvPr/>
         </p:nvSpPr>
         <p:spPr>
           <a:xfrm>
-            <a:off x="914400" y="1645920"/>
-            <a:ext cx="3749039" cy="4389120"/>
+            <a:off x="777240" y="2057400"/>
+            <a:ext cx="3840480" cy="4572000"/>
           </a:xfrm>
           <a:prstGeom prst="rect">
             <a:avLst/>
@@ -7000,14 +5363,14 @@
       </p:sp>
       <p:sp>
         <p:nvSpPr>
-          <p:cNvPr id="6" name="Rounded Rectangle 5"/>
+          <p:cNvPr id="5" name="Rounded Rectangle 4"/>
           <p:cNvSpPr/>
           <p:nvPr/>
         </p:nvSpPr>
         <p:spPr>
           <a:xfrm>
-            <a:off x="5120640" y="1463040"/>
-            <a:ext cx="6309360" cy="4754880"/>
+            <a:off x="5029200" y="1920240"/>
+            <a:ext cx="6537960" cy="4937760"/>
           </a:xfrm>
           <a:prstGeom prst="roundRect">
             <a:avLst/>
@@ -7043,14 +5406,14 @@
       </p:sp>
       <p:sp>
         <p:nvSpPr>
-          <p:cNvPr id="7" name="TextBox 6"/>
+          <p:cNvPr id="6" name="TextBox 5"/>
           <p:cNvSpPr txBox="1"/>
           <p:nvPr/>
         </p:nvSpPr>
         <p:spPr>
           <a:xfrm>
-            <a:off x="5394960" y="1737360"/>
-            <a:ext cx="5760720" cy="4206240"/>
+            <a:off x="5303520" y="2148840"/>
+            <a:ext cx="5943600" cy="4389120"/>
           </a:xfrm>
           <a:prstGeom prst="rect">
             <a:avLst/>
@@ -7065,7 +5428,7 @@
           <a:p>
             <a:pPr>
               <a:spcAft>
-                <a:spcPts val="1000"/>
+                <a:spcPts val="1200"/>
               </a:spcAft>
               <a:defRPr b="1" sz="1200">
                 <a:solidFill>
@@ -7079,7 +5442,7 @@
           </a:p>
           <a:p>
             <a:pPr>
-              <a:defRPr sz="1300">
+              <a:defRPr sz="1400">
                 <a:solidFill>
                   <a:srgbClr val="FFFFFF"/>
                 </a:solidFill>
@@ -7122,70 +5485,19 @@
       <p:grpSpPr/>
       <p:sp>
         <p:nvSpPr>
-          <p:cNvPr id="2" name="TextBox 1"/>
-          <p:cNvSpPr txBox="1"/>
-          <p:nvPr/>
-        </p:nvSpPr>
-        <p:spPr>
-          <a:xfrm>
-            <a:off x="731520" y="365760"/>
-            <a:ext cx="10698480" cy="320040"/>
-          </a:xfrm>
-          <a:prstGeom prst="rect">
-            <a:avLst/>
-          </a:prstGeom>
-          <a:noFill/>
-        </p:spPr>
-        <p:txBody>
-          <a:bodyPr wrap="square">
-            <a:spAutoFit/>
-          </a:bodyPr>
-          <a:lstStyle/>
-          <a:p>
-            <a:pPr>
-              <a:defRPr sz="1100" b="1">
-                <a:solidFill>
-                  <a:srgbClr val="1064A0"/>
-                </a:solidFill>
-                <a:latin typeface="Arial"/>
-              </a:defRPr>
-            </a:pPr>
-            <a:r>
-              <a:t>ITS MAKER · DIGITALIZZAZIONE PROCESSI</a:t>
-            </a:r>
-          </a:p>
-        </p:txBody>
-      </p:sp>
-      <p:sp>
-        <p:nvSpPr>
-          <p:cNvPr id="3" name="TextBox 2"/>
-          <p:cNvSpPr txBox="1"/>
-          <p:nvPr/>
-        </p:nvSpPr>
-        <p:spPr>
-          <a:xfrm>
-            <a:off x="731520" y="658368"/>
-            <a:ext cx="10698480" cy="685800"/>
-          </a:xfrm>
-          <a:prstGeom prst="rect">
-            <a:avLst/>
-          </a:prstGeom>
-          <a:noFill/>
-        </p:spPr>
-        <p:txBody>
-          <a:bodyPr wrap="square">
-            <a:spAutoFit/>
-          </a:bodyPr>
-          <a:lstStyle/>
-          <a:p>
-            <a:pPr>
-              <a:defRPr sz="2200" b="1">
-                <a:solidFill>
-                  <a:srgbClr val="17344D"/>
-                </a:solidFill>
-                <a:latin typeface="Arial"/>
-              </a:defRPr>
-            </a:pPr>
+          <p:cNvPr id="2" name="Title 1"/>
+          <p:cNvSpPr>
+            <a:spLocks noGrp="1"/>
+          </p:cNvSpPr>
+          <p:nvPr>
+            <p:ph type="title" idx="102"/>
+          </p:nvPr>
+        </p:nvSpPr>
+        <p:spPr/>
+        <p:txBody>
+          <a:bodyPr/>
+          <a:lstStyle/>
+          <a:p>
             <a:r>
               <a:t>Sfida 1 · «Basta chiacchiere» (Il problema nei processi)</a:t>
             </a:r>
@@ -7194,14 +5506,14 @@
       </p:sp>
       <p:sp>
         <p:nvSpPr>
-          <p:cNvPr id="4" name="Rounded Rectangle 3"/>
+          <p:cNvPr id="3" name="Rounded Rectangle 2"/>
           <p:cNvSpPr/>
           <p:nvPr/>
         </p:nvSpPr>
         <p:spPr>
           <a:xfrm>
-            <a:off x="731520" y="1463040"/>
-            <a:ext cx="5120640" cy="4754880"/>
+            <a:off x="594360" y="1920240"/>
+            <a:ext cx="5303520" cy="4937760"/>
           </a:xfrm>
           <a:prstGeom prst="roundRect">
             <a:avLst/>
@@ -7239,14 +5551,14 @@
       </p:sp>
       <p:sp>
         <p:nvSpPr>
-          <p:cNvPr id="5" name="TextBox 4"/>
+          <p:cNvPr id="4" name="TextBox 3"/>
           <p:cNvSpPr txBox="1"/>
           <p:nvPr/>
         </p:nvSpPr>
         <p:spPr>
           <a:xfrm>
-            <a:off x="1005840" y="1737360"/>
-            <a:ext cx="4572000" cy="4206240"/>
+            <a:off x="822960" y="2103120"/>
+            <a:ext cx="4846320" cy="4480560"/>
           </a:xfrm>
           <a:prstGeom prst="rect">
             <a:avLst/>
@@ -7295,7 +5607,7 @@
           <a:p>
             <a:pPr>
               <a:spcAft>
-                <a:spcPts val="600"/>
+                <a:spcPts val="800"/>
               </a:spcAft>
               <a:defRPr sz="1300">
                 <a:solidFill>
@@ -7310,7 +5622,7 @@
           <a:p>
             <a:pPr>
               <a:spcAft>
-                <a:spcPts val="600"/>
+                <a:spcPts val="800"/>
               </a:spcAft>
               <a:defRPr sz="1300">
                 <a:solidFill>
@@ -7325,7 +5637,7 @@
           <a:p>
             <a:pPr>
               <a:spcAft>
-                <a:spcPts val="600"/>
+                <a:spcPts val="800"/>
               </a:spcAft>
               <a:defRPr sz="1300">
                 <a:solidFill>
@@ -7340,7 +5652,7 @@
           <a:p>
             <a:pPr>
               <a:spcAft>
-                <a:spcPts val="600"/>
+                <a:spcPts val="800"/>
               </a:spcAft>
               <a:defRPr sz="1300">
                 <a:solidFill>
@@ -7356,14 +5668,14 @@
       </p:sp>
       <p:sp>
         <p:nvSpPr>
-          <p:cNvPr id="6" name="Rounded Rectangle 5"/>
+          <p:cNvPr id="5" name="Rounded Rectangle 4"/>
           <p:cNvSpPr/>
           <p:nvPr/>
         </p:nvSpPr>
         <p:spPr>
           <a:xfrm>
-            <a:off x="6217920" y="1463040"/>
-            <a:ext cx="5212080" cy="4754880"/>
+            <a:off x="6172200" y="1920240"/>
+            <a:ext cx="5394960" cy="4937760"/>
           </a:xfrm>
           <a:prstGeom prst="roundRect">
             <a:avLst/>
@@ -7401,14 +5713,14 @@
       </p:sp>
       <p:sp>
         <p:nvSpPr>
-          <p:cNvPr id="7" name="TextBox 6"/>
+          <p:cNvPr id="6" name="TextBox 5"/>
           <p:cNvSpPr txBox="1"/>
           <p:nvPr/>
         </p:nvSpPr>
         <p:spPr>
           <a:xfrm>
-            <a:off x="6492240" y="1737360"/>
-            <a:ext cx="4663440" cy="4206240"/>
+            <a:off x="6400800" y="2103120"/>
+            <a:ext cx="4937760" cy="4480560"/>
           </a:xfrm>
           <a:prstGeom prst="rect">
             <a:avLst/>
@@ -7492,7 +5804,7 @@
               </a:defRPr>
             </a:pPr>
             <a:r>
-              <a:t>• Obiettivo industriale: estrarre solo i dati grezzi in forma tabellare.</a:t>
+              <a:t>• Obiettivo industriale: estrarre solo i dati grezzi in forma tabellare a tolleranza zero.</a:t>
             </a:r>
           </a:p>
         </p:txBody>
@@ -7517,70 +5829,19 @@
       <p:grpSpPr/>
       <p:sp>
         <p:nvSpPr>
-          <p:cNvPr id="2" name="TextBox 1"/>
-          <p:cNvSpPr txBox="1"/>
-          <p:nvPr/>
-        </p:nvSpPr>
-        <p:spPr>
-          <a:xfrm>
-            <a:off x="731520" y="365760"/>
-            <a:ext cx="10698480" cy="320040"/>
-          </a:xfrm>
-          <a:prstGeom prst="rect">
-            <a:avLst/>
-          </a:prstGeom>
-          <a:noFill/>
-        </p:spPr>
-        <p:txBody>
-          <a:bodyPr wrap="square">
-            <a:spAutoFit/>
-          </a:bodyPr>
-          <a:lstStyle/>
-          <a:p>
-            <a:pPr>
-              <a:defRPr sz="1100" b="1">
-                <a:solidFill>
-                  <a:srgbClr val="1064A0"/>
-                </a:solidFill>
-                <a:latin typeface="Arial"/>
-              </a:defRPr>
-            </a:pPr>
-            <a:r>
-              <a:t>ATTIVITÀ PRATICA 1</a:t>
-            </a:r>
-          </a:p>
-        </p:txBody>
-      </p:sp>
-      <p:sp>
-        <p:nvSpPr>
-          <p:cNvPr id="3" name="TextBox 2"/>
-          <p:cNvSpPr txBox="1"/>
-          <p:nvPr/>
-        </p:nvSpPr>
-        <p:spPr>
-          <a:xfrm>
-            <a:off x="731520" y="658368"/>
-            <a:ext cx="10698480" cy="685800"/>
-          </a:xfrm>
-          <a:prstGeom prst="rect">
-            <a:avLst/>
-          </a:prstGeom>
-          <a:noFill/>
-        </p:spPr>
-        <p:txBody>
-          <a:bodyPr wrap="square">
-            <a:spAutoFit/>
-          </a:bodyPr>
-          <a:lstStyle/>
-          <a:p>
-            <a:pPr>
-              <a:defRPr sz="2200" b="1">
-                <a:solidFill>
-                  <a:srgbClr val="17344D"/>
-                </a:solidFill>
-                <a:latin typeface="Arial"/>
-              </a:defRPr>
-            </a:pPr>
+          <p:cNvPr id="2" name="Title 1"/>
+          <p:cNvSpPr>
+            <a:spLocks noGrp="1"/>
+          </p:cNvSpPr>
+          <p:nvPr>
+            <p:ph type="title" idx="102"/>
+          </p:nvPr>
+        </p:nvSpPr>
+        <p:spPr/>
+        <p:txBody>
+          <a:bodyPr/>
+          <a:lstStyle/>
+          <a:p>
             <a:r>
               <a:t>Sfida 1 · Al lavoro a coppie (10 minuti)</a:t>
             </a:r>
@@ -7589,14 +5850,14 @@
       </p:sp>
       <p:sp>
         <p:nvSpPr>
-          <p:cNvPr id="4" name="Rounded Rectangle 3"/>
+          <p:cNvPr id="3" name="Rounded Rectangle 2"/>
           <p:cNvSpPr/>
           <p:nvPr/>
         </p:nvSpPr>
         <p:spPr>
           <a:xfrm>
-            <a:off x="731520" y="1463040"/>
-            <a:ext cx="6217920" cy="4754880"/>
+            <a:off x="594360" y="1920240"/>
+            <a:ext cx="6492240" cy="4937760"/>
           </a:xfrm>
           <a:prstGeom prst="roundRect">
             <a:avLst/>
@@ -7634,14 +5895,14 @@
       </p:sp>
       <p:sp>
         <p:nvSpPr>
-          <p:cNvPr id="5" name="TextBox 4"/>
+          <p:cNvPr id="4" name="TextBox 3"/>
           <p:cNvSpPr txBox="1"/>
           <p:nvPr/>
         </p:nvSpPr>
         <p:spPr>
           <a:xfrm>
-            <a:off x="1005840" y="1645920"/>
-            <a:ext cx="5669280" cy="4389120"/>
+            <a:off x="822960" y="2103120"/>
+            <a:ext cx="6035040" cy="4480560"/>
           </a:xfrm>
           <a:prstGeom prst="rect">
             <a:avLst/>
@@ -7723,14 +5984,14 @@
       </p:sp>
       <p:sp>
         <p:nvSpPr>
-          <p:cNvPr id="6" name="Rounded Rectangle 5"/>
+          <p:cNvPr id="5" name="Rounded Rectangle 4"/>
           <p:cNvSpPr/>
           <p:nvPr/>
         </p:nvSpPr>
         <p:spPr>
           <a:xfrm>
-            <a:off x="7315200" y="1463040"/>
-            <a:ext cx="4114800" cy="4754880"/>
+            <a:off x="7360920" y="1920240"/>
+            <a:ext cx="4206240" cy="4937760"/>
           </a:xfrm>
           <a:prstGeom prst="roundRect">
             <a:avLst/>
@@ -7768,14 +6029,14 @@
       </p:sp>
       <p:sp>
         <p:nvSpPr>
-          <p:cNvPr id="7" name="TextBox 6"/>
+          <p:cNvPr id="6" name="TextBox 5"/>
           <p:cNvSpPr txBox="1"/>
           <p:nvPr/>
         </p:nvSpPr>
         <p:spPr>
           <a:xfrm>
-            <a:off x="7589520" y="1645920"/>
-            <a:ext cx="3566160" cy="4389120"/>
+            <a:off x="7589520" y="2103120"/>
+            <a:ext cx="3749039" cy="4480560"/>
           </a:xfrm>
           <a:prstGeom prst="rect">
             <a:avLst/>
@@ -7899,86 +6160,35 @@
       <p:grpSpPr/>
       <p:sp>
         <p:nvSpPr>
-          <p:cNvPr id="2" name="TextBox 1"/>
-          <p:cNvSpPr txBox="1"/>
-          <p:nvPr/>
-        </p:nvSpPr>
-        <p:spPr>
-          <a:xfrm>
-            <a:off x="731520" y="365760"/>
-            <a:ext cx="10698480" cy="320040"/>
-          </a:xfrm>
-          <a:prstGeom prst="rect">
-            <a:avLst/>
-          </a:prstGeom>
-          <a:noFill/>
-        </p:spPr>
-        <p:txBody>
-          <a:bodyPr wrap="square">
-            <a:spAutoFit/>
-          </a:bodyPr>
-          <a:lstStyle/>
-          <a:p>
-            <a:pPr>
-              <a:defRPr sz="1100" b="1">
-                <a:solidFill>
-                  <a:srgbClr val="1064A0"/>
-                </a:solidFill>
-                <a:latin typeface="Arial"/>
-              </a:defRPr>
-            </a:pPr>
-            <a:r>
-              <a:t>ITS MAKER · DIGITALIZZAZIONE PROCESSI</a:t>
-            </a:r>
-          </a:p>
-        </p:txBody>
-      </p:sp>
-      <p:sp>
-        <p:nvSpPr>
-          <p:cNvPr id="3" name="TextBox 2"/>
-          <p:cNvSpPr txBox="1"/>
-          <p:nvPr/>
-        </p:nvSpPr>
-        <p:spPr>
-          <a:xfrm>
-            <a:off x="731520" y="658368"/>
-            <a:ext cx="10698480" cy="685800"/>
-          </a:xfrm>
-          <a:prstGeom prst="rect">
-            <a:avLst/>
-          </a:prstGeom>
-          <a:noFill/>
-        </p:spPr>
-        <p:txBody>
-          <a:bodyPr wrap="square">
-            <a:spAutoFit/>
-          </a:bodyPr>
-          <a:lstStyle/>
-          <a:p>
-            <a:pPr>
-              <a:defRPr sz="2200" b="1">
-                <a:solidFill>
-                  <a:srgbClr val="17344D"/>
-                </a:solidFill>
-                <a:latin typeface="Arial"/>
-              </a:defRPr>
-            </a:pPr>
-            <a:r>
-              <a:t>Sfida 1 · Debrief &amp; Regola 1</a:t>
-            </a:r>
-          </a:p>
-        </p:txBody>
-      </p:sp>
-      <p:sp>
-        <p:nvSpPr>
-          <p:cNvPr id="4" name="Rounded Rectangle 3"/>
+          <p:cNvPr id="2" name="Title 1"/>
+          <p:cNvSpPr>
+            <a:spLocks noGrp="1"/>
+          </p:cNvSpPr>
+          <p:nvPr>
+            <p:ph type="title" idx="102"/>
+          </p:nvPr>
+        </p:nvSpPr>
+        <p:spPr/>
+        <p:txBody>
+          <a:bodyPr/>
+          <a:lstStyle/>
+          <a:p>
+            <a:r>
+              <a:t>Sfida 1 · Cosa impariamo &amp; Regola 1</a:t>
+            </a:r>
+          </a:p>
+        </p:txBody>
+      </p:sp>
+      <p:sp>
+        <p:nvSpPr>
+          <p:cNvPr id="3" name="Rounded Rectangle 2"/>
           <p:cNvSpPr/>
           <p:nvPr/>
         </p:nvSpPr>
         <p:spPr>
           <a:xfrm>
-            <a:off x="731520" y="1463040"/>
-            <a:ext cx="5120640" cy="2926080"/>
+            <a:off x="594360" y="1920240"/>
+            <a:ext cx="5303520" cy="3108960"/>
           </a:xfrm>
           <a:prstGeom prst="roundRect">
             <a:avLst/>
@@ -8016,14 +6226,14 @@
       </p:sp>
       <p:sp>
         <p:nvSpPr>
-          <p:cNvPr id="5" name="TextBox 4"/>
+          <p:cNvPr id="4" name="TextBox 3"/>
           <p:cNvSpPr txBox="1"/>
           <p:nvPr/>
         </p:nvSpPr>
         <p:spPr>
           <a:xfrm>
-            <a:off x="914400" y="1645920"/>
-            <a:ext cx="4754880" cy="2560320"/>
+            <a:off x="822960" y="2103120"/>
+            <a:ext cx="4846320" cy="2743200"/>
           </a:xfrm>
           <a:prstGeom prst="rect">
             <a:avLst/>
@@ -8066,14 +6276,14 @@
       </p:sp>
       <p:sp>
         <p:nvSpPr>
-          <p:cNvPr id="6" name="Rounded Rectangle 5"/>
+          <p:cNvPr id="5" name="Rounded Rectangle 4"/>
           <p:cNvSpPr/>
           <p:nvPr/>
         </p:nvSpPr>
         <p:spPr>
           <a:xfrm>
-            <a:off x="6217920" y="1463040"/>
-            <a:ext cx="5212080" cy="2926080"/>
+            <a:off x="6172200" y="1920240"/>
+            <a:ext cx="5394960" cy="3108960"/>
           </a:xfrm>
           <a:prstGeom prst="roundRect">
             <a:avLst/>
@@ -8109,14 +6319,14 @@
       </p:sp>
       <p:sp>
         <p:nvSpPr>
-          <p:cNvPr id="7" name="TextBox 6"/>
+          <p:cNvPr id="6" name="TextBox 5"/>
           <p:cNvSpPr txBox="1"/>
           <p:nvPr/>
         </p:nvSpPr>
         <p:spPr>
           <a:xfrm>
-            <a:off x="6492240" y="1645920"/>
-            <a:ext cx="4663440" cy="2560320"/>
+            <a:off x="6400800" y="2103120"/>
+            <a:ext cx="4937760" cy="2743200"/>
           </a:xfrm>
           <a:prstGeom prst="rect">
             <a:avLst/>
@@ -8145,7 +6355,7 @@
           </a:p>
           <a:p>
             <a:pPr>
-              <a:defRPr sz="1200">
+              <a:defRPr sz="1300">
                 <a:solidFill>
                   <a:srgbClr val="FFFFFF"/>
                 </a:solidFill>
@@ -8164,14 +6374,14 @@
       </p:sp>
       <p:sp>
         <p:nvSpPr>
-          <p:cNvPr id="8" name="Rounded Rectangle 7"/>
+          <p:cNvPr id="7" name="Rounded Rectangle 6"/>
           <p:cNvSpPr/>
           <p:nvPr/>
         </p:nvSpPr>
         <p:spPr>
           <a:xfrm>
-            <a:off x="731520" y="4663440"/>
-            <a:ext cx="10698480" cy="1554480"/>
+            <a:off x="594360" y="5303520"/>
+            <a:ext cx="10972800" cy="1554480"/>
           </a:xfrm>
           <a:prstGeom prst="roundRect">
             <a:avLst/>
@@ -8209,14 +6419,14 @@
       </p:sp>
       <p:sp>
         <p:nvSpPr>
-          <p:cNvPr id="9" name="TextBox 8"/>
+          <p:cNvPr id="8" name="TextBox 7"/>
           <p:cNvSpPr txBox="1"/>
           <p:nvPr/>
         </p:nvSpPr>
         <p:spPr>
           <a:xfrm>
-            <a:off x="1005840" y="4846320"/>
-            <a:ext cx="10149840" cy="1188719"/>
+            <a:off x="868680" y="5440680"/>
+            <a:ext cx="10424160" cy="1280160"/>
           </a:xfrm>
           <a:prstGeom prst="rect">
             <a:avLst/>
@@ -8231,7 +6441,7 @@
           <a:p>
             <a:pPr>
               <a:spcAft>
-                <a:spcPts val="600"/>
+                <a:spcPts val="400"/>
               </a:spcAft>
               <a:defRPr sz="1300" b="1">
                 <a:solidFill>
@@ -8241,12 +6451,12 @@
               </a:defRPr>
             </a:pPr>
             <a:r>
-              <a:t>💡 REGOLA D'ORO 1:</a:t>
-            </a:r>
-          </a:p>
-          <a:p>
-            <a:pPr>
-              <a:defRPr sz="1400" b="1">
+              <a:t>💡 REGOLA PRATICA 1:</a:t>
+            </a:r>
+          </a:p>
+          <a:p>
+            <a:pPr>
+              <a:defRPr sz="1300" b="1">
                 <a:solidFill>
                   <a:srgbClr val="92400E"/>
                 </a:solidFill>
@@ -8279,70 +6489,19 @@
       <p:grpSpPr/>
       <p:sp>
         <p:nvSpPr>
-          <p:cNvPr id="2" name="TextBox 1"/>
-          <p:cNvSpPr txBox="1"/>
-          <p:nvPr/>
-        </p:nvSpPr>
-        <p:spPr>
-          <a:xfrm>
-            <a:off x="731520" y="365760"/>
-            <a:ext cx="10698480" cy="320040"/>
-          </a:xfrm>
-          <a:prstGeom prst="rect">
-            <a:avLst/>
-          </a:prstGeom>
-          <a:noFill/>
-        </p:spPr>
-        <p:txBody>
-          <a:bodyPr wrap="square">
-            <a:spAutoFit/>
-          </a:bodyPr>
-          <a:lstStyle/>
-          <a:p>
-            <a:pPr>
-              <a:defRPr sz="1100" b="1">
-                <a:solidFill>
-                  <a:srgbClr val="1064A0"/>
-                </a:solidFill>
-                <a:latin typeface="Arial"/>
-              </a:defRPr>
-            </a:pPr>
-            <a:r>
-              <a:t>ITS MAKER · DIGITALIZZAZIONE PROCESSI</a:t>
-            </a:r>
-          </a:p>
-        </p:txBody>
-      </p:sp>
-      <p:sp>
-        <p:nvSpPr>
-          <p:cNvPr id="3" name="TextBox 2"/>
-          <p:cNvSpPr txBox="1"/>
-          <p:nvPr/>
-        </p:nvSpPr>
-        <p:spPr>
-          <a:xfrm>
-            <a:off x="731520" y="658368"/>
-            <a:ext cx="10698480" cy="685800"/>
-          </a:xfrm>
-          <a:prstGeom prst="rect">
-            <a:avLst/>
-          </a:prstGeom>
-          <a:noFill/>
-        </p:spPr>
-        <p:txBody>
-          <a:bodyPr wrap="square">
-            <a:spAutoFit/>
-          </a:bodyPr>
-          <a:lstStyle/>
-          <a:p>
-            <a:pPr>
-              <a:defRPr sz="2200" b="1">
-                <a:solidFill>
-                  <a:srgbClr val="17344D"/>
-                </a:solidFill>
-                <a:latin typeface="Arial"/>
-              </a:defRPr>
-            </a:pPr>
+          <p:cNvPr id="2" name="Title 1"/>
+          <p:cNvSpPr>
+            <a:spLocks noGrp="1"/>
+          </p:cNvSpPr>
+          <p:nvPr>
+            <p:ph type="title" idx="102"/>
+          </p:nvPr>
+        </p:nvSpPr>
+        <p:spPr/>
+        <p:txBody>
+          <a:bodyPr/>
+          <a:lstStyle/>
+          <a:p>
             <a:r>
               <a:t>Sfida 2 · «Un esempio vale 1000 parole» (Il problema)</a:t>
             </a:r>
@@ -8351,14 +6510,14 @@
       </p:sp>
       <p:sp>
         <p:nvSpPr>
-          <p:cNvPr id="4" name="Rounded Rectangle 3"/>
+          <p:cNvPr id="3" name="Rounded Rectangle 2"/>
           <p:cNvSpPr/>
           <p:nvPr/>
         </p:nvSpPr>
         <p:spPr>
           <a:xfrm>
-            <a:off x="731520" y="1463040"/>
-            <a:ext cx="10698480" cy="4754880"/>
+            <a:off x="594360" y="1920240"/>
+            <a:ext cx="10972800" cy="4937760"/>
           </a:xfrm>
           <a:prstGeom prst="roundRect">
             <a:avLst/>
@@ -8396,14 +6555,14 @@
       </p:sp>
       <p:sp>
         <p:nvSpPr>
-          <p:cNvPr id="5" name="TextBox 4"/>
+          <p:cNvPr id="4" name="TextBox 3"/>
           <p:cNvSpPr txBox="1"/>
           <p:nvPr/>
         </p:nvSpPr>
         <p:spPr>
           <a:xfrm>
-            <a:off x="1005840" y="1737360"/>
-            <a:ext cx="10149840" cy="4206240"/>
+            <a:off x="868680" y="2103120"/>
+            <a:ext cx="10424160" cy="4480560"/>
           </a:xfrm>
           <a:prstGeom prst="rect">
             <a:avLst/>
@@ -8531,70 +6690,19 @@
       <p:grpSpPr/>
       <p:sp>
         <p:nvSpPr>
-          <p:cNvPr id="2" name="TextBox 1"/>
-          <p:cNvSpPr txBox="1"/>
-          <p:nvPr/>
-        </p:nvSpPr>
-        <p:spPr>
-          <a:xfrm>
-            <a:off x="731520" y="365760"/>
-            <a:ext cx="10698480" cy="320040"/>
-          </a:xfrm>
-          <a:prstGeom prst="rect">
-            <a:avLst/>
-          </a:prstGeom>
-          <a:noFill/>
-        </p:spPr>
-        <p:txBody>
-          <a:bodyPr wrap="square">
-            <a:spAutoFit/>
-          </a:bodyPr>
-          <a:lstStyle/>
-          <a:p>
-            <a:pPr>
-              <a:defRPr sz="1100" b="1">
-                <a:solidFill>
-                  <a:srgbClr val="1064A0"/>
-                </a:solidFill>
-                <a:latin typeface="Arial"/>
-              </a:defRPr>
-            </a:pPr>
-            <a:r>
-              <a:t>ATTIVITÀ PRATICA 2</a:t>
-            </a:r>
-          </a:p>
-        </p:txBody>
-      </p:sp>
-      <p:sp>
-        <p:nvSpPr>
-          <p:cNvPr id="3" name="TextBox 2"/>
-          <p:cNvSpPr txBox="1"/>
-          <p:nvPr/>
-        </p:nvSpPr>
-        <p:spPr>
-          <a:xfrm>
-            <a:off x="731520" y="658368"/>
-            <a:ext cx="10698480" cy="685800"/>
-          </a:xfrm>
-          <a:prstGeom prst="rect">
-            <a:avLst/>
-          </a:prstGeom>
-          <a:noFill/>
-        </p:spPr>
-        <p:txBody>
-          <a:bodyPr wrap="square">
-            <a:spAutoFit/>
-          </a:bodyPr>
-          <a:lstStyle/>
-          <a:p>
-            <a:pPr>
-              <a:defRPr sz="2200" b="1">
-                <a:solidFill>
-                  <a:srgbClr val="17344D"/>
-                </a:solidFill>
-                <a:latin typeface="Arial"/>
-              </a:defRPr>
-            </a:pPr>
+          <p:cNvPr id="2" name="Title 1"/>
+          <p:cNvSpPr>
+            <a:spLocks noGrp="1"/>
+          </p:cNvSpPr>
+          <p:nvPr>
+            <p:ph type="title" idx="102"/>
+          </p:nvPr>
+        </p:nvSpPr>
+        <p:spPr/>
+        <p:txBody>
+          <a:bodyPr/>
+          <a:lstStyle/>
+          <a:p>
             <a:r>
               <a:t>Sfida 2 · Al lavoro a coppie (10 minuti)</a:t>
             </a:r>
@@ -8603,14 +6711,14 @@
       </p:sp>
       <p:sp>
         <p:nvSpPr>
-          <p:cNvPr id="4" name="Rounded Rectangle 3"/>
+          <p:cNvPr id="3" name="Rounded Rectangle 2"/>
           <p:cNvSpPr/>
           <p:nvPr/>
         </p:nvSpPr>
         <p:spPr>
           <a:xfrm>
-            <a:off x="731520" y="1463040"/>
-            <a:ext cx="6217920" cy="4754880"/>
+            <a:off x="594360" y="1920240"/>
+            <a:ext cx="6492240" cy="4937760"/>
           </a:xfrm>
           <a:prstGeom prst="roundRect">
             <a:avLst/>
@@ -8648,14 +6756,14 @@
       </p:sp>
       <p:sp>
         <p:nvSpPr>
-          <p:cNvPr id="5" name="TextBox 4"/>
+          <p:cNvPr id="4" name="TextBox 3"/>
           <p:cNvSpPr txBox="1"/>
           <p:nvPr/>
         </p:nvSpPr>
         <p:spPr>
           <a:xfrm>
-            <a:off x="1005840" y="1645920"/>
-            <a:ext cx="5669280" cy="4389120"/>
+            <a:off x="822960" y="2103120"/>
+            <a:ext cx="6035040" cy="4480560"/>
           </a:xfrm>
           <a:prstGeom prst="rect">
             <a:avLst/>
@@ -8724,14 +6832,14 @@
       </p:sp>
       <p:sp>
         <p:nvSpPr>
-          <p:cNvPr id="6" name="Rounded Rectangle 5"/>
+          <p:cNvPr id="5" name="Rounded Rectangle 4"/>
           <p:cNvSpPr/>
           <p:nvPr/>
         </p:nvSpPr>
         <p:spPr>
           <a:xfrm>
-            <a:off x="7315200" y="1463040"/>
-            <a:ext cx="4114800" cy="4754880"/>
+            <a:off x="7360920" y="1920240"/>
+            <a:ext cx="4206240" cy="4937760"/>
           </a:xfrm>
           <a:prstGeom prst="roundRect">
             <a:avLst/>
@@ -8769,14 +6877,14 @@
       </p:sp>
       <p:sp>
         <p:nvSpPr>
-          <p:cNvPr id="7" name="TextBox 6"/>
+          <p:cNvPr id="6" name="TextBox 5"/>
           <p:cNvSpPr txBox="1"/>
           <p:nvPr/>
         </p:nvSpPr>
         <p:spPr>
           <a:xfrm>
-            <a:off x="7589520" y="1645920"/>
-            <a:ext cx="3566160" cy="4389120"/>
+            <a:off x="7589520" y="2103120"/>
+            <a:ext cx="3749039" cy="4480560"/>
           </a:xfrm>
           <a:prstGeom prst="rect">
             <a:avLst/>
@@ -8900,86 +7008,35 @@
       <p:grpSpPr/>
       <p:sp>
         <p:nvSpPr>
-          <p:cNvPr id="2" name="TextBox 1"/>
-          <p:cNvSpPr txBox="1"/>
-          <p:nvPr/>
-        </p:nvSpPr>
-        <p:spPr>
-          <a:xfrm>
-            <a:off x="731520" y="365760"/>
-            <a:ext cx="10698480" cy="320040"/>
-          </a:xfrm>
-          <a:prstGeom prst="rect">
-            <a:avLst/>
-          </a:prstGeom>
-          <a:noFill/>
-        </p:spPr>
-        <p:txBody>
-          <a:bodyPr wrap="square">
-            <a:spAutoFit/>
-          </a:bodyPr>
-          <a:lstStyle/>
-          <a:p>
-            <a:pPr>
-              <a:defRPr sz="1100" b="1">
-                <a:solidFill>
-                  <a:srgbClr val="1064A0"/>
-                </a:solidFill>
-                <a:latin typeface="Arial"/>
-              </a:defRPr>
-            </a:pPr>
-            <a:r>
-              <a:t>ITS MAKER · DIGITALIZZAZIONE PROCESSI</a:t>
-            </a:r>
-          </a:p>
-        </p:txBody>
-      </p:sp>
-      <p:sp>
-        <p:nvSpPr>
-          <p:cNvPr id="3" name="TextBox 2"/>
-          <p:cNvSpPr txBox="1"/>
-          <p:nvPr/>
-        </p:nvSpPr>
-        <p:spPr>
-          <a:xfrm>
-            <a:off x="731520" y="658368"/>
-            <a:ext cx="10698480" cy="685800"/>
-          </a:xfrm>
-          <a:prstGeom prst="rect">
-            <a:avLst/>
-          </a:prstGeom>
-          <a:noFill/>
-        </p:spPr>
-        <p:txBody>
-          <a:bodyPr wrap="square">
-            <a:spAutoFit/>
-          </a:bodyPr>
-          <a:lstStyle/>
-          <a:p>
-            <a:pPr>
-              <a:defRPr sz="2200" b="1">
-                <a:solidFill>
-                  <a:srgbClr val="17344D"/>
-                </a:solidFill>
-                <a:latin typeface="Arial"/>
-              </a:defRPr>
-            </a:pPr>
-            <a:r>
-              <a:t>Sfida 2 · Debrief &amp; Regola 2</a:t>
-            </a:r>
-          </a:p>
-        </p:txBody>
-      </p:sp>
-      <p:sp>
-        <p:nvSpPr>
-          <p:cNvPr id="4" name="Rounded Rectangle 3"/>
+          <p:cNvPr id="2" name="Title 1"/>
+          <p:cNvSpPr>
+            <a:spLocks noGrp="1"/>
+          </p:cNvSpPr>
+          <p:nvPr>
+            <p:ph type="title" idx="102"/>
+          </p:nvPr>
+        </p:nvSpPr>
+        <p:spPr/>
+        <p:txBody>
+          <a:bodyPr/>
+          <a:lstStyle/>
+          <a:p>
+            <a:r>
+              <a:t>Sfida 2 · Cosa impariamo &amp; Regola 2</a:t>
+            </a:r>
+          </a:p>
+        </p:txBody>
+      </p:sp>
+      <p:sp>
+        <p:nvSpPr>
+          <p:cNvPr id="3" name="Rounded Rectangle 2"/>
           <p:cNvSpPr/>
           <p:nvPr/>
         </p:nvSpPr>
         <p:spPr>
           <a:xfrm>
-            <a:off x="731520" y="1463040"/>
-            <a:ext cx="10698480" cy="2926080"/>
+            <a:off x="594360" y="1920240"/>
+            <a:ext cx="10972800" cy="3108960"/>
           </a:xfrm>
           <a:prstGeom prst="roundRect">
             <a:avLst/>
@@ -9017,14 +7074,14 @@
       </p:sp>
       <p:sp>
         <p:nvSpPr>
-          <p:cNvPr id="5" name="TextBox 4"/>
+          <p:cNvPr id="4" name="TextBox 3"/>
           <p:cNvSpPr txBox="1"/>
           <p:nvPr/>
         </p:nvSpPr>
         <p:spPr>
           <a:xfrm>
-            <a:off x="1005840" y="1645920"/>
-            <a:ext cx="10149840" cy="2560320"/>
+            <a:off x="868680" y="2103120"/>
+            <a:ext cx="10424160" cy="2743200"/>
           </a:xfrm>
           <a:prstGeom prst="rect">
             <a:avLst/>
@@ -9072,7 +7129,7 @@
           </a:p>
           <a:p>
             <a:pPr>
-              <a:defRPr sz="1200" b="1">
+              <a:defRPr sz="1300" b="1">
                 <a:solidFill>
                   <a:srgbClr val="1064A0"/>
                 </a:solidFill>
@@ -9087,14 +7144,14 @@
       </p:sp>
       <p:sp>
         <p:nvSpPr>
-          <p:cNvPr id="6" name="Rounded Rectangle 5"/>
+          <p:cNvPr id="5" name="Rounded Rectangle 4"/>
           <p:cNvSpPr/>
           <p:nvPr/>
         </p:nvSpPr>
         <p:spPr>
           <a:xfrm>
-            <a:off x="731520" y="4663440"/>
-            <a:ext cx="10698480" cy="1554480"/>
+            <a:off x="594360" y="5303520"/>
+            <a:ext cx="10972800" cy="1554480"/>
           </a:xfrm>
           <a:prstGeom prst="roundRect">
             <a:avLst/>
@@ -9132,14 +7189,14 @@
       </p:sp>
       <p:sp>
         <p:nvSpPr>
-          <p:cNvPr id="7" name="TextBox 6"/>
+          <p:cNvPr id="6" name="TextBox 5"/>
           <p:cNvSpPr txBox="1"/>
           <p:nvPr/>
         </p:nvSpPr>
         <p:spPr>
           <a:xfrm>
-            <a:off x="1005840" y="4846320"/>
-            <a:ext cx="10149840" cy="1188719"/>
+            <a:off x="868680" y="5440680"/>
+            <a:ext cx="10424160" cy="1280160"/>
           </a:xfrm>
           <a:prstGeom prst="rect">
             <a:avLst/>
@@ -9154,7 +7211,7 @@
           <a:p>
             <a:pPr>
               <a:spcAft>
-                <a:spcPts val="600"/>
+                <a:spcPts val="400"/>
               </a:spcAft>
               <a:defRPr sz="1300" b="1">
                 <a:solidFill>
@@ -9164,12 +7221,12 @@
               </a:defRPr>
             </a:pPr>
             <a:r>
-              <a:t>💡 REGOLA D'ORO 2:</a:t>
-            </a:r>
-          </a:p>
-          <a:p>
-            <a:pPr>
-              <a:defRPr sz="1400" b="1">
+              <a:t>💡 REGOLA PRATICA 2:</a:t>
+            </a:r>
+          </a:p>
+          <a:p>
+            <a:pPr>
+              <a:defRPr sz="1300" b="1">
                 <a:solidFill>
                   <a:srgbClr val="92400E"/>
                 </a:solidFill>
@@ -9191,54 +7248,54 @@
 </file>
 
 <file path=ppt/theme/theme1.xml><?xml version="1.0" encoding="utf-8"?>
-<a:theme xmlns:a="http://schemas.openxmlformats.org/drawingml/2006/main" name="Office Theme">
+<a:theme xmlns:a="http://schemas.openxmlformats.org/drawingml/2006/main" name="ITS MAKER">
   <a:themeElements>
-    <a:clrScheme name="Office">
+    <a:clrScheme name="ITS MAKER">
       <a:dk1>
-        <a:sysClr val="windowText" lastClr="000000"/>
+        <a:srgbClr val="17344D"/>
       </a:dk1>
       <a:lt1>
-        <a:sysClr val="window" lastClr="FFFFFF"/>
+        <a:srgbClr val="FFFFFF"/>
       </a:lt1>
       <a:dk2>
-        <a:srgbClr val="1F497D"/>
+        <a:srgbClr val="4B6275"/>
       </a:dk2>
       <a:lt2>
-        <a:srgbClr val="EEECE1"/>
+        <a:srgbClr val="EAF0F6"/>
       </a:lt2>
       <a:accent1>
-        <a:srgbClr val="4F81BD"/>
+        <a:srgbClr val="1064A0"/>
       </a:accent1>
       <a:accent2>
-        <a:srgbClr val="C0504D"/>
+        <a:srgbClr val="1A9C8C"/>
       </a:accent2>
       <a:accent3>
-        <a:srgbClr val="9BBB59"/>
+        <a:srgbClr val="E27100"/>
       </a:accent3>
       <a:accent4>
-        <a:srgbClr val="8064A2"/>
+        <a:srgbClr val="F2B33D"/>
       </a:accent4>
       <a:accent5>
-        <a:srgbClr val="4BACC6"/>
+        <a:srgbClr val="5E7488"/>
       </a:accent5>
       <a:accent6>
-        <a:srgbClr val="F79646"/>
+        <a:srgbClr val="6E9BD1"/>
       </a:accent6>
       <a:hlink>
-        <a:srgbClr val="0000FF"/>
+        <a:srgbClr val="1064A0"/>
       </a:hlink>
       <a:folHlink>
-        <a:srgbClr val="800080"/>
+        <a:srgbClr val="5E7488"/>
       </a:folHlink>
     </a:clrScheme>
-    <a:fontScheme name="Office">
+    <a:fontScheme name="ITS MAKER">
       <a:majorFont>
-        <a:latin typeface="Calibri"/>
+        <a:latin typeface="Arial"/>
         <a:ea typeface=""/>
         <a:cs typeface=""/>
-        <a:font script="Jpan" typeface="ＭＳ Ｐゴシック"/>
+        <a:font script="Jpan" typeface="游ゴシック Light"/>
         <a:font script="Hang" typeface="맑은 고딕"/>
-        <a:font script="Hans" typeface="宋体"/>
+        <a:font script="Hans" typeface="等线 Light"/>
         <a:font script="Hant" typeface="新細明體"/>
         <a:font script="Arab" typeface="Times New Roman"/>
         <a:font script="Hebr" typeface="Times New Roman"/>
@@ -9266,14 +7323,31 @@
         <a:font script="Viet" typeface="Times New Roman"/>
         <a:font script="Uigh" typeface="Microsoft Uighur"/>
         <a:font script="Geor" typeface="Sylfaen"/>
+        <a:font script="Armn" typeface="Arial"/>
+        <a:font script="Bugi" typeface="Leelawadee UI"/>
+        <a:font script="Bopo" typeface="Microsoft JhengHei"/>
+        <a:font script="Java" typeface="Javanese Text"/>
+        <a:font script="Lisu" typeface="Segoe UI"/>
+        <a:font script="Mymr" typeface="Myanmar Text"/>
+        <a:font script="Nkoo" typeface="Ebrima"/>
+        <a:font script="Olck" typeface="Nirmala UI"/>
+        <a:font script="Osma" typeface="Ebrima"/>
+        <a:font script="Phag" typeface="Phagspa"/>
+        <a:font script="Syrn" typeface="Estrangelo Edessa"/>
+        <a:font script="Syrj" typeface="Estrangelo Edessa"/>
+        <a:font script="Syre" typeface="Estrangelo Edessa"/>
+        <a:font script="Sora" typeface="Nirmala UI"/>
+        <a:font script="Tale" typeface="Microsoft Tai Le"/>
+        <a:font script="Talu" typeface="Microsoft New Tai Lue"/>
+        <a:font script="Tfng" typeface="Ebrima"/>
       </a:majorFont>
       <a:minorFont>
-        <a:latin typeface="Calibri"/>
+        <a:latin typeface="Arial"/>
         <a:ea typeface=""/>
         <a:cs typeface=""/>
-        <a:font script="Jpan" typeface="ＭＳ Ｐゴシック"/>
+        <a:font script="Jpan" typeface="游ゴシック"/>
         <a:font script="Hang" typeface="맑은 고딕"/>
-        <a:font script="Hans" typeface="宋体"/>
+        <a:font script="Hans" typeface="等线"/>
         <a:font script="Hant" typeface="新細明體"/>
         <a:font script="Arab" typeface="Arial"/>
         <a:font script="Hebr" typeface="Arial"/>
@@ -9301,6 +7375,23 @@
         <a:font script="Viet" typeface="Arial"/>
         <a:font script="Uigh" typeface="Microsoft Uighur"/>
         <a:font script="Geor" typeface="Sylfaen"/>
+        <a:font script="Armn" typeface="Arial"/>
+        <a:font script="Bugi" typeface="Leelawadee UI"/>
+        <a:font script="Bopo" typeface="Microsoft JhengHei"/>
+        <a:font script="Java" typeface="Javanese Text"/>
+        <a:font script="Lisu" typeface="Segoe UI"/>
+        <a:font script="Mymr" typeface="Myanmar Text"/>
+        <a:font script="Nkoo" typeface="Ebrima"/>
+        <a:font script="Olck" typeface="Nirmala UI"/>
+        <a:font script="Osma" typeface="Ebrima"/>
+        <a:font script="Phag" typeface="Phagspa"/>
+        <a:font script="Syrn" typeface="Estrangelo Edessa"/>
+        <a:font script="Syrj" typeface="Estrangelo Edessa"/>
+        <a:font script="Syre" typeface="Estrangelo Edessa"/>
+        <a:font script="Sora" typeface="Nirmala UI"/>
+        <a:font script="Tale" typeface="Microsoft Tai Le"/>
+        <a:font script="Talu" typeface="Microsoft New Tai Lue"/>
+        <a:font script="Tfng" typeface="Ebrima"/>
       </a:minorFont>
     </a:fontScheme>
     <a:fmtScheme name="Office">
@@ -9312,109 +7403,294 @@
           <a:gsLst>
             <a:gs pos="0">
               <a:schemeClr val="phClr">
-                <a:tint val="50000"/>
-                <a:satMod val="300000"/>
+                <a:lumMod val="110000"/>
+                <a:satMod val="105000"/>
+                <a:tint val="67000"/>
               </a:schemeClr>
             </a:gs>
-            <a:gs pos="35000">
+            <a:gs pos="50000">
               <a:schemeClr val="phClr">
-                <a:tint val="37000"/>
-                <a:satMod val="300000"/>
+                <a:lumMod val="105000"/>
+                <a:satMod val="103000"/>
+                <a:tint val="73000"/>
               </a:schemeClr>
             </a:gs>
             <a:gs pos="100000">
               <a:schemeClr val="phClr">
-                <a:tint val="15000"/>
-                <a:satMod val="350000"/>
+                <a:lumMod val="105000"/>
+                <a:satMod val="109000"/>
+                <a:tint val="81000"/>
               </a:schemeClr>
             </a:gs>
           </a:gsLst>
-          <a:lin ang="16200000" scaled="1"/>
+          <a:lin ang="5400000" scaled="0"/>
         </a:gradFill>
         <a:gradFill rotWithShape="1">
           <a:gsLst>
             <a:gs pos="0">
               <a:schemeClr val="phClr">
-                <a:tint val="100000"/>
+                <a:satMod val="103000"/>
+                <a:lumMod val="102000"/>
+                <a:tint val="94000"/>
+              </a:schemeClr>
+            </a:gs>
+            <a:gs pos="50000">
+              <a:schemeClr val="phClr">
+                <a:satMod val="110000"/>
+                <a:lumMod val="100000"/>
                 <a:shade val="100000"/>
-                <a:satMod val="130000"/>
               </a:schemeClr>
             </a:gs>
             <a:gs pos="100000">
               <a:schemeClr val="phClr">
-                <a:tint val="50000"/>
-                <a:shade val="100000"/>
-                <a:satMod val="350000"/>
+                <a:lumMod val="99000"/>
+                <a:satMod val="120000"/>
+                <a:shade val="78000"/>
               </a:schemeClr>
             </a:gs>
           </a:gsLst>
-          <a:lin ang="16200000" scaled="0"/>
+          <a:lin ang="5400000" scaled="0"/>
         </a:gradFill>
       </a:fillStyleLst>
       <a:lnStyleLst>
-        <a:ln w="9525" cap="flat" cmpd="sng" algn="ctr">
-          <a:solidFill>
-            <a:schemeClr val="phClr">
-              <a:shade val="95000"/>
-              <a:satMod val="105000"/>
-            </a:schemeClr>
-          </a:solidFill>
-          <a:prstDash val="solid"/>
-        </a:ln>
-        <a:ln w="25400" cap="flat" cmpd="sng" algn="ctr">
+        <a:ln w="6350" cap="flat" cmpd="sng" algn="ctr">
           <a:solidFill>
             <a:schemeClr val="phClr"/>
           </a:solidFill>
           <a:prstDash val="solid"/>
+          <a:miter lim="800000"/>
         </a:ln>
-        <a:ln w="38100" cap="flat" cmpd="sng" algn="ctr">
+        <a:ln w="12700" cap="flat" cmpd="sng" algn="ctr">
           <a:solidFill>
             <a:schemeClr val="phClr"/>
           </a:solidFill>
           <a:prstDash val="solid"/>
+          <a:miter lim="800000"/>
+        </a:ln>
+        <a:ln w="19050" cap="flat" cmpd="sng" algn="ctr">
+          <a:solidFill>
+            <a:schemeClr val="phClr"/>
+          </a:solidFill>
+          <a:prstDash val="solid"/>
+          <a:miter lim="800000"/>
         </a:ln>
       </a:lnStyleLst>
       <a:effectStyleLst>
         <a:effectStyle>
+          <a:effectLst/>
+        </a:effectStyle>
+        <a:effectStyle>
+          <a:effectLst/>
+        </a:effectStyle>
+        <a:effectStyle>
           <a:effectLst>
-            <a:outerShdw blurRad="40000" dist="20000" dir="5400000" rotWithShape="0">
+            <a:outerShdw blurRad="57150" dist="19050" dir="5400000" algn="ctr" rotWithShape="0">
               <a:srgbClr val="000000">
-                <a:alpha val="38000"/>
+                <a:alpha val="63000"/>
               </a:srgbClr>
             </a:outerShdw>
           </a:effectLst>
         </a:effectStyle>
-        <a:effectStyle>
-          <a:effectLst>
-            <a:outerShdw blurRad="40000" dist="23000" dir="5400000" rotWithShape="0">
-              <a:srgbClr val="000000">
-                <a:alpha val="35000"/>
-              </a:srgbClr>
-            </a:outerShdw>
-          </a:effectLst>
-        </a:effectStyle>
-        <a:effectStyle>
-          <a:effectLst>
-            <a:outerShdw blurRad="40000" dist="23000" dir="5400000" rotWithShape="0">
-              <a:srgbClr val="000000">
-                <a:alpha val="35000"/>
-              </a:srgbClr>
-            </a:outerShdw>
-          </a:effectLst>
-          <a:scene3d>
-            <a:camera prst="orthographicFront">
-              <a:rot lat="0" lon="0" rev="0"/>
-            </a:camera>
-            <a:lightRig rig="threePt" dir="t">
-              <a:rot lat="0" lon="0" rev="1200000"/>
-            </a:lightRig>
-          </a:scene3d>
-          <a:sp3d>
-            <a:bevelT w="63500" h="25400"/>
-          </a:sp3d>
-        </a:effectStyle>
       </a:effectStyleLst>
       <a:bgFillStyleLst>
+        <a:solidFill>
+          <a:schemeClr val="phClr"/>
+        </a:solidFill>
+        <a:solidFill>
+          <a:schemeClr val="phClr">
+            <a:tint val="95000"/>
+            <a:satMod val="170000"/>
+          </a:schemeClr>
+        </a:solidFill>
+        <a:gradFill rotWithShape="1">
+          <a:gsLst>
+            <a:gs pos="0">
+              <a:schemeClr val="phClr">
+                <a:tint val="93000"/>
+                <a:satMod val="150000"/>
+                <a:shade val="98000"/>
+                <a:lumMod val="102000"/>
+              </a:schemeClr>
+            </a:gs>
+            <a:gs pos="50000">
+              <a:schemeClr val="phClr">
+                <a:tint val="98000"/>
+                <a:satMod val="130000"/>
+                <a:shade val="90000"/>
+                <a:lumMod val="103000"/>
+              </a:schemeClr>
+            </a:gs>
+            <a:gs pos="100000">
+              <a:schemeClr val="phClr">
+                <a:shade val="63000"/>
+                <a:satMod val="120000"/>
+              </a:schemeClr>
+            </a:gs>
+          </a:gsLst>
+          <a:lin ang="5400000" scaled="0"/>
+        </a:gradFill>
+      </a:bgFillStyleLst>
+    </a:fmtScheme>
+  </a:themeElements>
+  <a:objectDefaults/>
+  <a:extraClrSchemeLst/>
+  <a:extLst>
+    <a:ext uri="{05A4C25C-085E-4340-85A3-A5531E510DB2}">
+      <thm15:themeFamily xmlns:thm15="http://schemas.microsoft.com/office/thememl/2012/main" name="Office Theme" id="{62F939B6-93AF-4DB8-9C6B-D6C7DFDC589F}" vid="{4A3C46E8-61CC-4603-A589-7422A47A8E4A}"/>
+    </a:ext>
+  </a:extLst>
+</a:theme>
+</file>
+
+<file path=ppt/theme/theme2.xml><?xml version="1.0" encoding="utf-8"?>
+<a:theme xmlns:a="http://schemas.openxmlformats.org/drawingml/2006/main" name="Tema di Office">
+  <a:themeElements>
+    <a:clrScheme name="Office">
+      <a:dk1>
+        <a:sysClr val="windowText" lastClr="000000"/>
+      </a:dk1>
+      <a:lt1>
+        <a:sysClr val="window" lastClr="FFFFFF"/>
+      </a:lt1>
+      <a:dk2>
+        <a:srgbClr val="0E2841"/>
+      </a:dk2>
+      <a:lt2>
+        <a:srgbClr val="E8E8E8"/>
+      </a:lt2>
+      <a:accent1>
+        <a:srgbClr val="156082"/>
+      </a:accent1>
+      <a:accent2>
+        <a:srgbClr val="E97132"/>
+      </a:accent2>
+      <a:accent3>
+        <a:srgbClr val="196B24"/>
+      </a:accent3>
+      <a:accent4>
+        <a:srgbClr val="0F9ED5"/>
+      </a:accent4>
+      <a:accent5>
+        <a:srgbClr val="A02B93"/>
+      </a:accent5>
+      <a:accent6>
+        <a:srgbClr val="4EA72E"/>
+      </a:accent6>
+      <a:hlink>
+        <a:srgbClr val="467886"/>
+      </a:hlink>
+      <a:folHlink>
+        <a:srgbClr val="96607D"/>
+      </a:folHlink>
+    </a:clrScheme>
+    <a:fontScheme name="Office">
+      <a:majorFont>
+        <a:latin typeface="Aptos Display" panose="02110004020202020204"/>
+        <a:ea typeface=""/>
+        <a:cs typeface=""/>
+        <a:font script="Jpan" typeface="游ゴシック Light"/>
+        <a:font script="Hang" typeface="맑은 고딕"/>
+        <a:font script="Hans" typeface="等线 Light"/>
+        <a:font script="Hant" typeface="新細明體"/>
+        <a:font script="Arab" typeface="Times New Roman"/>
+        <a:font script="Hebr" typeface="Times New Roman"/>
+        <a:font script="Thai" typeface="Angsana New"/>
+        <a:font script="Ethi" typeface="Nyala"/>
+        <a:font script="Beng" typeface="Vrinda"/>
+        <a:font script="Gujr" typeface="Shruti"/>
+        <a:font script="Khmr" typeface="MoolBoran"/>
+        <a:font script="Knda" typeface="Tunga"/>
+        <a:font script="Guru" typeface="Raavi"/>
+        <a:font script="Cans" typeface="Euphemia"/>
+        <a:font script="Cher" typeface="Plantagenet Cherokee"/>
+        <a:font script="Yiii" typeface="Microsoft Yi Baiti"/>
+        <a:font script="Tibt" typeface="Microsoft Himalaya"/>
+        <a:font script="Thaa" typeface="MV Boli"/>
+        <a:font script="Deva" typeface="Mangal"/>
+        <a:font script="Telu" typeface="Gautami"/>
+        <a:font script="Taml" typeface="Latha"/>
+        <a:font script="Syrc" typeface="Estrangelo Edessa"/>
+        <a:font script="Orya" typeface="Kalinga"/>
+        <a:font script="Mlym" typeface="Kartika"/>
+        <a:font script="Laoo" typeface="DokChampa"/>
+        <a:font script="Sinh" typeface="Iskoola Pota"/>
+        <a:font script="Mong" typeface="Mongolian Baiti"/>
+        <a:font script="Viet" typeface="Times New Roman"/>
+        <a:font script="Uigh" typeface="Microsoft Uighur"/>
+        <a:font script="Geor" typeface="Sylfaen"/>
+        <a:font script="Armn" typeface="Arial"/>
+        <a:font script="Bugi" typeface="Leelawadee UI"/>
+        <a:font script="Bopo" typeface="Microsoft JhengHei"/>
+        <a:font script="Java" typeface="Javanese Text"/>
+        <a:font script="Lisu" typeface="Segoe UI"/>
+        <a:font script="Mymr" typeface="Myanmar Text"/>
+        <a:font script="Nkoo" typeface="Ebrima"/>
+        <a:font script="Olck" typeface="Nirmala UI"/>
+        <a:font script="Osma" typeface="Ebrima"/>
+        <a:font script="Phag" typeface="Phagspa"/>
+        <a:font script="Syrn" typeface="Estrangelo Edessa"/>
+        <a:font script="Syrj" typeface="Estrangelo Edessa"/>
+        <a:font script="Syre" typeface="Estrangelo Edessa"/>
+        <a:font script="Sora" typeface="Nirmala UI"/>
+        <a:font script="Tale" typeface="Microsoft Tai Le"/>
+        <a:font script="Talu" typeface="Microsoft New Tai Lue"/>
+        <a:font script="Tfng" typeface="Ebrima"/>
+      </a:majorFont>
+      <a:minorFont>
+        <a:latin typeface="Aptos" panose="02110004020202020204"/>
+        <a:ea typeface=""/>
+        <a:cs typeface=""/>
+        <a:font script="Jpan" typeface="游ゴシック"/>
+        <a:font script="Hang" typeface="맑은 고딕"/>
+        <a:font script="Hans" typeface="等线"/>
+        <a:font script="Hant" typeface="新細明體"/>
+        <a:font script="Arab" typeface="Arial"/>
+        <a:font script="Hebr" typeface="Arial"/>
+        <a:font script="Thai" typeface="Cordia New"/>
+        <a:font script="Ethi" typeface="Nyala"/>
+        <a:font script="Beng" typeface="Vrinda"/>
+        <a:font script="Gujr" typeface="Shruti"/>
+        <a:font script="Khmr" typeface="DaunPenh"/>
+        <a:font script="Knda" typeface="Tunga"/>
+        <a:font script="Guru" typeface="Raavi"/>
+        <a:font script="Cans" typeface="Euphemia"/>
+        <a:font script="Cher" typeface="Plantagenet Cherokee"/>
+        <a:font script="Yiii" typeface="Microsoft Yi Baiti"/>
+        <a:font script="Tibt" typeface="Microsoft Himalaya"/>
+        <a:font script="Thaa" typeface="MV Boli"/>
+        <a:font script="Deva" typeface="Mangal"/>
+        <a:font script="Telu" typeface="Gautami"/>
+        <a:font script="Taml" typeface="Latha"/>
+        <a:font script="Syrc" typeface="Estrangelo Edessa"/>
+        <a:font script="Orya" typeface="Kalinga"/>
+        <a:font script="Mlym" typeface="Kartika"/>
+        <a:font script="Laoo" typeface="DokChampa"/>
+        <a:font script="Sinh" typeface="Iskoola Pota"/>
+        <a:font script="Mong" typeface="Mongolian Baiti"/>
+        <a:font script="Viet" typeface="Arial"/>
+        <a:font script="Uigh" typeface="Microsoft Uighur"/>
+        <a:font script="Geor" typeface="Sylfaen"/>
+        <a:font script="Armn" typeface="Arial"/>
+        <a:font script="Bugi" typeface="Leelawadee UI"/>
+        <a:font script="Bopo" typeface="Microsoft JhengHei"/>
+        <a:font script="Java" typeface="Javanese Text"/>
+        <a:font script="Lisu" typeface="Segoe UI"/>
+        <a:font script="Mymr" typeface="Myanmar Text"/>
+        <a:font script="Nkoo" typeface="Ebrima"/>
+        <a:font script="Olck" typeface="Nirmala UI"/>
+        <a:font script="Osma" typeface="Ebrima"/>
+        <a:font script="Phag" typeface="Phagspa"/>
+        <a:font script="Syrn" typeface="Estrangelo Edessa"/>
+        <a:font script="Syrj" typeface="Estrangelo Edessa"/>
+        <a:font script="Syre" typeface="Estrangelo Edessa"/>
+        <a:font script="Sora" typeface="Nirmala UI"/>
+        <a:font script="Tale" typeface="Microsoft Tai Le"/>
+        <a:font script="Talu" typeface="Microsoft New Tai Lue"/>
+        <a:font script="Tfng" typeface="Ebrima"/>
+      </a:minorFont>
+    </a:fontScheme>
+    <a:fmtScheme name="Office">
+      <a:fillStyleLst>
         <a:solidFill>
           <a:schemeClr val="phClr"/>
         </a:solidFill>
@@ -9422,70 +7698,136 @@
           <a:gsLst>
             <a:gs pos="0">
               <a:schemeClr val="phClr">
-                <a:tint val="40000"/>
-                <a:satMod val="350000"/>
+                <a:lumMod val="110000"/>
+                <a:satMod val="105000"/>
+                <a:tint val="67000"/>
               </a:schemeClr>
             </a:gs>
-            <a:gs pos="40000">
+            <a:gs pos="50000">
               <a:schemeClr val="phClr">
-                <a:tint val="45000"/>
-                <a:shade val="99000"/>
-                <a:satMod val="350000"/>
+                <a:lumMod val="105000"/>
+                <a:satMod val="103000"/>
+                <a:tint val="73000"/>
               </a:schemeClr>
             </a:gs>
             <a:gs pos="100000">
               <a:schemeClr val="phClr">
-                <a:shade val="20000"/>
-                <a:satMod val="255000"/>
+                <a:lumMod val="105000"/>
+                <a:satMod val="109000"/>
+                <a:tint val="81000"/>
               </a:schemeClr>
             </a:gs>
           </a:gsLst>
-          <a:path path="circle">
-            <a:fillToRect l="50000" t="-80000" r="50000" b="180000"/>
-          </a:path>
+          <a:lin ang="5400000" scaled="0"/>
         </a:gradFill>
         <a:gradFill rotWithShape="1">
           <a:gsLst>
             <a:gs pos="0">
               <a:schemeClr val="phClr">
-                <a:tint val="80000"/>
-                <a:satMod val="300000"/>
+                <a:satMod val="103000"/>
+                <a:lumMod val="102000"/>
+                <a:tint val="94000"/>
+              </a:schemeClr>
+            </a:gs>
+            <a:gs pos="50000">
+              <a:schemeClr val="phClr">
+                <a:satMod val="110000"/>
+                <a:lumMod val="100000"/>
+                <a:shade val="100000"/>
               </a:schemeClr>
             </a:gs>
             <a:gs pos="100000">
               <a:schemeClr val="phClr">
-                <a:shade val="30000"/>
-                <a:satMod val="200000"/>
+                <a:lumMod val="99000"/>
+                <a:satMod val="120000"/>
+                <a:shade val="78000"/>
               </a:schemeClr>
             </a:gs>
           </a:gsLst>
-          <a:path path="circle">
-            <a:fillToRect l="50000" t="50000" r="50000" b="50000"/>
-          </a:path>
+          <a:lin ang="5400000" scaled="0"/>
+        </a:gradFill>
+      </a:fillStyleLst>
+      <a:lnStyleLst>
+        <a:ln w="12700" cap="flat" cmpd="sng" algn="ctr">
+          <a:solidFill>
+            <a:schemeClr val="phClr"/>
+          </a:solidFill>
+          <a:prstDash val="solid"/>
+          <a:miter lim="800000"/>
+        </a:ln>
+        <a:ln w="19050" cap="flat" cmpd="sng" algn="ctr">
+          <a:solidFill>
+            <a:schemeClr val="phClr"/>
+          </a:solidFill>
+          <a:prstDash val="solid"/>
+          <a:miter lim="800000"/>
+        </a:ln>
+        <a:ln w="25400" cap="flat" cmpd="sng" algn="ctr">
+          <a:solidFill>
+            <a:schemeClr val="phClr"/>
+          </a:solidFill>
+          <a:prstDash val="solid"/>
+          <a:miter lim="800000"/>
+        </a:ln>
+      </a:lnStyleLst>
+      <a:effectStyleLst>
+        <a:effectStyle>
+          <a:effectLst/>
+        </a:effectStyle>
+        <a:effectStyle>
+          <a:effectLst/>
+        </a:effectStyle>
+        <a:effectStyle>
+          <a:effectLst>
+            <a:outerShdw blurRad="57150" dist="19050" dir="5400000" algn="ctr" rotWithShape="0">
+              <a:srgbClr val="000000">
+                <a:alpha val="63000"/>
+              </a:srgbClr>
+            </a:outerShdw>
+          </a:effectLst>
+        </a:effectStyle>
+      </a:effectStyleLst>
+      <a:bgFillStyleLst>
+        <a:solidFill>
+          <a:schemeClr val="phClr"/>
+        </a:solidFill>
+        <a:solidFill>
+          <a:schemeClr val="phClr">
+            <a:tint val="95000"/>
+            <a:satMod val="170000"/>
+          </a:schemeClr>
+        </a:solidFill>
+        <a:gradFill rotWithShape="1">
+          <a:gsLst>
+            <a:gs pos="0">
+              <a:schemeClr val="phClr">
+                <a:tint val="93000"/>
+                <a:satMod val="150000"/>
+                <a:shade val="98000"/>
+                <a:lumMod val="102000"/>
+              </a:schemeClr>
+            </a:gs>
+            <a:gs pos="50000">
+              <a:schemeClr val="phClr">
+                <a:tint val="98000"/>
+                <a:satMod val="130000"/>
+                <a:shade val="90000"/>
+                <a:lumMod val="103000"/>
+              </a:schemeClr>
+            </a:gs>
+            <a:gs pos="100000">
+              <a:schemeClr val="phClr">
+                <a:shade val="63000"/>
+                <a:satMod val="120000"/>
+              </a:schemeClr>
+            </a:gs>
+          </a:gsLst>
+          <a:lin ang="5400000" scaled="0"/>
         </a:gradFill>
       </a:bgFillStyleLst>
     </a:fmtScheme>
   </a:themeElements>
   <a:objectDefaults>
-    <a:spDef>
-      <a:spPr/>
-      <a:bodyPr/>
-      <a:lstStyle/>
-      <a:style>
-        <a:lnRef idx="1">
-          <a:schemeClr val="accent1"/>
-        </a:lnRef>
-        <a:fillRef idx="3">
-          <a:schemeClr val="accent1"/>
-        </a:fillRef>
-        <a:effectRef idx="2">
-          <a:schemeClr val="accent1"/>
-        </a:effectRef>
-        <a:fontRef idx="minor">
-          <a:schemeClr val="lt1"/>
-        </a:fontRef>
-      </a:style>
-    </a:spDef>
     <a:lnDef>
       <a:spPr/>
       <a:bodyPr/>
@@ -9507,5 +7849,10 @@
     </a:lnDef>
   </a:objectDefaults>
   <a:extraClrSchemeLst/>
+  <a:extLst>
+    <a:ext uri="{05A4C25C-085E-4340-85A3-A5531E510DB2}">
+      <thm15:themeFamily xmlns:thm15="http://schemas.microsoft.com/office/thememl/2012/main" name="Office Theme" id="{2E142A2C-CD16-42D6-873A-C26D2A0506FA}" vid="{1BDDFF52-6CD6-40A5-AB3C-68EB2F1E4D0A}"/>
+    </a:ext>
+  </a:extLst>
 </a:theme>
 </file>
--- a/materiali_aula/Lezione2_Prompting_e_Pratica_ITS_MAKER.pptx
+++ b/materiali_aula/Lezione2_Prompting_e_Pratica_ITS_MAKER.pptx
@@ -2070,7 +2070,7 @@
           <a:lstStyle/>
           <a:p>
             <a:r>
-              <a:t>Lezione 2 · Tecniche di Prompting d'Officina e Guida Operativa degli LLM</a:t>
+              <a:t>Lezione 2 · Tecniche di prompting: trasformare testo grezzo in dati strutturati</a:t>
             </a:r>
           </a:p>
         </p:txBody>
@@ -2356,7 +2356,7 @@
               </a:defRPr>
             </a:pPr>
             <a:r>
-              <a:t>IL CASO D'OFFICINA</a:t>
+              <a:t>IL CASO PRATICO DI PRODUZIONE</a:t>
             </a:r>
           </a:p>
           <a:p>
@@ -4358,7 +4358,7 @@
                         </a:defRPr>
                       </a:pPr>
                       <a:r>
-                        <a:t>Risposte affidabili basate solo sui manuali</a:t>
+                        <a:t>Risposte affidabili basate solo sui manuali tecnici</a:t>
                       </a:r>
                     </a:p>
                   </a:txBody>
@@ -4843,7 +4843,7 @@
               </a:defRPr>
             </a:pPr>
             <a:r>
-              <a:t>Un problema d'officina per volta</a:t>
+              <a:t>Un problema di processo per volta</a:t>
             </a:r>
           </a:p>
           <a:p>
@@ -5170,7 +5170,7 @@
               </a:defRPr>
             </a:pPr>
             <a:r>
-              <a:t>1. «Basta chiacchiere»: vincoli e tabelle  |  2. «Un esempio vale 1000 parole»: Few-Shot d'officina</a:t>
+              <a:t>1. «Basta chiacchiere»: vincoli e tabelle  |  2. «Un esempio vale 1000 parole»: Few-Shot per dati di processo</a:t>
             </a:r>
             <a:br/>
             <a:r>
@@ -5311,7 +5311,7 @@
               </a:defRPr>
             </a:pPr>
             <a:r>
-              <a:t>• È un rapporto didattico reale d'officina (DOC-FERMO nel vostro repository).</a:t>
+              <a:t>• È un rapporto didattico di manutenzione (DOC-FERMO nel vostro repository).</a:t>
             </a:r>
           </a:p>
           <a:p>

--- a/materiali_aula/Lezione2_Prompting_e_Pratica_ITS_MAKER.pptx
+++ b/materiali_aula/Lezione2_Prompting_e_Pratica_ITS_MAKER.pptx
@@ -5213,7 +5213,7 @@
           <a:lstStyle/>
           <a:p>
             <a:r>
-              <a:t>Il nostro pezzo grezzo: il rapporto di fermo (DOC-FERMO)</a:t>
+              <a:t>Il nostro pezzo grezzo: il rapporto di fermo macchina</a:t>
             </a:r>
           </a:p>
         </p:txBody>
@@ -5311,7 +5311,7 @@
               </a:defRPr>
             </a:pPr>
             <a:r>
-              <a:t>• È un rapporto didattico di manutenzione (DOC-FERMO nel vostro repository).</a:t>
+              <a:t>• È un rapporto didattico di manutenzione.</a:t>
             </a:r>
           </a:p>
           <a:p>
@@ -5450,7 +5450,7 @@
               </a:defRPr>
             </a:pPr>
             <a:r>
-              <a:t>Rapporto del 14 Ottobre (DOC-FERMO):</a:t>
+              <a:t>Rapporto di fermo macchina (14 Ottobre):</a:t>
             </a:r>
             <a:br/>
             <a:br/>
